--- a/report/SSN_NeuralForge_IEEE_BigData_2026.pptx
+++ b/report/SSN_NeuralForge_IEEE_BigData_2026.pptx
@@ -19,9 +19,10 @@
     <p:sldId id="267" r:id="rId13"/>
     <p:sldId id="268" r:id="rId14"/>
     <p:sldId id="269" r:id="rId15"/>
+    <p:sldId id="270" r:id="rId16"/>
   </p:sldIdLst>
   <p:notesMasterIdLst>
-    <p:notesMasterId r:id="rId16"/>
+    <p:notesMasterId r:id="rId17"/>
   </p:notesMasterIdLst>
   <p:sldSz cx="9144000" cy="5143500"/>
   <p:notesSz cx="5143500" cy="9144000"/>
@@ -120,42 +121,43 @@
   <p:extLst>
     <p:ext uri="{521415D9-36F7-43E2-AB2F-B90AF26B5E84}">
       <p14:sectionLst xmlns:p14="http://schemas.microsoft.com/office/powerpoint/2010/main">
-        <p14:section name="Opening" id="{1b0e8884-23f0-ae2d-1ab2-ca3d688bfd89}">
+        <p14:section name="Opening" id="{550a3bf8-46fe-4cd4-5075-bf8f1844b49b}">
           <p14:sldIdLst>
             <p14:sldId id="256"/>
           </p14:sldIdLst>
         </p14:section>
-        <p14:section name="Problem" id="{49432c52-8853-a441-7eae-9ec3e4766844}">
+        <p14:section name="Problem" id="{e4b025f5-5517-4f1b-245d-5e742c859e6e}">
           <p14:sldIdLst>
             <p14:sldId id="257"/>
             <p14:sldId id="258"/>
           </p14:sldIdLst>
         </p14:section>
-        <p14:section name="Method" id="{dc3ab1ab-991b-7ef2-21f0-b4fe58620d24}">
+        <p14:section name="Method" id="{871e1602-d07f-c6db-9361-052a957841db}">
           <p14:sldIdLst>
             <p14:sldId id="259"/>
             <p14:sldId id="260"/>
             <p14:sldId id="261"/>
           </p14:sldIdLst>
         </p14:section>
-        <p14:section name="Results" id="{a9a472b0-d2c9-593d-faa6-42f6cd5e78ff}">
+        <p14:section name="Results" id="{9b861c08-4d58-9bf2-d0f3-0b354314de03}">
           <p14:sldIdLst>
             <p14:sldId id="262"/>
             <p14:sldId id="263"/>
             <p14:sldId id="264"/>
             <p14:sldId id="265"/>
+            <p14:sldId id="266"/>
           </p14:sldIdLst>
         </p14:section>
-        <p14:section name="Discussion" id="{dfcf1605-784b-8710-fe9c-78f32673bd48}">
+        <p14:section name="Discussion" id="{2c10b4f0-1a9b-cec3-8d41-620aaaa3b417}">
           <p14:sldIdLst>
-            <p14:sldId id="266"/>
             <p14:sldId id="267"/>
             <p14:sldId id="268"/>
+            <p14:sldId id="269"/>
           </p14:sldIdLst>
         </p14:section>
-        <p14:section name="Close" id="{edb49aee-2549-fece-6051-9b8572f6f241}">
+        <p14:section name="Close" id="{d8861754-1ef5-563e-97d2-c91511c2aa82}">
           <p14:sldIdLst>
-            <p14:sldId id="269"/>
+            <p14:sldId id="270"/>
           </p14:sldIdLst>
         </p14:section>
       </p14:sectionLst>
@@ -193,7 +195,7 @@
                 </a:solidFill>
                 <a:latin typeface="+mn-lt"/>
               </a:rPr>
-              <a:t>Risk Weighted F1 by seed (axis starts at 0.5)</a:t>
+              <a:t>Risk accuracy by stage (axis starts at 0.5)</a:t>
             </a:r>
           </a:p>
         </c:rich>
@@ -217,7 +219,7 @@
               <c:strCache>
                 <c:ptCount val="1"/>
                 <c:pt idx="0">
-                  <c:v>Word-only</c:v>
+                  <c:v>OOF accuracy</c:v>
                 </c:pt>
               </c:strCache>
             </c:strRef>
@@ -260,19 +262,19 @@
                 <c:ptCount val="5"/>
                 <c:lvl>
                   <c:pt idx="0">
-                    <c:v>42</c:v>
+                    <c:v>TF-IDF word</c:v>
                   </c:pt>
                   <c:pt idx="1">
-                    <c:v>52</c:v>
+                    <c:v>TF-IDF word+char</c:v>
                   </c:pt>
                   <c:pt idx="2">
-                    <c:v>62</c:v>
+                    <c:v>TF-IDF (current)</c:v>
                   </c:pt>
                   <c:pt idx="3">
-                    <c:v>72</c:v>
+                    <c:v>MentalRoBERTa</c:v>
                   </c:pt>
                   <c:pt idx="4">
-                    <c:v>82</c:v>
+                    <c:v>+ TF-IDF blend</c:v>
                   </c:pt>
                 </c:lvl>
               </c:multiLvlStrCache>
@@ -285,19 +287,19 @@
                 <c:formatCode>General</c:formatCode>
                 <c:ptCount val="5"/>
                 <c:pt idx="0">
-                  <c:v>0.64</c:v>
+                  <c:v>0.5946</c:v>
                 </c:pt>
                 <c:pt idx="1">
-                  <c:v>0.6505</c:v>
+                  <c:v>0.6169</c:v>
                 </c:pt>
                 <c:pt idx="2">
-                  <c:v>0.5876</c:v>
+                  <c:v>0.6169</c:v>
                 </c:pt>
                 <c:pt idx="3">
-                  <c:v>0.5979</c:v>
+                  <c:v>0.7571</c:v>
                 </c:pt>
                 <c:pt idx="4">
-                  <c:v>0.614</c:v>
+                  <c:v>0.7548</c:v>
                 </c:pt>
               </c:numCache>
             </c:numRef>
@@ -312,7 +314,7 @@
               <c:strCache>
                 <c:ptCount val="1"/>
                 <c:pt idx="0">
-                  <c:v>Word + char</c:v>
+                  <c:v>Held-out accuracy</c:v>
                 </c:pt>
               </c:strCache>
             </c:strRef>
@@ -355,19 +357,19 @@
                 <c:ptCount val="5"/>
                 <c:lvl>
                   <c:pt idx="0">
-                    <c:v>42</c:v>
+                    <c:v>TF-IDF word</c:v>
                   </c:pt>
                   <c:pt idx="1">
-                    <c:v>52</c:v>
+                    <c:v>TF-IDF word+char</c:v>
                   </c:pt>
                   <c:pt idx="2">
-                    <c:v>62</c:v>
+                    <c:v>TF-IDF (current)</c:v>
                   </c:pt>
                   <c:pt idx="3">
-                    <c:v>72</c:v>
+                    <c:v>MentalRoBERTa</c:v>
                   </c:pt>
                   <c:pt idx="4">
-                    <c:v>82</c:v>
+                    <c:v>+ TF-IDF blend</c:v>
                   </c:pt>
                 </c:lvl>
               </c:multiLvlStrCache>
@@ -380,19 +382,19 @@
                 <c:formatCode>General</c:formatCode>
                 <c:ptCount val="5"/>
                 <c:pt idx="0">
-                  <c:v>0.6472</c:v>
+                  <c:v>0.6061</c:v>
                 </c:pt>
                 <c:pt idx="1">
-                  <c:v>0.661</c:v>
+                  <c:v>0.6242</c:v>
                 </c:pt>
                 <c:pt idx="2">
-                  <c:v>0.6006</c:v>
+                  <c:v>0.6273</c:v>
                 </c:pt>
                 <c:pt idx="3">
-                  <c:v>0.6118</c:v>
+                  <c:v>0.7606</c:v>
                 </c:pt>
                 <c:pt idx="4">
-                  <c:v>0.6514</c:v>
+                  <c:v>0.7667</c:v>
                 </c:pt>
               </c:numCache>
             </c:numRef>
@@ -435,35 +437,6 @@
         </c:scaling>
         <c:delete val="0"/>
         <c:axPos val="b"/>
-        <c:title>
-          <c:tx>
-            <c:rich>
-              <a:bodyPr/>
-              <a:lstStyle/>
-              <a:p>
-                <a:pPr>
-                  <a:defRPr sz="1000" b="0" i="0" u="none" strike="noStrike">
-                    <a:solidFill>
-                      <a:srgbClr val="5B6B7F"/>
-                    </a:solidFill>
-                    <a:latin typeface="Arial"/>
-                  </a:defRPr>
-                </a:pPr>
-                <a:r>
-                  <a:rPr sz="1000" b="0" i="0" u="none" strike="noStrike">
-                    <a:solidFill>
-                      <a:srgbClr val="5B6B7F"/>
-                    </a:solidFill>
-                    <a:latin typeface="Arial"/>
-                  </a:rPr>
-                  <a:t>Random seed</a:t>
-                </a:r>
-              </a:p>
-            </c:rich>
-          </c:tx>
-          <c:layout/>
-          <c:overlay val="0"/>
-        </c:title>
         <c:numFmt formatCode="General" sourceLinked="1"/>
         <c:majorTickMark val="out"/>
         <c:minorTickMark val="none"/>
@@ -482,7 +455,7 @@
           <a:lstStyle/>
           <a:p>
             <a:pPr>
-              <a:defRPr sz="1000" b="0" i="0" u="none" strike="noStrike">
+              <a:defRPr sz="900" b="0" i="0" u="none" strike="noStrike">
                 <a:solidFill>
                   <a:srgbClr val="5B6B7F"/>
                 </a:solidFill>
@@ -502,7 +475,7 @@
         <c:axId val="2094734552"/>
         <c:scaling>
           <c:orientation val="minMax"/>
-          <c:max val="0.7"/>
+          <c:max val="0.8"/>
           <c:min val="0.5"/>
         </c:scaling>
         <c:delete val="0"/>
@@ -620,7 +593,7 @@
                 </a:solidFill>
                 <a:latin typeface="+mn-lt"/>
               </a:rPr>
-              <a:t>Risk F1 by class (validation)</a:t>
+              <a:t>Risk F1 by class, held-out</a:t>
             </a:r>
           </a:p>
         </c:rich>
@@ -632,7 +605,7 @@
     <c:plotArea>
       <c:layout/>
       <c:barChart>
-        <c:barDir val="bar"/>
+        <c:barDir val="col"/>
         <c:grouping val="clustered"/>
         <c:varyColors val="0"/>
         <c:ser>
@@ -644,26 +617,26 @@
               <c:strCache>
                 <c:ptCount val="1"/>
                 <c:pt idx="0">
-                  <c:v>F1</c:v>
+                  <c:v>Without</c:v>
                 </c:pt>
               </c:strCache>
             </c:strRef>
           </c:tx>
           <c:spPr>
             <a:solidFill>
-              <a:srgbClr val="2E5E8C"/>
+              <a:srgbClr val="9AA8B8"/>
             </a:solidFill>
             <a:effectLst/>
           </c:spPr>
           <c:invertIfNegative val="0"/>
           <c:dLbls>
-            <c:numFmt formatCode="0.000" sourceLinked="0"/>
+            <c:numFmt formatCode="0.00" sourceLinked="0"/>
             <c:txPr>
               <a:bodyPr/>
               <a:lstStyle/>
               <a:p>
                 <a:pPr>
-                  <a:defRPr b="0" i="0" strike="noStrike" sz="1000" u="none">
+                  <a:defRPr b="0" i="0" strike="noStrike" sz="900" u="none">
                     <a:solidFill>
                       <a:srgbClr val="0B1F3A"/>
                     </a:solidFill>
@@ -709,29 +682,118 @@
                 <c:formatCode>General</c:formatCode>
                 <c:ptCount val="4"/>
                 <c:pt idx="0">
-                  <c:v>0.796</c:v>
+                  <c:v>0.737</c:v>
                 </c:pt>
                 <c:pt idx="1">
-                  <c:v>0.571</c:v>
+                  <c:v>0.658</c:v>
                 </c:pt>
                 <c:pt idx="2">
-                  <c:v>0.536</c:v>
+                  <c:v>0.457</c:v>
                 </c:pt>
                 <c:pt idx="3">
-                  <c:v>0.415</c:v>
+                  <c:v>0.4</c:v>
+                </c:pt>
+              </c:numCache>
+            </c:numRef>
+          </c:val>
+        </c:ser>
+        <c:ser>
+          <c:idx val="1"/>
+          <c:order val="1"/>
+          <c:tx>
+            <c:strRef>
+              <c:f>Sheet1!$C$1</c:f>
+              <c:strCache>
+                <c:ptCount val="1"/>
+                <c:pt idx="0">
+                  <c:v>With</c:v>
+                </c:pt>
+              </c:strCache>
+            </c:strRef>
+          </c:tx>
+          <c:spPr>
+            <a:solidFill>
+              <a:srgbClr val="0FA3B1"/>
+            </a:solidFill>
+            <a:effectLst/>
+          </c:spPr>
+          <c:invertIfNegative val="0"/>
+          <c:dLbls>
+            <c:numFmt formatCode="0.00" sourceLinked="0"/>
+            <c:txPr>
+              <a:bodyPr/>
+              <a:lstStyle/>
+              <a:p>
+                <a:pPr>
+                  <a:defRPr b="0" i="0" strike="noStrike" sz="900" u="none">
+                    <a:solidFill>
+                      <a:srgbClr val="0B1F3A"/>
+                    </a:solidFill>
+                    <a:latin typeface="+mn-lt"/>
+                  </a:defRPr>
+                </a:pPr>
+              </a:p>
+            </c:txPr>
+            <c:showLegendKey val="0"/>
+            <c:showVal val="1"/>
+            <c:showCatName val="0"/>
+            <c:showSerName val="0"/>
+            <c:showPercent val="0"/>
+            <c:showBubbleSize val="0"/>
+            <c:showLeaderLines val="0"/>
+          </c:dLbls>
+          <c:cat>
+            <c:multiLvlStrRef>
+              <c:f>Sheet1!$A$2:$A$5</c:f>
+              <c:multiLvlStrCache>
+                <c:ptCount val="4"/>
+                <c:lvl>
+                  <c:pt idx="0">
+                    <c:v>Indicator</c:v>
+                  </c:pt>
+                  <c:pt idx="1">
+                    <c:v>Ideation</c:v>
+                  </c:pt>
+                  <c:pt idx="2">
+                    <c:v>Behavior</c:v>
+                  </c:pt>
+                  <c:pt idx="3">
+                    <c:v>Attempt</c:v>
+                  </c:pt>
+                </c:lvl>
+              </c:multiLvlStrCache>
+            </c:multiLvlStrRef>
+          </c:cat>
+          <c:val>
+            <c:numRef>
+              <c:f>Sheet1!$C$2:$C$5</c:f>
+              <c:numCache>
+                <c:formatCode>General</c:formatCode>
+                <c:ptCount val="4"/>
+                <c:pt idx="0">
+                  <c:v>0.82</c:v>
+                </c:pt>
+                <c:pt idx="1">
+                  <c:v>0.748</c:v>
+                </c:pt>
+                <c:pt idx="2">
+                  <c:v>0.738</c:v>
+                </c:pt>
+                <c:pt idx="3">
+                  <c:v>0.7</c:v>
                 </c:pt>
               </c:numCache>
             </c:numRef>
           </c:val>
         </c:ser>
         <c:dLbls>
-          <c:numFmt formatCode="0.000" sourceLinked="0"/>
+          <c:numFmt formatCode="0.00" sourceLinked="0"/>
           <c:txPr>
             <a:bodyPr/>
             <a:lstStyle/>
             <a:p>
               <a:pPr>
-                <a:defRPr b="0" i="0" strike="noStrike" sz="1000" u="none">
+                <a:defRPr b="0" i="0" strike="noStrike" sz="900" u="none">
                   <a:solidFill>
                     <a:srgbClr val="0B1F3A"/>
                   </a:solidFill>
@@ -760,11 +822,11 @@
           <c:orientation val="minMax"/>
         </c:scaling>
         <c:delete val="0"/>
-        <c:axPos val="l"/>
+        <c:axPos val="b"/>
         <c:numFmt formatCode="General" sourceLinked="1"/>
         <c:majorTickMark val="out"/>
         <c:minorTickMark val="none"/>
-        <c:tickLblPos val="nextTo"/>
+        <c:tickLblPos val="low"/>
         <c:spPr>
           <a:ln w="12700" cap="flat">
             <a:solidFill>
@@ -803,7 +865,7 @@
           <c:min val="0"/>
         </c:scaling>
         <c:delete val="0"/>
-        <c:axPos val="b"/>
+        <c:axPos val="l"/>
         <c:majorGridlines>
           <c:spPr>
             <a:ln w="6350" cap="flat">
@@ -818,7 +880,7 @@
         <c:numFmt formatCode="General" sourceLinked="0"/>
         <c:majorTickMark val="out"/>
         <c:minorTickMark val="none"/>
-        <c:tickLblPos val="low"/>
+        <c:tickLblPos val="nextTo"/>
         <c:spPr>
           <a:ln w="12700" cap="flat">
             <a:solidFill>
@@ -855,6 +917,26 @@
         <a:effectLst/>
       </c:spPr>
     </c:plotArea>
+    <c:legend>
+      <c:legendPos val="b"/>
+      <c:overlay val="0"/>
+      <c:txPr>
+        <a:bodyPr/>
+        <a:lstStyle/>
+        <a:p>
+          <a:pPr>
+            <a:defRPr sz="1000">
+              <a:solidFill>
+                <a:srgbClr val="5B6B7F"/>
+              </a:solidFill>
+              <a:latin typeface="+mn-lt"/>
+              <a:cs typeface="+mn-lt"/>
+            </a:defRPr>
+          </a:pPr>
+          <a:endParaRPr lang="en-US"/>
+        </a:p>
+      </c:txPr>
+    </c:legend>
     <c:plotVisOnly val="1"/>
     <c:dispBlanksAs val="span"/>
   </c:chart>
@@ -1267,9 +1349,9 @@
             <a:r>
               <a:rPr lang="en-US" dirty="0"/>
               <a:t>SLIDE 1 (~0:20)
-SAY: "We are SSN NeuralForge from SSN College of Engineering. Our system does not only predict suicide risk; it shows the text evidence and factors behind each prediction."
-KEY POINT: multi-task explainable NLP framework for IEEE BigData 2026 challenge.
-REMEMBER: explainability is the contribution.</a:t>
+SAY: "We are SSN NeuralForge from SSN College of Engineering. This update presents our fine-tuned transformer system and measures it against our earlier classical pipeline on identical held-out data."
+KEY POINT: explainable multi-task system; every claim is a local validation result.
+REMEMBER: risk + verbatim evidence + factors.</a:t>
             </a:r>
             <a:endParaRPr lang="en-US" dirty="0"/>
           </a:p>
@@ -1357,10 +1439,10 @@
           <a:p>
             <a:r>
               <a:rPr lang="en-US" dirty="0"/>
-              <a:t>SLIDE 10 (~0:50)
-SAY: "Model selection did not rest on one lucky split. We repeated user-grouped validation over five seeds; mean 0.634, standard deviation 0.024. Logistic regression was selected over linear SVM and a LogReg+SVM ensemble. We did not run significance tests."
-KEY POINT: seed variance (0.60-0.66) is substantial, which is why we average.
-REMEMBER: selection by measured validation performance.</a:t>
+              <a:t>SLIDE 10 (~1:00)
+SAY: "On the held-out set, risk weighted F1 is 0.767 versus 0.621 before; factor macro F1 is 0.481 versus 0.389; evidence token F1 is 0.318 versus 0.229. The biggest per-class gains are Behavior and Attempt. Attempt has only 20 held-out posts, so its figure is noisy. Evidence is a token-overlap proxy, not the official metric."
+KEY POINT: like-for-like comparison, local validation only.
+REMEMBER: risk strongest, factors improved, evidence is a proxy.</a:t>
             </a:r>
             <a:endParaRPr lang="en-US" dirty="0"/>
           </a:p>
@@ -1449,9 +1531,9 @@
             <a:r>
               <a:rPr lang="en-US" dirty="0"/>
               <a:t>SLIDE 11 (~0:50)
-SAY: "Five takeaways: risk is strongest; character n-grams help informal text; evidence replaces a black-box label; factors are hard because of 24 imbalanced labels; and per-factor thresholds help, though they were tuned on the validation split, so the gain is optimistic."
-KEY POINT: honest framing of tuning bias.
-REMEMBER: no exaggeration.</a:t>
+SAY: "All decisions are made on out-of-fold predictions; the held-out set is scored once. Intervals resample users, not posts. OOF is slightly optimistic, so we quote the held-out number. A limitation is that this protocol uses one split seed."
+KEY POINT: stricter protocol than before.
+REMEMBER: nothing is tuned on the held-out data.</a:t>
             </a:r>
             <a:endParaRPr lang="en-US" dirty="0"/>
           </a:p>
@@ -1540,9 +1622,9 @@
             <a:r>
               <a:rPr lang="en-US" dirty="0"/>
               <a:t>SLIDE 12 (~0:50)
-SAY: "This is a research prototype. Data is small, language is ambiguous, factor prediction is weak and over-predicts, and errors in both directions are possible. It should only support trained human reviewers."
-KEY POINT: responsible-AI framing.
-REMEMBER: assist, not replace.</a:t>
+SAY: "Five takeaways. The encoder drives risk. Behavior and Attempt gain most. Four in five remaining errors are between neighboring severity levels. The earlier gain from per-factor thresholds came from tuning on the evaluation split, and vanished under cross-fitting. And the evidence improvement is on a proxy metric."
+KEY POINT: correcting an earlier conclusion strengthens credibility.
+REMEMBER: be careful with small held-out counts.</a:t>
             </a:r>
             <a:endParaRPr lang="en-US" dirty="0"/>
           </a:p>
@@ -1630,10 +1712,10 @@
           <a:p>
             <a:r>
               <a:rPr lang="en-US" dirty="0"/>
-              <a:t>SLIDE 13 (~0:40)
-SAY: "The Transformer components are implemented but we have not evaluated them to completion, so we report no Transformer result. Next steps are explainable Transformers, calibration, external validation, and human-in-the-loop and fairness studies."
-KEY POINT: implemented vs future is clearly separated.
-REMEMBER: no unevaluated claims.</a:t>
+              <a:t>SLIDE 13 (~0:50)
+SAY: "The held-out set is small, we used one seed, and one backbone failed to run. Evidence is only measured by a proxy. Importantly, our evidence step sends post text to a third-party model; for sensitive data that needs approval or a locally hosted model. This is a research prototype that should only support human reviewers."
+KEY POINT: privacy and data governance.
+REMEMBER: assist, not replace.</a:t>
             </a:r>
             <a:endParaRPr lang="en-US" dirty="0"/>
           </a:p>
@@ -1721,10 +1803,10 @@
           <a:p>
             <a:r>
               <a:rPr lang="en-US" dirty="0"/>
-              <a:t>SLIDE 14 (~0:30)
-SAY: "We built an explainable multi-task pipeline whose outputs are a risk level, verbatim evidence and factors. Explainable AI should assist human judgment, not replace it. Thank you; happy to take questions."
-KEY POINT: contribution = classification + evidence + factors + validation.
-REMEMBER: assist, not replace.</a:t>
+              <a:t>SLIDE 14 (~0:40)
+SAY: "Next we will repeat with multiple seeds and backbones, ablate our fine-tuning settings, store evidence predictions so we can compute the challenge metric, and replace the hosted LLM with a local model. Longer term: calibration, fairness, cross-domain checks, and clinician-in-the-loop evaluation."
+KEY POINT: none of these is done yet.
+REMEMBER: planned, not implemented.</a:t>
             </a:r>
             <a:endParaRPr lang="en-US" dirty="0"/>
           </a:p>
@@ -1748,6 +1830,97 @@
             <a:fld id="{F7021451-1387-4CA6-816F-3879F97B5CBC}" type="slidenum">
               <a:rPr lang="en-US"/>
               <a:t>14</a:t>
+            </a:fld>
+            <a:endParaRPr lang="en-US"/>
+          </a:p>
+        </p:txBody>
+      </p:sp>
+    </p:spTree>
+    <p:extLst>
+      <p:ext uri="{BB962C8B-B14F-4D97-AF65-F5344CB8AC3E}">
+        <p14:creationId xmlns:p14="http://schemas.microsoft.com/office/powerpoint/2010/main" val="1024086991"/>
+      </p:ext>
+    </p:extLst>
+  </p:cSld>
+  <p:clrMapOvr>
+    <a:masterClrMapping/>
+  </p:clrMapOvr>
+</p:notes>
+</file>
+
+<file path=ppt/notesSlides/notesSlide15.xml><?xml version="1.0" encoding="utf-8"?>
+<p:notes xmlns:a="http://schemas.openxmlformats.org/drawingml/2006/main" xmlns:r="http://schemas.openxmlformats.org/officeDocument/2006/relationships" xmlns:p="http://schemas.openxmlformats.org/presentationml/2006/main">
+  <p:cSld>
+    <p:spTree>
+      <p:nvGrpSpPr>
+        <p:cNvPr id="1" name=""/>
+        <p:cNvGrpSpPr/>
+        <p:nvPr/>
+      </p:nvGrpSpPr>
+      <p:grpSpPr>
+        <a:xfrm>
+          <a:off x="0" y="0"/>
+          <a:ext cx="0" cy="0"/>
+          <a:chOff x="0" y="0"/>
+          <a:chExt cx="0" cy="0"/>
+        </a:xfrm>
+      </p:grpSpPr>
+      <p:sp>
+        <p:nvSpPr>
+          <p:cNvPr id="2" name="Slide Image Placeholder 1"/>
+          <p:cNvSpPr>
+            <a:spLocks noGrp="1" noRot="1" noChangeAspect="1"/>
+          </p:cNvSpPr>
+          <p:nvPr>
+            <p:ph type="sldImg"/>
+          </p:nvPr>
+        </p:nvSpPr>
+        <p:spPr/>
+      </p:sp>
+      <p:sp>
+        <p:nvSpPr>
+          <p:cNvPr id="3" name="Notes Placeholder 2"/>
+          <p:cNvSpPr>
+            <a:spLocks noGrp="1"/>
+          </p:cNvSpPr>
+          <p:nvPr>
+            <p:ph type="body" idx="1"/>
+          </p:nvPr>
+        </p:nvSpPr>
+        <p:spPr/>
+        <p:txBody>
+          <a:bodyPr/>
+          <a:lstStyle/>
+          <a:p>
+            <a:r>
+              <a:rPr lang="en-US" dirty="0"/>
+              <a:t>SLIDE 15 (~0:30)
+SAY: "On identical held-out data, fine-tuned transformers lift risk accuracy from 62 to 77 percent and improve factors and evidence, while our stricter validation corrected one earlier claim. Evidence stays verbatim but depends on an external model. Thank you; happy to take questions."
+KEY POINT: improvement is real but measured on a small set.
+REMEMBER: assist, not replace.</a:t>
+            </a:r>
+            <a:endParaRPr lang="en-US" dirty="0"/>
+          </a:p>
+        </p:txBody>
+      </p:sp>
+      <p:sp>
+        <p:nvSpPr>
+          <p:cNvPr id="4" name="Slide Number Placeholder 3"/>
+          <p:cNvSpPr>
+            <a:spLocks noGrp="1"/>
+          </p:cNvSpPr>
+          <p:nvPr>
+            <p:ph type="sldNum" sz="quarter" idx="10"/>
+          </p:nvPr>
+        </p:nvSpPr>
+        <p:spPr/>
+        <p:txBody>
+          <a:bodyPr/>
+          <a:lstStyle/>
+          <a:p>
+            <a:fld id="{F7021451-1387-4CA6-816F-3879F97B5CBC}" type="slidenum">
+              <a:rPr lang="en-US"/>
+              <a:t>15</a:t>
             </a:fld>
             <a:endParaRPr lang="en-US"/>
           </a:p>
@@ -1813,9 +1986,9 @@
             <a:r>
               <a:rPr lang="en-US" dirty="0"/>
               <a:t>SLIDE 2 (~0:40)
-SAY: "Risk language in online posts is indirect and context-dependent. A bare label is hard to audit, so we ask the model to show why."
-KEY POINT: classification + evidence enables human review.
-REMEMBER: the goal is decision support for reviewers.</a:t>
+SAY: "Risk language in online posts is indirect and context-dependent. A bare label is hard to audit, so the system also shows why."
+KEY POINT: classification plus evidence enables human review.
+REMEMBER: decision support for reviewers.</a:t>
             </a:r>
             <a:endParaRPr lang="en-US" dirty="0"/>
           </a:p>
@@ -1904,8 +2077,8 @@
             <a:r>
               <a:rPr lang="en-US" dirty="0"/>
               <a:t>SLIDE 3 (~0:40)
-SAY: "Subtask 1 asks for a four-class risk label plus supporting evidence phrases; Subtask 2 asks for 24-category multi-label factors. Training has 1,635 labeled posts; leaderboard has 378 unlabeled."
-KEY POINT: one post -&gt; three outputs.
+SAY: "Subtask 1 asks for a four-class risk label plus supporting evidence phrases; Subtask 2 asks for 24-category multi-label factors. Training has 1,635 labeled posts; the prediction file has 502 unlabeled posts."
+KEY POINT: one post, three outputs.
 REMEMBER: classification alone is not the task.</a:t>
             </a:r>
             <a:endParaRPr lang="en-US" dirty="0"/>
@@ -1994,10 +2167,10 @@
           <a:p>
             <a:r>
               <a:rPr lang="en-US" dirty="0"/>
-              <a:t>SLIDE 4 (~0:45)
-SAY: "Standard pipeline with two safeguards: a leakage check, and a validation split grouped by user so no user appears in both train and validation (122 vs 31 users)."
-KEY POINT: user-grouped split avoids optimistic scores.
-REMEMBER: 1,635 train, 378 leaderboard, 24 factors.</a:t>
+              <a:t>SLIDE 4 (~0:50)
+SAY: "Everything is split by user so no author appears on both sides. We set aside 20 percent as a held-out set (330 posts, 32 users), run five-fold grouped cross-validation on the other 1,305 posts, make every choice on out-of-fold predictions, and score the held-out set once."
+KEY POINT: nothing is tuned on the held-out set.
+REMEMBER: 1,305 development, 330 held-out.</a:t>
             </a:r>
             <a:endParaRPr lang="en-US" dirty="0"/>
           </a:p>
@@ -2086,8 +2259,8 @@
             <a:r>
               <a:rPr lang="en-US" dirty="0"/>
               <a:t>SLIDE 5 (~1:00)
-SAY: "One preprocessed post feeds three parallel branches. Risk uses word and character TF-IDF with logistic regression. Evidence scores candidate spans and keeps those above a tuned threshold. Factors use one-vs-rest logistic regression with a threshold per factor. Together they form one explainable output."
-KEY POINT: lightweight, interpretable linear models.
+SAY: "Three parallel branches. Risk uses fine-tuned MentalRoBERTa models blended with a TF-IDF classifier. Evidence uses a large language model to propose spans, and we keep only spans that match the post text exactly. Factors use a multi-label MentalRoBERTa with thresholds tuned out-of-fold."
+KEY POINT: the evidence step depends on an external LLM API, which we flag as a limitation.
 REMEMBER: three branches, one explainable output.</a:t>
             </a:r>
             <a:endParaRPr lang="en-US" dirty="0"/>
@@ -2177,9 +2350,9 @@
             <a:r>
               <a:rPr lang="en-US" dirty="0"/>
               <a:t>SLIDE 6 (~1:00)
-SAY: "Linear models on TF-IDF keep every decision inspectable. The key explainability property: the extractor only selects text from the post; it cannot invent or paraphrase."
-KEY POINT: verbatim evidence; per-factor thresholds.
-REMEMBER: nothing is generated.</a:t>
+SAY: "For risk we fine-tune MentalRoBERTa, a model pretrained on mental-health text, in five folds and blend it lightly with TF-IDF. For factors we use the same encoder with 24 outputs. For evidence, the language model proposes spans, but each one must match the post exactly or it is dropped."
+KEY POINT: verified-verbatim evidence.
+REMEMBER: nothing in the evidence is invented.</a:t>
             </a:r>
             <a:endParaRPr lang="en-US" dirty="0"/>
           </a:p>
@@ -2268,9 +2441,9 @@
             <a:r>
               <a:rPr lang="en-US" dirty="0"/>
               <a:t>SLIDE 7 (~0:50)
-SAY: "We improved the system stepwise. Adding character 3-5-gram TF-IDF to word n-grams improved risk Weighted F1 on all five seeds, with the mean rising from 0.618 to 0.634. Phrase-level evidence beat sentence-level, and per-factor thresholds beat a global 0.5 on one split."
-KEY POINT: improvements measured over multiple seeds where available.
-REMEMBER: evidence and factor gains are single-split numbers.</a:t>
+SAY: "Here is what changed. Models: from TF-IDF linear models to fine-tuned transformers. Evidence: from a trained span scorer to LLM selection with exact-match verification. Protocol: from a single split with thresholds tuned on the evaluation data to nested user-grouped validation with a held-out set scored once."
+KEY POINT: the earlier pipeline was re-run on the same split, so comparisons are like-for-like.
+REMEMBER: both model and protocol changed.</a:t>
             </a:r>
             <a:endParaRPr lang="en-US" dirty="0"/>
           </a:p>
@@ -2358,10 +2531,10 @@
           <a:p>
             <a:r>
               <a:rPr lang="en-US" dirty="0"/>
-              <a:t>SLIDE 8 (~1:00)
-SAY: "This is a real annotated example from the training set: label Ideation, evidence 'wanna die', factor hopelessness. The same three-part output is what the system produces for unseen posts. Spans are exact substrings; our validation script checked 323 submitted spans and found none that were not verbatim."
-KEY POINT: shown values are the dataset annotation, illustrating the output format.
-REMEMBER: evidence is extracted, never generated.</a:t>
+              <a:t>SLIDE 8 (~0:50)
+SAY: "Almost all of the risk gain comes from the encoder: out-of-fold accuracy goes from 0.617 for TF-IDF to 0.757. The TF-IDF blend moves accuracy by less than a point either way, so we cannot claim it helps. We changed several fine-tuning settings together, so we do not attribute the gain to any one of them."
+KEY POINT: honest attribution.
+REMEMBER: the encoder is the driver; the blend is not demonstrated.</a:t>
             </a:r>
             <a:endParaRPr lang="en-US" dirty="0"/>
           </a:p>
@@ -2450,9 +2623,9 @@
             <a:r>
               <a:rPr lang="en-US" dirty="0"/>
               <a:t>SLIDE 9 (~1:00)
-SAY: "On our held-out validation split: risk Weighted F1 0.647, evidence Phrase F1 0.560, factor Macro F1 0.442. These are validation scores, not leaderboard scores. Per class, Indicator is strongest at 0.80, Attempt weakest at 0.42 because it is rare."
-KEY POINT: be explicit that these are validation numbers with different metrics.
-REMEMBER: risk strongest, factors hardest.</a:t>
+SAY: "This is a real held-out prediction. Risk Ideation at 0.94 probability and factor low self-esteem both match the annotation. The selected evidence is the whole short post, where the annotator marked only 'want to kill myself'. That granularity gap is the main weakness of our evidence step."
+KEY POINT: honest example showing strength and weakness.
+REMEMBER: evidence is copied from the post, but selection is imperfect.</a:t>
             </a:r>
             <a:endParaRPr lang="en-US" dirty="0"/>
           </a:p>
@@ -3804,7 +3977,7 @@
                 <a:ea typeface="Cambria" pitchFamily="34" charset="-122"/>
                 <a:cs typeface="Cambria" pitchFamily="34" charset="-120"/>
               </a:rPr>
-              <a:t>Robust Validation Strategy</a:t>
+              <a:t>Current Model Performance</a:t>
             </a:r>
             <a:endParaRPr lang="en-US" sz="3000" dirty="0"/>
           </a:p>
@@ -3812,18 +3985,18 @@
       </p:sp>
       <p:sp>
         <p:nvSpPr>
-          <p:cNvPr id="3" name="seed"/>
-          <p:cNvSpPr/>
-          <p:nvPr/>
-        </p:nvSpPr>
-        <p:spPr>
-          <a:xfrm>
-            <a:off x="457200" y="1097280"/>
-            <a:ext cx="1463040" cy="822960"/>
+          <p:cNvPr id="3" name="card"/>
+          <p:cNvSpPr/>
+          <p:nvPr/>
+        </p:nvSpPr>
+        <p:spPr>
+          <a:xfrm>
+            <a:off x="457200" y="1051560"/>
+            <a:ext cx="2560320" cy="1417320"/>
           </a:xfrm>
           <a:prstGeom prst="roundRect">
             <a:avLst>
-              <a:gd name="adj" fmla="val 8889"/>
+              <a:gd name="adj" fmla="val 5161"/>
             </a:avLst>
           </a:prstGeom>
           <a:solidFill>
@@ -3854,8 +4027,8 @@
         </p:nvSpPr>
         <p:spPr>
           <a:xfrm>
-            <a:off x="548640" y="1161288"/>
-            <a:ext cx="1280160" cy="274320"/>
+            <a:off x="594360" y="1143000"/>
+            <a:ext cx="2286000" cy="228600"/>
           </a:xfrm>
           <a:prstGeom prst="rect">
             <a:avLst/>
@@ -3867,18 +4040,18 @@
           <a:bodyPr wrap="square" lIns="0" tIns="0" rIns="0" bIns="0" rtlCol="0" anchor="t"/>
           <a:lstStyle/>
           <a:p>
-            <a:pPr algn="ctr" indent="0" marL="0">
-              <a:buNone/>
-            </a:pPr>
-            <a:r>
-              <a:rPr lang="en-US" sz="1200" dirty="0">
-                <a:solidFill>
-                  <a:schemeClr val="accent3"/>
-                </a:solidFill>
-              </a:rPr>
-              <a:t>Seed 42</a:t>
-            </a:r>
-            <a:endParaRPr lang="en-US" sz="1200" dirty="0"/>
+            <a:pPr algn="l" indent="0" marL="0">
+              <a:buNone/>
+            </a:pPr>
+            <a:r>
+              <a:rPr lang="en-US" sz="1100" b="1" dirty="0">
+                <a:solidFill>
+                  <a:schemeClr val="accent2"/>
+                </a:solidFill>
+              </a:rPr>
+              <a:t>RISK CLASSIFICATION</a:t>
+            </a:r>
+            <a:endParaRPr lang="en-US" sz="1100" dirty="0"/>
           </a:p>
         </p:txBody>
       </p:sp>
@@ -3890,8 +4063,8 @@
         </p:nvSpPr>
         <p:spPr>
           <a:xfrm>
-            <a:off x="548640" y="1444752"/>
-            <a:ext cx="1280160" cy="365760"/>
+            <a:off x="594360" y="1371600"/>
+            <a:ext cx="2286000" cy="685800"/>
           </a:xfrm>
           <a:prstGeom prst="rect">
             <a:avLst/>
@@ -3903,59 +4076,71 @@
           <a:bodyPr wrap="square" lIns="0" tIns="0" rIns="0" bIns="0" rtlCol="0" anchor="t"/>
           <a:lstStyle/>
           <a:p>
-            <a:pPr algn="ctr" indent="0" marL="0">
-              <a:buNone/>
-            </a:pPr>
-            <a:r>
-              <a:rPr lang="en-US" sz="2000" b="1" dirty="0">
+            <a:pPr algn="l" indent="0" marL="0">
+              <a:buNone/>
+            </a:pPr>
+            <a:r>
+              <a:rPr lang="en-US" sz="4400" b="1" dirty="0">
                 <a:solidFill>
                   <a:schemeClr val="tx1"/>
                 </a:solidFill>
               </a:rPr>
-              <a:t>0.6472</a:t>
-            </a:r>
-            <a:endParaRPr lang="en-US" sz="2000" dirty="0"/>
-          </a:p>
-        </p:txBody>
-      </p:sp>
-      <p:sp>
-        <p:nvSpPr>
-          <p:cNvPr id="6" name="Shape 4"/>
-          <p:cNvSpPr/>
-          <p:nvPr/>
-        </p:nvSpPr>
-        <p:spPr>
-          <a:xfrm>
-            <a:off x="1188720" y="1920240"/>
-            <a:ext cx="0" cy="320040"/>
-          </a:xfrm>
-          <a:prstGeom prst="line">
-            <a:avLst/>
-          </a:prstGeom>
-          <a:noFill/>
-          <a:ln w="19050">
-            <a:solidFill>
-              <a:schemeClr val="accent3"/>
-            </a:solidFill>
-            <a:prstDash val="solid"/>
-            <a:tailEnd type="triangle"/>
-          </a:ln>
-        </p:spPr>
-      </p:sp>
-      <p:sp>
-        <p:nvSpPr>
-          <p:cNvPr id="7" name="seed"/>
-          <p:cNvSpPr/>
-          <p:nvPr/>
-        </p:nvSpPr>
-        <p:spPr>
-          <a:xfrm>
-            <a:off x="2148840" y="1097280"/>
-            <a:ext cx="1463040" cy="822960"/>
+              <a:t>0.7671</a:t>
+            </a:r>
+            <a:endParaRPr lang="en-US" sz="4400" dirty="0"/>
+          </a:p>
+        </p:txBody>
+      </p:sp>
+      <p:sp>
+        <p:nvSpPr>
+          <p:cNvPr id="6" name="Text 4"/>
+          <p:cNvSpPr txBox="1"/>
+          <p:nvPr/>
+        </p:nvSpPr>
+        <p:spPr>
+          <a:xfrm>
+            <a:off x="594360" y="2103120"/>
+            <a:ext cx="2377440" cy="274320"/>
+          </a:xfrm>
+          <a:prstGeom prst="rect">
+            <a:avLst/>
+          </a:prstGeom>
+          <a:noFill/>
+          <a:ln/>
+        </p:spPr>
+        <p:txBody>
+          <a:bodyPr wrap="square" lIns="0" tIns="0" rIns="0" bIns="0" rtlCol="0" anchor="t"/>
+          <a:lstStyle/>
+          <a:p>
+            <a:pPr algn="l" indent="0" marL="0">
+              <a:buNone/>
+            </a:pPr>
+            <a:r>
+              <a:rPr lang="en-US" sz="1300" dirty="0">
+                <a:solidFill>
+                  <a:schemeClr val="accent3"/>
+                </a:solidFill>
+              </a:rPr>
+              <a:t>Weighted F1  |  was 0.6209</a:t>
+            </a:r>
+            <a:endParaRPr lang="en-US" sz="1300" dirty="0"/>
+          </a:p>
+        </p:txBody>
+      </p:sp>
+      <p:sp>
+        <p:nvSpPr>
+          <p:cNvPr id="7" name="card"/>
+          <p:cNvSpPr/>
+          <p:nvPr/>
+        </p:nvSpPr>
+        <p:spPr>
+          <a:xfrm>
+            <a:off x="3291840" y="1051560"/>
+            <a:ext cx="2560320" cy="1417320"/>
           </a:xfrm>
           <a:prstGeom prst="roundRect">
             <a:avLst>
-              <a:gd name="adj" fmla="val 8889"/>
+              <a:gd name="adj" fmla="val 5161"/>
             </a:avLst>
           </a:prstGeom>
           <a:solidFill>
@@ -3986,8 +4171,8 @@
         </p:nvSpPr>
         <p:spPr>
           <a:xfrm>
-            <a:off x="2240280" y="1161288"/>
-            <a:ext cx="1280160" cy="274320"/>
+            <a:off x="3429000" y="1143000"/>
+            <a:ext cx="2286000" cy="228600"/>
           </a:xfrm>
           <a:prstGeom prst="rect">
             <a:avLst/>
@@ -3999,18 +4184,18 @@
           <a:bodyPr wrap="square" lIns="0" tIns="0" rIns="0" bIns="0" rtlCol="0" anchor="t"/>
           <a:lstStyle/>
           <a:p>
-            <a:pPr algn="ctr" indent="0" marL="0">
-              <a:buNone/>
-            </a:pPr>
-            <a:r>
-              <a:rPr lang="en-US" sz="1200" dirty="0">
-                <a:solidFill>
-                  <a:schemeClr val="accent3"/>
-                </a:solidFill>
-              </a:rPr>
-              <a:t>Seed 52</a:t>
-            </a:r>
-            <a:endParaRPr lang="en-US" sz="1200" dirty="0"/>
+            <a:pPr algn="l" indent="0" marL="0">
+              <a:buNone/>
+            </a:pPr>
+            <a:r>
+              <a:rPr lang="en-US" sz="1100" b="1" dirty="0">
+                <a:solidFill>
+                  <a:schemeClr val="accent5"/>
+                </a:solidFill>
+              </a:rPr>
+              <a:t>FACTOR IDENTIFICATION</a:t>
+            </a:r>
+            <a:endParaRPr lang="en-US" sz="1100" dirty="0"/>
           </a:p>
         </p:txBody>
       </p:sp>
@@ -4022,8 +4207,8 @@
         </p:nvSpPr>
         <p:spPr>
           <a:xfrm>
-            <a:off x="2240280" y="1444752"/>
-            <a:ext cx="1280160" cy="365760"/>
+            <a:off x="3429000" y="1371600"/>
+            <a:ext cx="2286000" cy="685800"/>
           </a:xfrm>
           <a:prstGeom prst="rect">
             <a:avLst/>
@@ -4035,59 +4220,71 @@
           <a:bodyPr wrap="square" lIns="0" tIns="0" rIns="0" bIns="0" rtlCol="0" anchor="t"/>
           <a:lstStyle/>
           <a:p>
-            <a:pPr algn="ctr" indent="0" marL="0">
-              <a:buNone/>
-            </a:pPr>
-            <a:r>
-              <a:rPr lang="en-US" sz="2000" b="1" dirty="0">
+            <a:pPr algn="l" indent="0" marL="0">
+              <a:buNone/>
+            </a:pPr>
+            <a:r>
+              <a:rPr lang="en-US" sz="4400" b="1" dirty="0">
                 <a:solidFill>
                   <a:schemeClr val="tx1"/>
                 </a:solidFill>
               </a:rPr>
-              <a:t>0.6610</a:t>
-            </a:r>
-            <a:endParaRPr lang="en-US" sz="2000" dirty="0"/>
-          </a:p>
-        </p:txBody>
-      </p:sp>
-      <p:sp>
-        <p:nvSpPr>
-          <p:cNvPr id="10" name="Shape 8"/>
-          <p:cNvSpPr/>
-          <p:nvPr/>
-        </p:nvSpPr>
-        <p:spPr>
-          <a:xfrm>
-            <a:off x="2880360" y="1920240"/>
-            <a:ext cx="0" cy="320040"/>
-          </a:xfrm>
-          <a:prstGeom prst="line">
-            <a:avLst/>
-          </a:prstGeom>
-          <a:noFill/>
-          <a:ln w="19050">
-            <a:solidFill>
-              <a:schemeClr val="accent3"/>
-            </a:solidFill>
-            <a:prstDash val="solid"/>
-            <a:tailEnd type="triangle"/>
-          </a:ln>
-        </p:spPr>
-      </p:sp>
-      <p:sp>
-        <p:nvSpPr>
-          <p:cNvPr id="11" name="seed"/>
-          <p:cNvSpPr/>
-          <p:nvPr/>
-        </p:nvSpPr>
-        <p:spPr>
-          <a:xfrm>
-            <a:off x="3840480" y="1097280"/>
-            <a:ext cx="1463040" cy="822960"/>
+              <a:t>0.4811</a:t>
+            </a:r>
+            <a:endParaRPr lang="en-US" sz="4400" dirty="0"/>
+          </a:p>
+        </p:txBody>
+      </p:sp>
+      <p:sp>
+        <p:nvSpPr>
+          <p:cNvPr id="10" name="Text 8"/>
+          <p:cNvSpPr txBox="1"/>
+          <p:nvPr/>
+        </p:nvSpPr>
+        <p:spPr>
+          <a:xfrm>
+            <a:off x="3429000" y="2103120"/>
+            <a:ext cx="2377440" cy="274320"/>
+          </a:xfrm>
+          <a:prstGeom prst="rect">
+            <a:avLst/>
+          </a:prstGeom>
+          <a:noFill/>
+          <a:ln/>
+        </p:spPr>
+        <p:txBody>
+          <a:bodyPr wrap="square" lIns="0" tIns="0" rIns="0" bIns="0" rtlCol="0" anchor="t"/>
+          <a:lstStyle/>
+          <a:p>
+            <a:pPr algn="l" indent="0" marL="0">
+              <a:buNone/>
+            </a:pPr>
+            <a:r>
+              <a:rPr lang="en-US" sz="1300" dirty="0">
+                <a:solidFill>
+                  <a:schemeClr val="accent3"/>
+                </a:solidFill>
+              </a:rPr>
+              <a:t>Macro F1  |  was 0.3888</a:t>
+            </a:r>
+            <a:endParaRPr lang="en-US" sz="1300" dirty="0"/>
+          </a:p>
+        </p:txBody>
+      </p:sp>
+      <p:sp>
+        <p:nvSpPr>
+          <p:cNvPr id="11" name="card"/>
+          <p:cNvSpPr/>
+          <p:nvPr/>
+        </p:nvSpPr>
+        <p:spPr>
+          <a:xfrm>
+            <a:off x="6126480" y="1051560"/>
+            <a:ext cx="2560320" cy="1417320"/>
           </a:xfrm>
           <a:prstGeom prst="roundRect">
             <a:avLst>
-              <a:gd name="adj" fmla="val 8889"/>
+              <a:gd name="adj" fmla="val 5161"/>
             </a:avLst>
           </a:prstGeom>
           <a:solidFill>
@@ -4118,8 +4315,8 @@
         </p:nvSpPr>
         <p:spPr>
           <a:xfrm>
-            <a:off x="3931920" y="1161288"/>
-            <a:ext cx="1280160" cy="274320"/>
+            <a:off x="6263640" y="1143000"/>
+            <a:ext cx="2286000" cy="228600"/>
           </a:xfrm>
           <a:prstGeom prst="rect">
             <a:avLst/>
@@ -4131,18 +4328,18 @@
           <a:bodyPr wrap="square" lIns="0" tIns="0" rIns="0" bIns="0" rtlCol="0" anchor="t"/>
           <a:lstStyle/>
           <a:p>
-            <a:pPr algn="ctr" indent="0" marL="0">
-              <a:buNone/>
-            </a:pPr>
-            <a:r>
-              <a:rPr lang="en-US" sz="1200" dirty="0">
-                <a:solidFill>
-                  <a:schemeClr val="accent3"/>
-                </a:solidFill>
-              </a:rPr>
-              <a:t>Seed 62</a:t>
-            </a:r>
-            <a:endParaRPr lang="en-US" sz="1200" dirty="0"/>
+            <a:pPr algn="l" indent="0" marL="0">
+              <a:buNone/>
+            </a:pPr>
+            <a:r>
+              <a:rPr lang="en-US" sz="1100" b="1" dirty="0">
+                <a:solidFill>
+                  <a:schemeClr val="accent1"/>
+                </a:solidFill>
+              </a:rPr>
+              <a:t>EVIDENCE (TOKEN PROXY)</a:t>
+            </a:r>
+            <a:endParaRPr lang="en-US" sz="1100" dirty="0"/>
           </a:p>
         </p:txBody>
       </p:sp>
@@ -4154,8 +4351,8 @@
         </p:nvSpPr>
         <p:spPr>
           <a:xfrm>
-            <a:off x="3931920" y="1444752"/>
-            <a:ext cx="1280160" cy="365760"/>
+            <a:off x="6263640" y="1371600"/>
+            <a:ext cx="2286000" cy="685800"/>
           </a:xfrm>
           <a:prstGeom prst="rect">
             <a:avLst/>
@@ -4167,499 +4364,198 @@
           <a:bodyPr wrap="square" lIns="0" tIns="0" rIns="0" bIns="0" rtlCol="0" anchor="t"/>
           <a:lstStyle/>
           <a:p>
-            <a:pPr algn="ctr" indent="0" marL="0">
-              <a:buNone/>
-            </a:pPr>
-            <a:r>
-              <a:rPr lang="en-US" sz="2000" b="1" dirty="0">
+            <a:pPr algn="l" indent="0" marL="0">
+              <a:buNone/>
+            </a:pPr>
+            <a:r>
+              <a:rPr lang="en-US" sz="4400" b="1" dirty="0">
                 <a:solidFill>
                   <a:schemeClr val="tx1"/>
                 </a:solidFill>
               </a:rPr>
-              <a:t>0.6006</a:t>
-            </a:r>
-            <a:endParaRPr lang="en-US" sz="2000" dirty="0"/>
-          </a:p>
-        </p:txBody>
-      </p:sp>
-      <p:sp>
-        <p:nvSpPr>
-          <p:cNvPr id="14" name="Shape 12"/>
-          <p:cNvSpPr/>
-          <p:nvPr/>
-        </p:nvSpPr>
-        <p:spPr>
-          <a:xfrm>
-            <a:off x="4572000" y="1920240"/>
-            <a:ext cx="0" cy="320040"/>
-          </a:xfrm>
-          <a:prstGeom prst="line">
-            <a:avLst/>
-          </a:prstGeom>
-          <a:noFill/>
-          <a:ln w="19050">
-            <a:solidFill>
-              <a:schemeClr val="accent3"/>
-            </a:solidFill>
-            <a:prstDash val="solid"/>
-            <a:tailEnd type="triangle"/>
-          </a:ln>
-        </p:spPr>
-      </p:sp>
-      <p:sp>
-        <p:nvSpPr>
-          <p:cNvPr id="15" name="seed"/>
-          <p:cNvSpPr/>
-          <p:nvPr/>
-        </p:nvSpPr>
-        <p:spPr>
-          <a:xfrm>
-            <a:off x="5532120" y="1097280"/>
-            <a:ext cx="1463040" cy="822960"/>
-          </a:xfrm>
-          <a:prstGeom prst="roundRect">
-            <a:avLst>
-              <a:gd name="adj" fmla="val 8889"/>
-            </a:avLst>
-          </a:prstGeom>
-          <a:solidFill>
-            <a:schemeClr val="bg2"/>
-          </a:solidFill>
-          <a:ln w="12700">
-            <a:solidFill>
-              <a:schemeClr val="bg2"/>
-            </a:solidFill>
-          </a:ln>
-        </p:spPr>
-        <p:txBody>
-          <a:bodyPr wrap="square" lIns="762" tIns="762" rIns="762" bIns="762" rtlCol="0" anchor="ctr"/>
-          <a:lstStyle/>
-          <a:p>
-            <a:pPr algn="ctr" indent="0" marL="0">
-              <a:buNone/>
-            </a:pPr>
+              <a:t>0.318</a:t>
+            </a:r>
+            <a:endParaRPr lang="en-US" sz="4400" dirty="0"/>
+          </a:p>
+        </p:txBody>
+      </p:sp>
+      <p:sp>
+        <p:nvSpPr>
+          <p:cNvPr id="14" name="Text 12"/>
+          <p:cNvSpPr txBox="1"/>
+          <p:nvPr/>
+        </p:nvSpPr>
+        <p:spPr>
+          <a:xfrm>
+            <a:off x="6263640" y="2103120"/>
+            <a:ext cx="2377440" cy="274320"/>
+          </a:xfrm>
+          <a:prstGeom prst="rect">
+            <a:avLst/>
+          </a:prstGeom>
+          <a:noFill/>
+          <a:ln/>
+        </p:spPr>
+        <p:txBody>
+          <a:bodyPr wrap="square" lIns="0" tIns="0" rIns="0" bIns="0" rtlCol="0" anchor="t"/>
+          <a:lstStyle/>
+          <a:p>
+            <a:pPr algn="l" indent="0" marL="0">
+              <a:buNone/>
+            </a:pPr>
+            <a:r>
+              <a:rPr lang="en-US" sz="1300" dirty="0">
+                <a:solidFill>
+                  <a:schemeClr val="accent3"/>
+                </a:solidFill>
+              </a:rPr>
+              <a:t>Token F1  |  was 0.229</a:t>
+            </a:r>
+            <a:endParaRPr lang="en-US" sz="1300" dirty="0"/>
+          </a:p>
+        </p:txBody>
+      </p:sp>
+      <p:graphicFrame>
+        <p:nvGraphicFramePr>
+          <p:cNvPr id="15" name="Chart 0" descr=""/>
+          <p:cNvGraphicFramePr/>
+          <p:nvPr/>
+        </p:nvGraphicFramePr>
+        <p:xfrm>
+          <a:off x="457200" y="2606040"/>
+          <a:ext cx="5120640" cy="2103120"/>
+        </p:xfrm>
+        <a:graphic xmlns:a="http://schemas.openxmlformats.org/drawingml/2006/main">
+          <a:graphicData uri="http://schemas.openxmlformats.org/drawingml/2006/chart">
+            <c:chart xmlns:c="http://schemas.openxmlformats.org/drawingml/2006/chart" r:id="rId1"/>
+          </a:graphicData>
+        </a:graphic>
+      </p:graphicFrame>
+      <p:sp>
+        <p:nvSpPr>
+          <p:cNvPr id="16" name="Text 13"/>
+          <p:cNvSpPr txBox="1"/>
+          <p:nvPr/>
+        </p:nvSpPr>
+        <p:spPr>
+          <a:xfrm>
+            <a:off x="5852160" y="2697480"/>
+            <a:ext cx="2834640" cy="274320"/>
+          </a:xfrm>
+          <a:prstGeom prst="rect">
+            <a:avLst/>
+          </a:prstGeom>
+          <a:noFill/>
+          <a:ln/>
+        </p:spPr>
+        <p:txBody>
+          <a:bodyPr wrap="square" lIns="0" tIns="0" rIns="0" bIns="0" rtlCol="0" anchor="t"/>
+          <a:lstStyle/>
+          <a:p>
+            <a:pPr algn="l" indent="0" marL="0">
+              <a:buNone/>
+            </a:pPr>
+            <a:r>
+              <a:rPr lang="en-US" sz="1400" b="1" dirty="0">
+                <a:solidFill>
+                  <a:schemeClr val="tx1"/>
+                </a:solidFill>
+              </a:rPr>
+              <a:t>Evaluation basis</a:t>
+            </a:r>
+            <a:endParaRPr lang="en-US" sz="1400" dirty="0"/>
+          </a:p>
+        </p:txBody>
+      </p:sp>
+      <p:sp>
+        <p:nvSpPr>
+          <p:cNvPr id="17" name="Text 14"/>
+          <p:cNvSpPr txBox="1"/>
+          <p:nvPr/>
+        </p:nvSpPr>
+        <p:spPr>
+          <a:xfrm>
+            <a:off x="5852160" y="3017520"/>
+            <a:ext cx="2834640" cy="1645920"/>
+          </a:xfrm>
+          <a:prstGeom prst="rect">
+            <a:avLst/>
+          </a:prstGeom>
+          <a:noFill/>
+          <a:ln/>
+        </p:spPr>
+        <p:txBody>
+          <a:bodyPr wrap="square" lIns="0" tIns="0" rIns="0" bIns="0" rtlCol="0" anchor="t"/>
+          <a:lstStyle/>
+          <a:p>
+            <a:pPr marL="342900" indent="-342900">
+              <a:spcAft>
+                <a:spcPts val="600"/>
+              </a:spcAft>
+              <a:buSzPct val="100000"/>
+              <a:buChar char="•"/>
+            </a:pPr>
+            <a:r>
+              <a:rPr lang="en-US" sz="1200" dirty="0">
+                <a:solidFill>
+                  <a:schemeClr val="tx1"/>
+                </a:solidFill>
+              </a:rPr>
+              <a:t>Held-out: 330 posts, 32 users, scored once</a:t>
+            </a:r>
             <a:endParaRPr lang="en-US" sz="1200" dirty="0"/>
           </a:p>
-        </p:txBody>
-      </p:sp>
-      <p:sp>
-        <p:nvSpPr>
-          <p:cNvPr id="16" name="Text 14"/>
-          <p:cNvSpPr txBox="1"/>
-          <p:nvPr/>
-        </p:nvSpPr>
-        <p:spPr>
-          <a:xfrm>
-            <a:off x="5623560" y="1161288"/>
-            <a:ext cx="1280160" cy="274320"/>
-          </a:xfrm>
-          <a:prstGeom prst="rect">
-            <a:avLst/>
-          </a:prstGeom>
-          <a:noFill/>
-          <a:ln/>
-        </p:spPr>
-        <p:txBody>
-          <a:bodyPr wrap="square" lIns="0" tIns="0" rIns="0" bIns="0" rtlCol="0" anchor="t"/>
-          <a:lstStyle/>
-          <a:p>
-            <a:pPr algn="ctr" indent="0" marL="0">
-              <a:buNone/>
+          <a:p>
+            <a:pPr marL="342900" indent="-342900">
+              <a:spcAft>
+                <a:spcPts val="600"/>
+              </a:spcAft>
+              <a:buSzPct val="100000"/>
+              <a:buChar char="•"/>
             </a:pPr>
             <a:r>
               <a:rPr lang="en-US" sz="1200" dirty="0">
                 <a:solidFill>
-                  <a:schemeClr val="accent3"/>
-                </a:solidFill>
-              </a:rPr>
-              <a:t>Seed 72</a:t>
+                  <a:schemeClr val="tx1"/>
+                </a:solidFill>
+              </a:rPr>
+              <a:t>Risk accuracy 76.7% (95% CI 72.1–80.9)</a:t>
             </a:r>
             <a:endParaRPr lang="en-US" sz="1200" dirty="0"/>
           </a:p>
-        </p:txBody>
-      </p:sp>
-      <p:sp>
-        <p:nvSpPr>
-          <p:cNvPr id="17" name="Text 15"/>
-          <p:cNvSpPr txBox="1"/>
-          <p:nvPr/>
-        </p:nvSpPr>
-        <p:spPr>
-          <a:xfrm>
-            <a:off x="5623560" y="1444752"/>
-            <a:ext cx="1280160" cy="365760"/>
-          </a:xfrm>
-          <a:prstGeom prst="rect">
-            <a:avLst/>
-          </a:prstGeom>
-          <a:noFill/>
-          <a:ln/>
-        </p:spPr>
-        <p:txBody>
-          <a:bodyPr wrap="square" lIns="0" tIns="0" rIns="0" bIns="0" rtlCol="0" anchor="t"/>
-          <a:lstStyle/>
-          <a:p>
-            <a:pPr algn="ctr" indent="0" marL="0">
-              <a:buNone/>
-            </a:pPr>
-            <a:r>
-              <a:rPr lang="en-US" sz="2000" b="1" dirty="0">
+          <a:p>
+            <a:pPr marL="342900" indent="-342900">
+              <a:spcAft>
+                <a:spcPts val="600"/>
+              </a:spcAft>
+              <a:buSzPct val="100000"/>
+              <a:buChar char="•"/>
+            </a:pPr>
+            <a:r>
+              <a:rPr lang="en-US" sz="1200" dirty="0">
                 <a:solidFill>
                   <a:schemeClr val="tx1"/>
                 </a:solidFill>
               </a:rPr>
-              <a:t>0.6118</a:t>
-            </a:r>
-            <a:endParaRPr lang="en-US" sz="2000" dirty="0"/>
-          </a:p>
-        </p:txBody>
-      </p:sp>
-      <p:sp>
-        <p:nvSpPr>
-          <p:cNvPr id="18" name="Shape 16"/>
-          <p:cNvSpPr/>
-          <p:nvPr/>
-        </p:nvSpPr>
-        <p:spPr>
-          <a:xfrm>
-            <a:off x="6263640" y="1920240"/>
-            <a:ext cx="0" cy="320040"/>
-          </a:xfrm>
-          <a:prstGeom prst="line">
-            <a:avLst/>
-          </a:prstGeom>
-          <a:noFill/>
-          <a:ln w="19050">
-            <a:solidFill>
-              <a:schemeClr val="accent3"/>
-            </a:solidFill>
-            <a:prstDash val="solid"/>
-            <a:tailEnd type="triangle"/>
-          </a:ln>
-        </p:spPr>
-      </p:sp>
-      <p:sp>
-        <p:nvSpPr>
-          <p:cNvPr id="19" name="seed"/>
-          <p:cNvSpPr/>
-          <p:nvPr/>
-        </p:nvSpPr>
-        <p:spPr>
-          <a:xfrm>
-            <a:off x="7223760" y="1097280"/>
-            <a:ext cx="1463040" cy="822960"/>
-          </a:xfrm>
-          <a:prstGeom prst="roundRect">
-            <a:avLst>
-              <a:gd name="adj" fmla="val 8889"/>
-            </a:avLst>
-          </a:prstGeom>
-          <a:solidFill>
-            <a:schemeClr val="bg2"/>
-          </a:solidFill>
-          <a:ln w="12700">
-            <a:solidFill>
-              <a:schemeClr val="bg2"/>
-            </a:solidFill>
-          </a:ln>
-        </p:spPr>
-        <p:txBody>
-          <a:bodyPr wrap="square" lIns="762" tIns="762" rIns="762" bIns="762" rtlCol="0" anchor="ctr"/>
-          <a:lstStyle/>
-          <a:p>
-            <a:pPr algn="ctr" indent="0" marL="0">
-              <a:buNone/>
-            </a:pPr>
+              <a:t>“Was” = earlier pipeline re-run on this split</a:t>
+            </a:r>
             <a:endParaRPr lang="en-US" sz="1200" dirty="0"/>
           </a:p>
-        </p:txBody>
-      </p:sp>
-      <p:sp>
-        <p:nvSpPr>
-          <p:cNvPr id="20" name="Text 18"/>
-          <p:cNvSpPr txBox="1"/>
-          <p:nvPr/>
-        </p:nvSpPr>
-        <p:spPr>
-          <a:xfrm>
-            <a:off x="7315200" y="1161288"/>
-            <a:ext cx="1280160" cy="274320"/>
-          </a:xfrm>
-          <a:prstGeom prst="rect">
-            <a:avLst/>
-          </a:prstGeom>
-          <a:noFill/>
-          <a:ln/>
-        </p:spPr>
-        <p:txBody>
-          <a:bodyPr wrap="square" lIns="0" tIns="0" rIns="0" bIns="0" rtlCol="0" anchor="t"/>
-          <a:lstStyle/>
-          <a:p>
-            <a:pPr algn="ctr" indent="0" marL="0">
-              <a:buNone/>
+          <a:p>
+            <a:pPr marL="342900" indent="-342900">
+              <a:spcAft>
+                <a:spcPts val="600"/>
+              </a:spcAft>
+              <a:buSzPct val="100000"/>
+              <a:buChar char="•"/>
             </a:pPr>
             <a:r>
               <a:rPr lang="en-US" sz="1200" dirty="0">
                 <a:solidFill>
-                  <a:schemeClr val="accent3"/>
-                </a:solidFill>
-              </a:rPr>
-              <a:t>Seed 82</a:t>
-            </a:r>
-            <a:endParaRPr lang="en-US" sz="1200" dirty="0"/>
-          </a:p>
-        </p:txBody>
-      </p:sp>
-      <p:sp>
-        <p:nvSpPr>
-          <p:cNvPr id="21" name="Text 19"/>
-          <p:cNvSpPr txBox="1"/>
-          <p:nvPr/>
-        </p:nvSpPr>
-        <p:spPr>
-          <a:xfrm>
-            <a:off x="7315200" y="1444752"/>
-            <a:ext cx="1280160" cy="365760"/>
-          </a:xfrm>
-          <a:prstGeom prst="rect">
-            <a:avLst/>
-          </a:prstGeom>
-          <a:noFill/>
-          <a:ln/>
-        </p:spPr>
-        <p:txBody>
-          <a:bodyPr wrap="square" lIns="0" tIns="0" rIns="0" bIns="0" rtlCol="0" anchor="t"/>
-          <a:lstStyle/>
-          <a:p>
-            <a:pPr algn="ctr" indent="0" marL="0">
-              <a:buNone/>
-            </a:pPr>
-            <a:r>
-              <a:rPr lang="en-US" sz="2000" b="1" dirty="0">
-                <a:solidFill>
                   <a:schemeClr val="tx1"/>
                 </a:solidFill>
               </a:rPr>
-              <a:t>0.6514</a:t>
-            </a:r>
-            <a:endParaRPr lang="en-US" sz="2000" dirty="0"/>
-          </a:p>
-        </p:txBody>
-      </p:sp>
-      <p:sp>
-        <p:nvSpPr>
-          <p:cNvPr id="22" name="Shape 20"/>
-          <p:cNvSpPr/>
-          <p:nvPr/>
-        </p:nvSpPr>
-        <p:spPr>
-          <a:xfrm>
-            <a:off x="7955280" y="1920240"/>
-            <a:ext cx="0" cy="320040"/>
-          </a:xfrm>
-          <a:prstGeom prst="line">
-            <a:avLst/>
-          </a:prstGeom>
-          <a:noFill/>
-          <a:ln w="19050">
-            <a:solidFill>
-              <a:schemeClr val="accent3"/>
-            </a:solidFill>
-            <a:prstDash val="solid"/>
-            <a:tailEnd type="triangle"/>
-          </a:ln>
-        </p:spPr>
-      </p:sp>
-      <p:sp>
-        <p:nvSpPr>
-          <p:cNvPr id="23" name="Shape 21"/>
-          <p:cNvSpPr/>
-          <p:nvPr/>
-        </p:nvSpPr>
-        <p:spPr>
-          <a:xfrm>
-            <a:off x="1188720" y="2240280"/>
-            <a:ext cx="6766560" cy="0"/>
-          </a:xfrm>
-          <a:prstGeom prst="line">
-            <a:avLst/>
-          </a:prstGeom>
-          <a:noFill/>
-          <a:ln w="19050">
-            <a:solidFill>
-              <a:schemeClr val="accent3"/>
-            </a:solidFill>
-            <a:prstDash val="solid"/>
-          </a:ln>
-        </p:spPr>
-      </p:sp>
-      <p:sp>
-        <p:nvSpPr>
-          <p:cNvPr id="24" name="Shape 22"/>
-          <p:cNvSpPr/>
-          <p:nvPr/>
-        </p:nvSpPr>
-        <p:spPr>
-          <a:xfrm>
-            <a:off x="4572000" y="2240280"/>
-            <a:ext cx="0" cy="182880"/>
-          </a:xfrm>
-          <a:prstGeom prst="line">
-            <a:avLst/>
-          </a:prstGeom>
-          <a:noFill/>
-          <a:ln w="19050">
-            <a:solidFill>
-              <a:schemeClr val="accent3"/>
-            </a:solidFill>
-            <a:prstDash val="solid"/>
-            <a:tailEnd type="triangle"/>
-          </a:ln>
-        </p:spPr>
-      </p:sp>
-      <p:sp>
-        <p:nvSpPr>
-          <p:cNvPr id="25" name="mean"/>
-          <p:cNvSpPr/>
-          <p:nvPr/>
-        </p:nvSpPr>
-        <p:spPr>
-          <a:xfrm>
-            <a:off x="3017520" y="2423160"/>
-            <a:ext cx="3108960" cy="731520"/>
-          </a:xfrm>
-          <a:prstGeom prst="roundRect">
-            <a:avLst>
-              <a:gd name="adj" fmla="val 10000"/>
-            </a:avLst>
-          </a:prstGeom>
-          <a:solidFill>
-            <a:schemeClr val="accent6"/>
-          </a:solidFill>
-          <a:ln w="12700">
-            <a:solidFill>
-              <a:schemeClr val="accent6"/>
-            </a:solidFill>
-          </a:ln>
-        </p:spPr>
-        <p:txBody>
-          <a:bodyPr wrap="square" lIns="762" tIns="762" rIns="762" bIns="762" rtlCol="0" anchor="ctr"/>
-          <a:lstStyle/>
-          <a:p>
-            <a:pPr algn="ctr" indent="0" marL="0">
-              <a:buNone/>
-            </a:pPr>
-            <a:r>
-              <a:rPr lang="en-US" sz="1500" b="1" dirty="0">
-                <a:solidFill>
-                  <a:schemeClr val="tx1"/>
-                </a:solidFill>
-              </a:rPr>
-              <a:t>Mean Weighted F1 0.634 (std 0.024)</a:t>
-            </a:r>
-            <a:endParaRPr lang="en-US" sz="1500" dirty="0"/>
-          </a:p>
-        </p:txBody>
-      </p:sp>
-      <p:sp>
-        <p:nvSpPr>
-          <p:cNvPr id="26" name="Shape 24"/>
-          <p:cNvSpPr/>
-          <p:nvPr/>
-        </p:nvSpPr>
-        <p:spPr>
-          <a:xfrm>
-            <a:off x="4572000" y="3154680"/>
-            <a:ext cx="0" cy="182880"/>
-          </a:xfrm>
-          <a:prstGeom prst="line">
-            <a:avLst/>
-          </a:prstGeom>
-          <a:noFill/>
-          <a:ln w="19050">
-            <a:solidFill>
-              <a:schemeClr val="accent3"/>
-            </a:solidFill>
-            <a:prstDash val="solid"/>
-            <a:tailEnd type="triangle"/>
-          </a:ln>
-        </p:spPr>
-      </p:sp>
-      <p:sp>
-        <p:nvSpPr>
-          <p:cNvPr id="27" name="sel"/>
-          <p:cNvSpPr/>
-          <p:nvPr/>
-        </p:nvSpPr>
-        <p:spPr>
-          <a:xfrm>
-            <a:off x="2103120" y="3337560"/>
-            <a:ext cx="4937760" cy="594360"/>
-          </a:xfrm>
-          <a:prstGeom prst="roundRect">
-            <a:avLst>
-              <a:gd name="adj" fmla="val 12308"/>
-            </a:avLst>
-          </a:prstGeom>
-          <a:solidFill>
-            <a:schemeClr val="accent1"/>
-          </a:solidFill>
-          <a:ln w="12700">
-            <a:solidFill>
-              <a:schemeClr val="accent1"/>
-            </a:solidFill>
-          </a:ln>
-        </p:spPr>
-        <p:txBody>
-          <a:bodyPr wrap="square" lIns="762" tIns="762" rIns="762" bIns="762" rtlCol="0" anchor="ctr"/>
-          <a:lstStyle/>
-          <a:p>
-            <a:pPr algn="ctr" indent="0" marL="0">
-              <a:buNone/>
-            </a:pPr>
-            <a:r>
-              <a:rPr lang="en-US" sz="1500" b="1" dirty="0">
-                <a:solidFill>
-                  <a:schemeClr val="bg1"/>
-                </a:solidFill>
-              </a:rPr>
-              <a:t>Final model: word + char TF-IDF + Logistic Regression</a:t>
-            </a:r>
-            <a:endParaRPr lang="en-US" sz="1500" dirty="0"/>
-          </a:p>
-        </p:txBody>
-      </p:sp>
-      <p:sp>
-        <p:nvSpPr>
-          <p:cNvPr id="28" name="Text 26"/>
-          <p:cNvSpPr txBox="1"/>
-          <p:nvPr/>
-        </p:nvSpPr>
-        <p:spPr>
-          <a:xfrm>
-            <a:off x="457200" y="4069080"/>
-            <a:ext cx="8229600" cy="594360"/>
-          </a:xfrm>
-          <a:prstGeom prst="rect">
-            <a:avLst/>
-          </a:prstGeom>
-          <a:noFill/>
-          <a:ln/>
-        </p:spPr>
-        <p:txBody>
-          <a:bodyPr wrap="square" lIns="0" tIns="0" rIns="0" bIns="0" rtlCol="0" anchor="t"/>
-          <a:lstStyle/>
-          <a:p>
-            <a:pPr algn="ctr" indent="0" marL="0">
-              <a:buNone/>
-            </a:pPr>
-            <a:r>
-              <a:rPr lang="en-US" sz="1200" dirty="0">
-                <a:solidFill>
-                  <a:schemeClr val="accent3"/>
-                </a:solidFill>
-              </a:rPr>
-              <a:t>Risk Weighted F1 on word + char features, 5 random user-grouped splits. 5-seed means: LogReg 0.634, Linear SVM 0.617, LogReg + SVM ensemble 0.634. No significance test was run.</a:t>
+              <a:t>Local validation, not official scores</a:t>
             </a:r>
             <a:endParaRPr lang="en-US" sz="1200" dirty="0"/>
           </a:p>
@@ -4770,7 +4666,7 @@
                 <a:ea typeface="Cambria" pitchFamily="34" charset="-122"/>
                 <a:cs typeface="Cambria" pitchFamily="34" charset="-120"/>
               </a:rPr>
-              <a:t>What the Results Tell Us</a:t>
+              <a:t>Robust Validation Strategy</a:t>
             </a:r>
             <a:endParaRPr lang="en-US" sz="3000" dirty="0"/>
           </a:p>
@@ -4778,17 +4674,547 @@
       </p:sp>
       <p:sp>
         <p:nvSpPr>
-          <p:cNvPr id="3" name="Shape 1"/>
-          <p:cNvSpPr/>
-          <p:nvPr/>
-        </p:nvSpPr>
-        <p:spPr>
-          <a:xfrm>
-            <a:off x="457200" y="1097280"/>
-            <a:ext cx="457200" cy="457200"/>
-          </a:xfrm>
-          <a:prstGeom prst="ellipse">
-            <a:avLst/>
+          <p:cNvPr id="3" name="stage"/>
+          <p:cNvSpPr/>
+          <p:nvPr/>
+        </p:nvSpPr>
+        <p:spPr>
+          <a:xfrm>
+            <a:off x="457200" y="1371600"/>
+            <a:ext cx="1508760" cy="1371600"/>
+          </a:xfrm>
+          <a:prstGeom prst="roundRect">
+            <a:avLst>
+              <a:gd name="adj" fmla="val 5333"/>
+            </a:avLst>
+          </a:prstGeom>
+          <a:solidFill>
+            <a:schemeClr val="bg2"/>
+          </a:solidFill>
+          <a:ln w="12700">
+            <a:solidFill>
+              <a:schemeClr val="bg2"/>
+            </a:solidFill>
+          </a:ln>
+        </p:spPr>
+        <p:txBody>
+          <a:bodyPr wrap="square" lIns="762" tIns="762" rIns="762" bIns="762" rtlCol="0" anchor="ctr"/>
+          <a:lstStyle/>
+          <a:p>
+            <a:pPr algn="ctr" indent="0" marL="0">
+              <a:buNone/>
+            </a:pPr>
+            <a:endParaRPr lang="en-US" sz="1200" dirty="0"/>
+          </a:p>
+        </p:txBody>
+      </p:sp>
+      <p:sp>
+        <p:nvSpPr>
+          <p:cNvPr id="4" name="Text 2"/>
+          <p:cNvSpPr txBox="1"/>
+          <p:nvPr/>
+        </p:nvSpPr>
+        <p:spPr>
+          <a:xfrm>
+            <a:off x="548640" y="1463040"/>
+            <a:ext cx="1325880" cy="502920"/>
+          </a:xfrm>
+          <a:prstGeom prst="rect">
+            <a:avLst/>
+          </a:prstGeom>
+          <a:noFill/>
+          <a:ln/>
+        </p:spPr>
+        <p:txBody>
+          <a:bodyPr wrap="square" lIns="0" tIns="0" rIns="0" bIns="0" rtlCol="0" anchor="t"/>
+          <a:lstStyle/>
+          <a:p>
+            <a:pPr algn="ctr" indent="0" marL="0">
+              <a:buNone/>
+            </a:pPr>
+            <a:r>
+              <a:rPr lang="en-US" sz="1300" b="1" dirty="0">
+                <a:solidFill>
+                  <a:schemeClr val="tx1"/>
+                </a:solidFill>
+              </a:rPr>
+              <a:t>Development set</a:t>
+            </a:r>
+            <a:endParaRPr lang="en-US" sz="1300" dirty="0"/>
+          </a:p>
+        </p:txBody>
+      </p:sp>
+      <p:sp>
+        <p:nvSpPr>
+          <p:cNvPr id="5" name="Text 3"/>
+          <p:cNvSpPr txBox="1"/>
+          <p:nvPr/>
+        </p:nvSpPr>
+        <p:spPr>
+          <a:xfrm>
+            <a:off x="548640" y="2011680"/>
+            <a:ext cx="1325880" cy="685800"/>
+          </a:xfrm>
+          <a:prstGeom prst="rect">
+            <a:avLst/>
+          </a:prstGeom>
+          <a:noFill/>
+          <a:ln/>
+        </p:spPr>
+        <p:txBody>
+          <a:bodyPr wrap="square" lIns="0" tIns="0" rIns="0" bIns="0" rtlCol="0" anchor="t"/>
+          <a:lstStyle/>
+          <a:p>
+            <a:pPr algn="ctr" indent="0" marL="0">
+              <a:buNone/>
+            </a:pPr>
+            <a:r>
+              <a:rPr lang="en-US" sz="1100" dirty="0">
+                <a:solidFill>
+                  <a:schemeClr val="accent3"/>
+                </a:solidFill>
+              </a:rPr>
+              <a:t>1,305 posts, 121 users</a:t>
+            </a:r>
+            <a:endParaRPr lang="en-US" sz="1100" dirty="0"/>
+          </a:p>
+        </p:txBody>
+      </p:sp>
+      <p:sp>
+        <p:nvSpPr>
+          <p:cNvPr id="6" name="Shape 4"/>
+          <p:cNvSpPr/>
+          <p:nvPr/>
+        </p:nvSpPr>
+        <p:spPr>
+          <a:xfrm>
+            <a:off x="1965960" y="2057400"/>
+            <a:ext cx="182880" cy="0"/>
+          </a:xfrm>
+          <a:prstGeom prst="line">
+            <a:avLst/>
+          </a:prstGeom>
+          <a:noFill/>
+          <a:ln w="19050">
+            <a:solidFill>
+              <a:schemeClr val="accent3"/>
+            </a:solidFill>
+            <a:prstDash val="solid"/>
+            <a:tailEnd type="triangle"/>
+          </a:ln>
+        </p:spPr>
+      </p:sp>
+      <p:sp>
+        <p:nvSpPr>
+          <p:cNvPr id="7" name="stage"/>
+          <p:cNvSpPr/>
+          <p:nvPr/>
+        </p:nvSpPr>
+        <p:spPr>
+          <a:xfrm>
+            <a:off x="2148840" y="1371600"/>
+            <a:ext cx="1508760" cy="1371600"/>
+          </a:xfrm>
+          <a:prstGeom prst="roundRect">
+            <a:avLst>
+              <a:gd name="adj" fmla="val 5333"/>
+            </a:avLst>
+          </a:prstGeom>
+          <a:solidFill>
+            <a:schemeClr val="bg2"/>
+          </a:solidFill>
+          <a:ln w="12700">
+            <a:solidFill>
+              <a:schemeClr val="bg2"/>
+            </a:solidFill>
+          </a:ln>
+        </p:spPr>
+        <p:txBody>
+          <a:bodyPr wrap="square" lIns="762" tIns="762" rIns="762" bIns="762" rtlCol="0" anchor="ctr"/>
+          <a:lstStyle/>
+          <a:p>
+            <a:pPr algn="ctr" indent="0" marL="0">
+              <a:buNone/>
+            </a:pPr>
+            <a:endParaRPr lang="en-US" sz="1200" dirty="0"/>
+          </a:p>
+        </p:txBody>
+      </p:sp>
+      <p:sp>
+        <p:nvSpPr>
+          <p:cNvPr id="8" name="Text 6"/>
+          <p:cNvSpPr txBox="1"/>
+          <p:nvPr/>
+        </p:nvSpPr>
+        <p:spPr>
+          <a:xfrm>
+            <a:off x="2240280" y="1463040"/>
+            <a:ext cx="1325880" cy="502920"/>
+          </a:xfrm>
+          <a:prstGeom prst="rect">
+            <a:avLst/>
+          </a:prstGeom>
+          <a:noFill/>
+          <a:ln/>
+        </p:spPr>
+        <p:txBody>
+          <a:bodyPr wrap="square" lIns="0" tIns="0" rIns="0" bIns="0" rtlCol="0" anchor="t"/>
+          <a:lstStyle/>
+          <a:p>
+            <a:pPr algn="ctr" indent="0" marL="0">
+              <a:buNone/>
+            </a:pPr>
+            <a:r>
+              <a:rPr lang="en-US" sz="1300" b="1" dirty="0">
+                <a:solidFill>
+                  <a:schemeClr val="tx1"/>
+                </a:solidFill>
+              </a:rPr>
+              <a:t>5-fold grouped CV</a:t>
+            </a:r>
+            <a:endParaRPr lang="en-US" sz="1300" dirty="0"/>
+          </a:p>
+        </p:txBody>
+      </p:sp>
+      <p:sp>
+        <p:nvSpPr>
+          <p:cNvPr id="9" name="Text 7"/>
+          <p:cNvSpPr txBox="1"/>
+          <p:nvPr/>
+        </p:nvSpPr>
+        <p:spPr>
+          <a:xfrm>
+            <a:off x="2240280" y="2011680"/>
+            <a:ext cx="1325880" cy="685800"/>
+          </a:xfrm>
+          <a:prstGeom prst="rect">
+            <a:avLst/>
+          </a:prstGeom>
+          <a:noFill/>
+          <a:ln/>
+        </p:spPr>
+        <p:txBody>
+          <a:bodyPr wrap="square" lIns="0" tIns="0" rIns="0" bIns="0" rtlCol="0" anchor="t"/>
+          <a:lstStyle/>
+          <a:p>
+            <a:pPr algn="ctr" indent="0" marL="0">
+              <a:buNone/>
+            </a:pPr>
+            <a:r>
+              <a:rPr lang="en-US" sz="1100" dirty="0">
+                <a:solidFill>
+                  <a:schemeClr val="accent3"/>
+                </a:solidFill>
+              </a:rPr>
+              <a:t>models never see a fold's users</a:t>
+            </a:r>
+            <a:endParaRPr lang="en-US" sz="1100" dirty="0"/>
+          </a:p>
+        </p:txBody>
+      </p:sp>
+      <p:sp>
+        <p:nvSpPr>
+          <p:cNvPr id="10" name="Shape 8"/>
+          <p:cNvSpPr/>
+          <p:nvPr/>
+        </p:nvSpPr>
+        <p:spPr>
+          <a:xfrm>
+            <a:off x="3657600" y="2057400"/>
+            <a:ext cx="182880" cy="0"/>
+          </a:xfrm>
+          <a:prstGeom prst="line">
+            <a:avLst/>
+          </a:prstGeom>
+          <a:noFill/>
+          <a:ln w="19050">
+            <a:solidFill>
+              <a:schemeClr val="accent3"/>
+            </a:solidFill>
+            <a:prstDash val="solid"/>
+            <a:tailEnd type="triangle"/>
+          </a:ln>
+        </p:spPr>
+      </p:sp>
+      <p:sp>
+        <p:nvSpPr>
+          <p:cNvPr id="11" name="stage"/>
+          <p:cNvSpPr/>
+          <p:nvPr/>
+        </p:nvSpPr>
+        <p:spPr>
+          <a:xfrm>
+            <a:off x="3840480" y="1371600"/>
+            <a:ext cx="1508760" cy="1371600"/>
+          </a:xfrm>
+          <a:prstGeom prst="roundRect">
+            <a:avLst>
+              <a:gd name="adj" fmla="val 5333"/>
+            </a:avLst>
+          </a:prstGeom>
+          <a:solidFill>
+            <a:schemeClr val="bg2"/>
+          </a:solidFill>
+          <a:ln w="12700">
+            <a:solidFill>
+              <a:schemeClr val="bg2"/>
+            </a:solidFill>
+          </a:ln>
+        </p:spPr>
+        <p:txBody>
+          <a:bodyPr wrap="square" lIns="762" tIns="762" rIns="762" bIns="762" rtlCol="0" anchor="ctr"/>
+          <a:lstStyle/>
+          <a:p>
+            <a:pPr algn="ctr" indent="0" marL="0">
+              <a:buNone/>
+            </a:pPr>
+            <a:endParaRPr lang="en-US" sz="1200" dirty="0"/>
+          </a:p>
+        </p:txBody>
+      </p:sp>
+      <p:sp>
+        <p:nvSpPr>
+          <p:cNvPr id="12" name="Text 10"/>
+          <p:cNvSpPr txBox="1"/>
+          <p:nvPr/>
+        </p:nvSpPr>
+        <p:spPr>
+          <a:xfrm>
+            <a:off x="3931920" y="1463040"/>
+            <a:ext cx="1325880" cy="502920"/>
+          </a:xfrm>
+          <a:prstGeom prst="rect">
+            <a:avLst/>
+          </a:prstGeom>
+          <a:noFill/>
+          <a:ln/>
+        </p:spPr>
+        <p:txBody>
+          <a:bodyPr wrap="square" lIns="0" tIns="0" rIns="0" bIns="0" rtlCol="0" anchor="t"/>
+          <a:lstStyle/>
+          <a:p>
+            <a:pPr algn="ctr" indent="0" marL="0">
+              <a:buNone/>
+            </a:pPr>
+            <a:r>
+              <a:rPr lang="en-US" sz="1300" b="1" dirty="0">
+                <a:solidFill>
+                  <a:schemeClr val="tx1"/>
+                </a:solidFill>
+              </a:rPr>
+              <a:t>OOF predictions</a:t>
+            </a:r>
+            <a:endParaRPr lang="en-US" sz="1300" dirty="0"/>
+          </a:p>
+        </p:txBody>
+      </p:sp>
+      <p:sp>
+        <p:nvSpPr>
+          <p:cNvPr id="13" name="Text 11"/>
+          <p:cNvSpPr txBox="1"/>
+          <p:nvPr/>
+        </p:nvSpPr>
+        <p:spPr>
+          <a:xfrm>
+            <a:off x="3931920" y="2011680"/>
+            <a:ext cx="1325880" cy="685800"/>
+          </a:xfrm>
+          <a:prstGeom prst="rect">
+            <a:avLst/>
+          </a:prstGeom>
+          <a:noFill/>
+          <a:ln/>
+        </p:spPr>
+        <p:txBody>
+          <a:bodyPr wrap="square" lIns="0" tIns="0" rIns="0" bIns="0" rtlCol="0" anchor="t"/>
+          <a:lstStyle/>
+          <a:p>
+            <a:pPr algn="ctr" indent="0" marL="0">
+              <a:buNone/>
+            </a:pPr>
+            <a:r>
+              <a:rPr lang="en-US" sz="1100" dirty="0">
+                <a:solidFill>
+                  <a:schemeClr val="accent3"/>
+                </a:solidFill>
+              </a:rPr>
+              <a:t>acc 75.5%, macro F1 71.4%</a:t>
+            </a:r>
+            <a:endParaRPr lang="en-US" sz="1100" dirty="0"/>
+          </a:p>
+        </p:txBody>
+      </p:sp>
+      <p:sp>
+        <p:nvSpPr>
+          <p:cNvPr id="14" name="Shape 12"/>
+          <p:cNvSpPr/>
+          <p:nvPr/>
+        </p:nvSpPr>
+        <p:spPr>
+          <a:xfrm>
+            <a:off x="5349240" y="2057400"/>
+            <a:ext cx="182880" cy="0"/>
+          </a:xfrm>
+          <a:prstGeom prst="line">
+            <a:avLst/>
+          </a:prstGeom>
+          <a:noFill/>
+          <a:ln w="19050">
+            <a:solidFill>
+              <a:schemeClr val="accent3"/>
+            </a:solidFill>
+            <a:prstDash val="solid"/>
+            <a:tailEnd type="triangle"/>
+          </a:ln>
+        </p:spPr>
+      </p:sp>
+      <p:sp>
+        <p:nvSpPr>
+          <p:cNvPr id="15" name="stage"/>
+          <p:cNvSpPr/>
+          <p:nvPr/>
+        </p:nvSpPr>
+        <p:spPr>
+          <a:xfrm>
+            <a:off x="5532120" y="1371600"/>
+            <a:ext cx="1508760" cy="1371600"/>
+          </a:xfrm>
+          <a:prstGeom prst="roundRect">
+            <a:avLst>
+              <a:gd name="adj" fmla="val 5333"/>
+            </a:avLst>
+          </a:prstGeom>
+          <a:solidFill>
+            <a:schemeClr val="bg2"/>
+          </a:solidFill>
+          <a:ln w="12700">
+            <a:solidFill>
+              <a:schemeClr val="bg2"/>
+            </a:solidFill>
+          </a:ln>
+        </p:spPr>
+        <p:txBody>
+          <a:bodyPr wrap="square" lIns="762" tIns="762" rIns="762" bIns="762" rtlCol="0" anchor="ctr"/>
+          <a:lstStyle/>
+          <a:p>
+            <a:pPr algn="ctr" indent="0" marL="0">
+              <a:buNone/>
+            </a:pPr>
+            <a:endParaRPr lang="en-US" sz="1200" dirty="0"/>
+          </a:p>
+        </p:txBody>
+      </p:sp>
+      <p:sp>
+        <p:nvSpPr>
+          <p:cNvPr id="16" name="Text 14"/>
+          <p:cNvSpPr txBox="1"/>
+          <p:nvPr/>
+        </p:nvSpPr>
+        <p:spPr>
+          <a:xfrm>
+            <a:off x="5623560" y="1463040"/>
+            <a:ext cx="1325880" cy="502920"/>
+          </a:xfrm>
+          <a:prstGeom prst="rect">
+            <a:avLst/>
+          </a:prstGeom>
+          <a:noFill/>
+          <a:ln/>
+        </p:spPr>
+        <p:txBody>
+          <a:bodyPr wrap="square" lIns="0" tIns="0" rIns="0" bIns="0" rtlCol="0" anchor="t"/>
+          <a:lstStyle/>
+          <a:p>
+            <a:pPr algn="ctr" indent="0" marL="0">
+              <a:buNone/>
+            </a:pPr>
+            <a:r>
+              <a:rPr lang="en-US" sz="1300" b="1" dirty="0">
+                <a:solidFill>
+                  <a:schemeClr val="tx1"/>
+                </a:solidFill>
+              </a:rPr>
+              <a:t>Choices on OOF only</a:t>
+            </a:r>
+            <a:endParaRPr lang="en-US" sz="1300" dirty="0"/>
+          </a:p>
+        </p:txBody>
+      </p:sp>
+      <p:sp>
+        <p:nvSpPr>
+          <p:cNvPr id="17" name="Text 15"/>
+          <p:cNvSpPr txBox="1"/>
+          <p:nvPr/>
+        </p:nvSpPr>
+        <p:spPr>
+          <a:xfrm>
+            <a:off x="5623560" y="2011680"/>
+            <a:ext cx="1325880" cy="685800"/>
+          </a:xfrm>
+          <a:prstGeom prst="rect">
+            <a:avLst/>
+          </a:prstGeom>
+          <a:noFill/>
+          <a:ln/>
+        </p:spPr>
+        <p:txBody>
+          <a:bodyPr wrap="square" lIns="0" tIns="0" rIns="0" bIns="0" rtlCol="0" anchor="t"/>
+          <a:lstStyle/>
+          <a:p>
+            <a:pPr algn="ctr" indent="0" marL="0">
+              <a:buNone/>
+            </a:pPr>
+            <a:r>
+              <a:rPr lang="en-US" sz="1100" dirty="0">
+                <a:solidFill>
+                  <a:schemeClr val="accent3"/>
+                </a:solidFill>
+              </a:rPr>
+              <a:t>blend w = 0.20; factor thresholds</a:t>
+            </a:r>
+            <a:endParaRPr lang="en-US" sz="1100" dirty="0"/>
+          </a:p>
+        </p:txBody>
+      </p:sp>
+      <p:sp>
+        <p:nvSpPr>
+          <p:cNvPr id="18" name="Shape 16"/>
+          <p:cNvSpPr/>
+          <p:nvPr/>
+        </p:nvSpPr>
+        <p:spPr>
+          <a:xfrm>
+            <a:off x="7040880" y="2057400"/>
+            <a:ext cx="182880" cy="0"/>
+          </a:xfrm>
+          <a:prstGeom prst="line">
+            <a:avLst/>
+          </a:prstGeom>
+          <a:noFill/>
+          <a:ln w="19050">
+            <a:solidFill>
+              <a:schemeClr val="accent3"/>
+            </a:solidFill>
+            <a:prstDash val="solid"/>
+            <a:tailEnd type="triangle"/>
+          </a:ln>
+        </p:spPr>
+      </p:sp>
+      <p:sp>
+        <p:nvSpPr>
+          <p:cNvPr id="19" name="stage"/>
+          <p:cNvSpPr/>
+          <p:nvPr/>
+        </p:nvSpPr>
+        <p:spPr>
+          <a:xfrm>
+            <a:off x="7223760" y="1371600"/>
+            <a:ext cx="1508760" cy="1371600"/>
+          </a:xfrm>
+          <a:prstGeom prst="roundRect">
+            <a:avLst>
+              <a:gd name="adj" fmla="val 5333"/>
+            </a:avLst>
           </a:prstGeom>
           <a:solidFill>
             <a:schemeClr val="accent1"/>
@@ -4797,20 +5223,29 @@
             <a:solidFill>
               <a:schemeClr val="accent1"/>
             </a:solidFill>
-            <a:prstDash val="solid"/>
-          </a:ln>
-        </p:spPr>
-      </p:sp>
-      <p:sp>
-        <p:nvSpPr>
-          <p:cNvPr id="4" name="Text 2"/>
+          </a:ln>
+        </p:spPr>
+        <p:txBody>
+          <a:bodyPr wrap="square" lIns="762" tIns="762" rIns="762" bIns="762" rtlCol="0" anchor="ctr"/>
+          <a:lstStyle/>
+          <a:p>
+            <a:pPr algn="ctr" indent="0" marL="0">
+              <a:buNone/>
+            </a:pPr>
+            <a:endParaRPr lang="en-US" sz="1200" dirty="0"/>
+          </a:p>
+        </p:txBody>
+      </p:sp>
+      <p:sp>
+        <p:nvSpPr>
+          <p:cNvPr id="20" name="Text 18"/>
           <p:cNvSpPr txBox="1"/>
           <p:nvPr/>
         </p:nvSpPr>
         <p:spPr>
           <a:xfrm>
-            <a:off x="457200" y="1097280"/>
-            <a:ext cx="457200" cy="457200"/>
+            <a:off x="7315200" y="1463040"/>
+            <a:ext cx="1325880" cy="502920"/>
           </a:xfrm>
           <a:prstGeom prst="rect">
             <a:avLst/>
@@ -4819,34 +5254,34 @@
           <a:ln/>
         </p:spPr>
         <p:txBody>
-          <a:bodyPr wrap="square" lIns="0" tIns="0" rIns="0" bIns="0" rtlCol="0" anchor="ctr"/>
+          <a:bodyPr wrap="square" lIns="0" tIns="0" rIns="0" bIns="0" rtlCol="0" anchor="t"/>
           <a:lstStyle/>
           <a:p>
             <a:pPr algn="ctr" indent="0" marL="0">
               <a:buNone/>
             </a:pPr>
             <a:r>
-              <a:rPr lang="en-US" sz="1600" b="1" dirty="0">
+              <a:rPr lang="en-US" sz="1300" b="1" dirty="0">
                 <a:solidFill>
                   <a:schemeClr val="bg1"/>
                 </a:solidFill>
               </a:rPr>
-              <a:t>1</a:t>
-            </a:r>
-            <a:endParaRPr lang="en-US" sz="1600" dirty="0"/>
-          </a:p>
-        </p:txBody>
-      </p:sp>
-      <p:sp>
-        <p:nvSpPr>
-          <p:cNvPr id="5" name="Text 3"/>
+              <a:t>Held-out, scored once</a:t>
+            </a:r>
+            <a:endParaRPr lang="en-US" sz="1300" dirty="0"/>
+          </a:p>
+        </p:txBody>
+      </p:sp>
+      <p:sp>
+        <p:nvSpPr>
+          <p:cNvPr id="21" name="Text 19"/>
           <p:cNvSpPr txBox="1"/>
           <p:nvPr/>
         </p:nvSpPr>
         <p:spPr>
           <a:xfrm>
-            <a:off x="1143000" y="1051560"/>
-            <a:ext cx="7498080" cy="594360"/>
+            <a:off x="7315200" y="2011680"/>
+            <a:ext cx="1325880" cy="685800"/>
           </a:xfrm>
           <a:prstGeom prst="rect">
             <a:avLst/>
@@ -4855,479 +5290,115 @@
           <a:ln/>
         </p:spPr>
         <p:txBody>
-          <a:bodyPr wrap="square" lIns="0" tIns="0" rIns="0" bIns="0" rtlCol="0" anchor="ctr"/>
-          <a:lstStyle/>
-          <a:p>
-            <a:pPr algn="l" indent="0" marL="0">
-              <a:buNone/>
-            </a:pPr>
-            <a:r>
-              <a:rPr lang="en-US" sz="1500" b="1" dirty="0">
+          <a:bodyPr wrap="square" lIns="0" tIns="0" rIns="0" bIns="0" rtlCol="0" anchor="t"/>
+          <a:lstStyle/>
+          <a:p>
+            <a:pPr algn="ctr" indent="0" marL="0">
+              <a:buNone/>
+            </a:pPr>
+            <a:r>
+              <a:rPr lang="en-US" sz="1100" dirty="0">
+                <a:solidFill>
+                  <a:schemeClr val="bg1"/>
+                </a:solidFill>
+              </a:rPr>
+              <a:t>acc 76.7%, macro F1 75.1%</a:t>
+            </a:r>
+            <a:endParaRPr lang="en-US" sz="1100" dirty="0"/>
+          </a:p>
+        </p:txBody>
+      </p:sp>
+      <p:sp>
+        <p:nvSpPr>
+          <p:cNvPr id="22" name="Text 20"/>
+          <p:cNvSpPr txBox="1"/>
+          <p:nvPr/>
+        </p:nvSpPr>
+        <p:spPr>
+          <a:xfrm>
+            <a:off x="457200" y="3017520"/>
+            <a:ext cx="8229600" cy="1554480"/>
+          </a:xfrm>
+          <a:prstGeom prst="rect">
+            <a:avLst/>
+          </a:prstGeom>
+          <a:noFill/>
+          <a:ln/>
+        </p:spPr>
+        <p:txBody>
+          <a:bodyPr wrap="square" lIns="0" tIns="0" rIns="0" bIns="0" rtlCol="0" anchor="t"/>
+          <a:lstStyle/>
+          <a:p>
+            <a:pPr marL="342900" indent="-342900">
+              <a:spcAft>
+                <a:spcPts val="600"/>
+              </a:spcAft>
+              <a:buSzPct val="100000"/>
+              <a:buChar char="•"/>
+            </a:pPr>
+            <a:r>
+              <a:rPr lang="en-US" sz="1400" dirty="0">
                 <a:solidFill>
                   <a:schemeClr val="tx1"/>
                 </a:solidFill>
               </a:rPr>
-              <a:t>Risk classification is the strongest component.</a:t>
-            </a:r>
-            <a:endParaRPr lang="en-US" sz="1500" dirty="0"/>
-          </a:p>
-          <a:p>
-            <a:pPr algn="l" indent="0" marL="0">
-              <a:buNone/>
-            </a:pPr>
-            <a:r>
-              <a:rPr lang="en-US" sz="1300" dirty="0">
-                <a:solidFill>
-                  <a:schemeClr val="accent3"/>
-                </a:solidFill>
-              </a:rPr>
-              <a:t>Weighted F1 0.647; Indicator class F1 0.80.</a:t>
-            </a:r>
-            <a:endParaRPr lang="en-US" sz="1500" dirty="0"/>
-          </a:p>
-        </p:txBody>
-      </p:sp>
-      <p:sp>
-        <p:nvSpPr>
-          <p:cNvPr id="6" name="Shape 4"/>
-          <p:cNvSpPr/>
-          <p:nvPr/>
-        </p:nvSpPr>
-        <p:spPr>
-          <a:xfrm>
-            <a:off x="457200" y="1828800"/>
-            <a:ext cx="457200" cy="457200"/>
-          </a:xfrm>
-          <a:prstGeom prst="ellipse">
-            <a:avLst/>
-          </a:prstGeom>
-          <a:solidFill>
-            <a:schemeClr val="accent1"/>
-          </a:solidFill>
-          <a:ln w="12700">
-            <a:solidFill>
-              <a:schemeClr val="accent1"/>
-            </a:solidFill>
-            <a:prstDash val="solid"/>
-          </a:ln>
-        </p:spPr>
-      </p:sp>
-      <p:sp>
-        <p:nvSpPr>
-          <p:cNvPr id="7" name="Text 5"/>
-          <p:cNvSpPr txBox="1"/>
-          <p:nvPr/>
-        </p:nvSpPr>
-        <p:spPr>
-          <a:xfrm>
-            <a:off x="457200" y="1828800"/>
-            <a:ext cx="457200" cy="457200"/>
-          </a:xfrm>
-          <a:prstGeom prst="rect">
-            <a:avLst/>
-          </a:prstGeom>
-          <a:noFill/>
-          <a:ln/>
-        </p:spPr>
-        <p:txBody>
-          <a:bodyPr wrap="square" lIns="0" tIns="0" rIns="0" bIns="0" rtlCol="0" anchor="ctr"/>
-          <a:lstStyle/>
-          <a:p>
-            <a:pPr algn="ctr" indent="0" marL="0">
-              <a:buNone/>
-            </a:pPr>
-            <a:r>
-              <a:rPr lang="en-US" sz="1600" b="1" dirty="0">
-                <a:solidFill>
-                  <a:schemeClr val="bg1"/>
-                </a:solidFill>
-              </a:rPr>
-              <a:t>2</a:t>
-            </a:r>
-            <a:endParaRPr lang="en-US" sz="1600" dirty="0"/>
-          </a:p>
-        </p:txBody>
-      </p:sp>
-      <p:sp>
-        <p:nvSpPr>
-          <p:cNvPr id="8" name="Text 6"/>
-          <p:cNvSpPr txBox="1"/>
-          <p:nvPr/>
-        </p:nvSpPr>
-        <p:spPr>
-          <a:xfrm>
-            <a:off x="1143000" y="1783080"/>
-            <a:ext cx="7498080" cy="594360"/>
-          </a:xfrm>
-          <a:prstGeom prst="rect">
-            <a:avLst/>
-          </a:prstGeom>
-          <a:noFill/>
-          <a:ln/>
-        </p:spPr>
-        <p:txBody>
-          <a:bodyPr wrap="square" lIns="0" tIns="0" rIns="0" bIns="0" rtlCol="0" anchor="ctr"/>
-          <a:lstStyle/>
-          <a:p>
-            <a:pPr algn="l" indent="0" marL="0">
-              <a:buNone/>
-            </a:pPr>
-            <a:r>
-              <a:rPr lang="en-US" sz="1500" b="1" dirty="0">
+              <a:t>No user appears on both sides of any split</a:t>
+            </a:r>
+            <a:endParaRPr lang="en-US" sz="1400" dirty="0"/>
+          </a:p>
+          <a:p>
+            <a:pPr marL="342900" indent="-342900">
+              <a:spcAft>
+                <a:spcPts val="600"/>
+              </a:spcAft>
+              <a:buSzPct val="100000"/>
+              <a:buChar char="•"/>
+            </a:pPr>
+            <a:r>
+              <a:rPr lang="en-US" sz="1400" dirty="0">
                 <a:solidFill>
                   <a:schemeClr val="tx1"/>
                 </a:solidFill>
               </a:rPr>
-              <a:t>Character n-grams help with informal text.</a:t>
-            </a:r>
-            <a:endParaRPr lang="en-US" sz="1500" dirty="0"/>
-          </a:p>
-          <a:p>
-            <a:pPr algn="l" indent="0" marL="0">
-              <a:buNone/>
-            </a:pPr>
-            <a:r>
-              <a:rPr lang="en-US" sz="1300" dirty="0">
-                <a:solidFill>
-                  <a:schemeClr val="accent3"/>
-                </a:solidFill>
-              </a:rPr>
-              <a:t>+0.016 mean Weighted F1 over word-only (5 seeds).</a:t>
-            </a:r>
-            <a:endParaRPr lang="en-US" sz="1500" dirty="0"/>
-          </a:p>
-        </p:txBody>
-      </p:sp>
-      <p:sp>
-        <p:nvSpPr>
-          <p:cNvPr id="9" name="Shape 7"/>
-          <p:cNvSpPr/>
-          <p:nvPr/>
-        </p:nvSpPr>
-        <p:spPr>
-          <a:xfrm>
-            <a:off x="457200" y="2560320"/>
-            <a:ext cx="457200" cy="457200"/>
-          </a:xfrm>
-          <a:prstGeom prst="ellipse">
-            <a:avLst/>
-          </a:prstGeom>
-          <a:solidFill>
-            <a:schemeClr val="accent1"/>
-          </a:solidFill>
-          <a:ln w="12700">
-            <a:solidFill>
-              <a:schemeClr val="accent1"/>
-            </a:solidFill>
-            <a:prstDash val="solid"/>
-          </a:ln>
-        </p:spPr>
-      </p:sp>
-      <p:sp>
-        <p:nvSpPr>
-          <p:cNvPr id="10" name="Text 8"/>
-          <p:cNvSpPr txBox="1"/>
-          <p:nvPr/>
-        </p:nvSpPr>
-        <p:spPr>
-          <a:xfrm>
-            <a:off x="457200" y="2560320"/>
-            <a:ext cx="457200" cy="457200"/>
-          </a:xfrm>
-          <a:prstGeom prst="rect">
-            <a:avLst/>
-          </a:prstGeom>
-          <a:noFill/>
-          <a:ln/>
-        </p:spPr>
-        <p:txBody>
-          <a:bodyPr wrap="square" lIns="0" tIns="0" rIns="0" bIns="0" rtlCol="0" anchor="ctr"/>
-          <a:lstStyle/>
-          <a:p>
-            <a:pPr algn="ctr" indent="0" marL="0">
-              <a:buNone/>
-            </a:pPr>
-            <a:r>
-              <a:rPr lang="en-US" sz="1600" b="1" dirty="0">
-                <a:solidFill>
-                  <a:schemeClr val="bg1"/>
-                </a:solidFill>
-              </a:rPr>
-              <a:t>3</a:t>
-            </a:r>
-            <a:endParaRPr lang="en-US" sz="1600" dirty="0"/>
-          </a:p>
-        </p:txBody>
-      </p:sp>
-      <p:sp>
-        <p:nvSpPr>
-          <p:cNvPr id="11" name="Text 9"/>
-          <p:cNvSpPr txBox="1"/>
-          <p:nvPr/>
-        </p:nvSpPr>
-        <p:spPr>
-          <a:xfrm>
-            <a:off x="1143000" y="2514600"/>
-            <a:ext cx="7498080" cy="594360"/>
-          </a:xfrm>
-          <a:prstGeom prst="rect">
-            <a:avLst/>
-          </a:prstGeom>
-          <a:noFill/>
-          <a:ln/>
-        </p:spPr>
-        <p:txBody>
-          <a:bodyPr wrap="square" lIns="0" tIns="0" rIns="0" bIns="0" rtlCol="0" anchor="ctr"/>
-          <a:lstStyle/>
-          <a:p>
-            <a:pPr algn="l" indent="0" marL="0">
-              <a:buNone/>
-            </a:pPr>
-            <a:r>
-              <a:rPr lang="en-US" sz="1500" b="1" dirty="0">
+              <a:t>Confidence intervals resample users (2,000 bootstraps)</a:t>
+            </a:r>
+            <a:endParaRPr lang="en-US" sz="1400" dirty="0"/>
+          </a:p>
+          <a:p>
+            <a:pPr marL="342900" indent="-342900">
+              <a:spcAft>
+                <a:spcPts val="600"/>
+              </a:spcAft>
+              <a:buSzPct val="100000"/>
+              <a:buChar char="•"/>
+            </a:pPr>
+            <a:r>
+              <a:rPr lang="en-US" sz="1400" dirty="0">
                 <a:solidFill>
                   <a:schemeClr val="tx1"/>
                 </a:solidFill>
               </a:rPr>
-              <a:t>Evidence gives a direct explanation.</a:t>
-            </a:r>
-            <a:endParaRPr lang="en-US" sz="1500" dirty="0"/>
-          </a:p>
-          <a:p>
-            <a:pPr algn="l" indent="0" marL="0">
-              <a:buNone/>
-            </a:pPr>
-            <a:r>
-              <a:rPr lang="en-US" sz="1300" dirty="0">
-                <a:solidFill>
-                  <a:schemeClr val="accent3"/>
-                </a:solidFill>
-              </a:rPr>
-              <a:t>Phrase F1 0.560 vs 0.480 for sentence-level.</a:t>
-            </a:r>
-            <a:endParaRPr lang="en-US" sz="1500" dirty="0"/>
-          </a:p>
-        </p:txBody>
-      </p:sp>
-      <p:sp>
-        <p:nvSpPr>
-          <p:cNvPr id="12" name="Shape 10"/>
-          <p:cNvSpPr/>
-          <p:nvPr/>
-        </p:nvSpPr>
-        <p:spPr>
-          <a:xfrm>
-            <a:off x="457200" y="3291840"/>
-            <a:ext cx="457200" cy="457200"/>
-          </a:xfrm>
-          <a:prstGeom prst="ellipse">
-            <a:avLst/>
-          </a:prstGeom>
-          <a:solidFill>
-            <a:schemeClr val="accent1"/>
-          </a:solidFill>
-          <a:ln w="12700">
-            <a:solidFill>
-              <a:schemeClr val="accent1"/>
-            </a:solidFill>
-            <a:prstDash val="solid"/>
-          </a:ln>
-        </p:spPr>
-      </p:sp>
-      <p:sp>
-        <p:nvSpPr>
-          <p:cNvPr id="13" name="Text 11"/>
-          <p:cNvSpPr txBox="1"/>
-          <p:nvPr/>
-        </p:nvSpPr>
-        <p:spPr>
-          <a:xfrm>
-            <a:off x="457200" y="3291840"/>
-            <a:ext cx="457200" cy="457200"/>
-          </a:xfrm>
-          <a:prstGeom prst="rect">
-            <a:avLst/>
-          </a:prstGeom>
-          <a:noFill/>
-          <a:ln/>
-        </p:spPr>
-        <p:txBody>
-          <a:bodyPr wrap="square" lIns="0" tIns="0" rIns="0" bIns="0" rtlCol="0" anchor="ctr"/>
-          <a:lstStyle/>
-          <a:p>
-            <a:pPr algn="ctr" indent="0" marL="0">
-              <a:buNone/>
-            </a:pPr>
-            <a:r>
-              <a:rPr lang="en-US" sz="1600" b="1" dirty="0">
-                <a:solidFill>
-                  <a:schemeClr val="bg1"/>
-                </a:solidFill>
-              </a:rPr>
-              <a:t>4</a:t>
-            </a:r>
-            <a:endParaRPr lang="en-US" sz="1600" dirty="0"/>
-          </a:p>
-        </p:txBody>
-      </p:sp>
-      <p:sp>
-        <p:nvSpPr>
-          <p:cNvPr id="14" name="Text 12"/>
-          <p:cNvSpPr txBox="1"/>
-          <p:nvPr/>
-        </p:nvSpPr>
-        <p:spPr>
-          <a:xfrm>
-            <a:off x="1143000" y="3246120"/>
-            <a:ext cx="7498080" cy="594360"/>
-          </a:xfrm>
-          <a:prstGeom prst="rect">
-            <a:avLst/>
-          </a:prstGeom>
-          <a:noFill/>
-          <a:ln/>
-        </p:spPr>
-        <p:txBody>
-          <a:bodyPr wrap="square" lIns="0" tIns="0" rIns="0" bIns="0" rtlCol="0" anchor="ctr"/>
-          <a:lstStyle/>
-          <a:p>
-            <a:pPr algn="l" indent="0" marL="0">
-              <a:buNone/>
-            </a:pPr>
-            <a:r>
-              <a:rPr lang="en-US" sz="1500" b="1" dirty="0">
+              <a:t>OOF is slightly optimistic: best epoch is picked per fold</a:t>
+            </a:r>
+            <a:endParaRPr lang="en-US" sz="1400" dirty="0"/>
+          </a:p>
+          <a:p>
+            <a:pPr marL="342900" indent="-342900">
+              <a:spcAft>
+                <a:spcPts val="600"/>
+              </a:spcAft>
+              <a:buSzPct val="100000"/>
+              <a:buChar char="•"/>
+            </a:pPr>
+            <a:r>
+              <a:rPr lang="en-US" sz="1400" dirty="0">
                 <a:solidFill>
                   <a:schemeClr val="tx1"/>
                 </a:solidFill>
               </a:rPr>
-              <a:t>Factor identification is harder: 24 labels, imbalanced.</a:t>
-            </a:r>
-            <a:endParaRPr lang="en-US" sz="1500" dirty="0"/>
-          </a:p>
-          <a:p>
-            <a:pPr algn="l" indent="0" marL="0">
-              <a:buNone/>
-            </a:pPr>
-            <a:r>
-              <a:rPr lang="en-US" sz="1300" dirty="0">
-                <a:solidFill>
-                  <a:schemeClr val="accent3"/>
-                </a:solidFill>
-              </a:rPr>
-              <a:t>Macro F1 0.442.</a:t>
-            </a:r>
-            <a:endParaRPr lang="en-US" sz="1500" dirty="0"/>
-          </a:p>
-        </p:txBody>
-      </p:sp>
-      <p:sp>
-        <p:nvSpPr>
-          <p:cNvPr id="15" name="Shape 13"/>
-          <p:cNvSpPr/>
-          <p:nvPr/>
-        </p:nvSpPr>
-        <p:spPr>
-          <a:xfrm>
-            <a:off x="457200" y="4023360"/>
-            <a:ext cx="457200" cy="457200"/>
-          </a:xfrm>
-          <a:prstGeom prst="ellipse">
-            <a:avLst/>
-          </a:prstGeom>
-          <a:solidFill>
-            <a:schemeClr val="accent1"/>
-          </a:solidFill>
-          <a:ln w="12700">
-            <a:solidFill>
-              <a:schemeClr val="accent1"/>
-            </a:solidFill>
-            <a:prstDash val="solid"/>
-          </a:ln>
-        </p:spPr>
-      </p:sp>
-      <p:sp>
-        <p:nvSpPr>
-          <p:cNvPr id="16" name="Text 14"/>
-          <p:cNvSpPr txBox="1"/>
-          <p:nvPr/>
-        </p:nvSpPr>
-        <p:spPr>
-          <a:xfrm>
-            <a:off x="457200" y="4023360"/>
-            <a:ext cx="457200" cy="457200"/>
-          </a:xfrm>
-          <a:prstGeom prst="rect">
-            <a:avLst/>
-          </a:prstGeom>
-          <a:noFill/>
-          <a:ln/>
-        </p:spPr>
-        <p:txBody>
-          <a:bodyPr wrap="square" lIns="0" tIns="0" rIns="0" bIns="0" rtlCol="0" anchor="ctr"/>
-          <a:lstStyle/>
-          <a:p>
-            <a:pPr algn="ctr" indent="0" marL="0">
-              <a:buNone/>
-            </a:pPr>
-            <a:r>
-              <a:rPr lang="en-US" sz="1600" b="1" dirty="0">
-                <a:solidFill>
-                  <a:schemeClr val="bg1"/>
-                </a:solidFill>
-              </a:rPr>
-              <a:t>5</a:t>
-            </a:r>
-            <a:endParaRPr lang="en-US" sz="1600" dirty="0"/>
-          </a:p>
-        </p:txBody>
-      </p:sp>
-      <p:sp>
-        <p:nvSpPr>
-          <p:cNvPr id="17" name="Text 15"/>
-          <p:cNvSpPr txBox="1"/>
-          <p:nvPr/>
-        </p:nvSpPr>
-        <p:spPr>
-          <a:xfrm>
-            <a:off x="1143000" y="3977640"/>
-            <a:ext cx="7498080" cy="594360"/>
-          </a:xfrm>
-          <a:prstGeom prst="rect">
-            <a:avLst/>
-          </a:prstGeom>
-          <a:noFill/>
-          <a:ln/>
-        </p:spPr>
-        <p:txBody>
-          <a:bodyPr wrap="square" lIns="0" tIns="0" rIns="0" bIns="0" rtlCol="0" anchor="ctr"/>
-          <a:lstStyle/>
-          <a:p>
-            <a:pPr algn="l" indent="0" marL="0">
-              <a:buNone/>
-            </a:pPr>
-            <a:r>
-              <a:rPr lang="en-US" sz="1500" b="1" dirty="0">
-                <a:solidFill>
-                  <a:schemeClr val="tx1"/>
-                </a:solidFill>
-              </a:rPr>
-              <a:t>Per-factor thresholds beat a global 0.5.</a:t>
-            </a:r>
-            <a:endParaRPr lang="en-US" sz="1500" dirty="0"/>
-          </a:p>
-          <a:p>
-            <a:pPr algn="l" indent="0" marL="0">
-              <a:buNone/>
-            </a:pPr>
-            <a:r>
-              <a:rPr lang="en-US" sz="1300" dirty="0">
-                <a:solidFill>
-                  <a:schemeClr val="accent3"/>
-                </a:solidFill>
-              </a:rPr>
-              <a:t>+0.056 Macro F1 on one split; tuned on validation, so optimistic.</a:t>
-            </a:r>
-            <a:endParaRPr lang="en-US" sz="1500" dirty="0"/>
+              <a:t>One split seed (42); earlier multi-seed checks were not repeated</a:t>
+            </a:r>
+            <a:endParaRPr lang="en-US" sz="1400" dirty="0"/>
           </a:p>
         </p:txBody>
       </p:sp>
@@ -5436,7 +5507,7 @@
                 <a:ea typeface="Cambria" pitchFamily="34" charset="-122"/>
                 <a:cs typeface="Cambria" pitchFamily="34" charset="-120"/>
               </a:rPr>
-              <a:t>Limitations and Responsible Use</a:t>
+              <a:t>What the Results Tell Us</a:t>
             </a:r>
             <a:endParaRPr lang="en-US" sz="3000" dirty="0"/>
           </a:p>
@@ -5444,223 +5515,139 @@
       </p:sp>
       <p:sp>
         <p:nvSpPr>
-          <p:cNvPr id="3" name="card"/>
-          <p:cNvSpPr/>
-          <p:nvPr/>
-        </p:nvSpPr>
-        <p:spPr>
-          <a:xfrm>
-            <a:off x="457200" y="1051560"/>
-            <a:ext cx="4023360" cy="3520440"/>
-          </a:xfrm>
-          <a:prstGeom prst="roundRect">
-            <a:avLst>
-              <a:gd name="adj" fmla="val 2078"/>
-            </a:avLst>
+          <p:cNvPr id="3" name="Shape 1"/>
+          <p:cNvSpPr/>
+          <p:nvPr/>
+        </p:nvSpPr>
+        <p:spPr>
+          <a:xfrm>
+            <a:off x="457200" y="1097280"/>
+            <a:ext cx="457200" cy="457200"/>
+          </a:xfrm>
+          <a:prstGeom prst="ellipse">
+            <a:avLst/>
           </a:prstGeom>
           <a:solidFill>
-            <a:schemeClr val="bg2"/>
+            <a:schemeClr val="accent1"/>
           </a:solidFill>
           <a:ln w="12700">
             <a:solidFill>
-              <a:schemeClr val="bg2"/>
-            </a:solidFill>
-          </a:ln>
-        </p:spPr>
-        <p:txBody>
-          <a:bodyPr wrap="square" lIns="762" tIns="762" rIns="762" bIns="762" rtlCol="0" anchor="ctr"/>
+              <a:schemeClr val="accent1"/>
+            </a:solidFill>
+            <a:prstDash val="solid"/>
+          </a:ln>
+        </p:spPr>
+      </p:sp>
+      <p:sp>
+        <p:nvSpPr>
+          <p:cNvPr id="4" name="Text 2"/>
+          <p:cNvSpPr txBox="1"/>
+          <p:nvPr/>
+        </p:nvSpPr>
+        <p:spPr>
+          <a:xfrm>
+            <a:off x="457200" y="1097280"/>
+            <a:ext cx="457200" cy="457200"/>
+          </a:xfrm>
+          <a:prstGeom prst="rect">
+            <a:avLst/>
+          </a:prstGeom>
+          <a:noFill/>
+          <a:ln/>
+        </p:spPr>
+        <p:txBody>
+          <a:bodyPr wrap="square" lIns="0" tIns="0" rIns="0" bIns="0" rtlCol="0" anchor="ctr"/>
           <a:lstStyle/>
           <a:p>
             <a:pPr algn="ctr" indent="0" marL="0">
               <a:buNone/>
             </a:pPr>
-            <a:endParaRPr lang="en-US" sz="1200" dirty="0"/>
-          </a:p>
-        </p:txBody>
-      </p:sp>
-      <p:sp>
-        <p:nvSpPr>
-          <p:cNvPr id="4" name="card"/>
-          <p:cNvSpPr/>
-          <p:nvPr/>
-        </p:nvSpPr>
-        <p:spPr>
-          <a:xfrm>
-            <a:off x="4663440" y="1051560"/>
-            <a:ext cx="4023360" cy="3520440"/>
-          </a:xfrm>
-          <a:prstGeom prst="roundRect">
-            <a:avLst>
-              <a:gd name="adj" fmla="val 2078"/>
-            </a:avLst>
+            <a:r>
+              <a:rPr lang="en-US" sz="1600" b="1" dirty="0">
+                <a:solidFill>
+                  <a:schemeClr val="bg1"/>
+                </a:solidFill>
+              </a:rPr>
+              <a:t>1</a:t>
+            </a:r>
+            <a:endParaRPr lang="en-US" sz="1600" dirty="0"/>
+          </a:p>
+        </p:txBody>
+      </p:sp>
+      <p:sp>
+        <p:nvSpPr>
+          <p:cNvPr id="5" name="Text 3"/>
+          <p:cNvSpPr txBox="1"/>
+          <p:nvPr/>
+        </p:nvSpPr>
+        <p:spPr>
+          <a:xfrm>
+            <a:off x="1143000" y="1051560"/>
+            <a:ext cx="7498080" cy="594360"/>
+          </a:xfrm>
+          <a:prstGeom prst="rect">
+            <a:avLst/>
+          </a:prstGeom>
+          <a:noFill/>
+          <a:ln/>
+        </p:spPr>
+        <p:txBody>
+          <a:bodyPr wrap="square" lIns="0" tIns="0" rIns="0" bIns="0" rtlCol="0" anchor="ctr"/>
+          <a:lstStyle/>
+          <a:p>
+            <a:pPr algn="l" indent="0" marL="0">
+              <a:buNone/>
+            </a:pPr>
+            <a:r>
+              <a:rPr lang="en-US" sz="1500" b="1" dirty="0">
+                <a:solidFill>
+                  <a:schemeClr val="tx1"/>
+                </a:solidFill>
+              </a:rPr>
+              <a:t>The encoder drives the risk gain.</a:t>
+            </a:r>
+            <a:endParaRPr lang="en-US" sz="1500" dirty="0"/>
+          </a:p>
+          <a:p>
+            <a:pPr algn="l" indent="0" marL="0">
+              <a:buNone/>
+            </a:pPr>
+            <a:r>
+              <a:rPr lang="en-US" sz="1300" dirty="0">
+                <a:solidFill>
+                  <a:schemeClr val="accent3"/>
+                </a:solidFill>
+              </a:rPr>
+              <a:t>About +14 accuracy points; blend not demonstrated.</a:t>
+            </a:r>
+            <a:endParaRPr lang="en-US" sz="1500" dirty="0"/>
+          </a:p>
+        </p:txBody>
+      </p:sp>
+      <p:sp>
+        <p:nvSpPr>
+          <p:cNvPr id="6" name="Shape 4"/>
+          <p:cNvSpPr/>
+          <p:nvPr/>
+        </p:nvSpPr>
+        <p:spPr>
+          <a:xfrm>
+            <a:off x="457200" y="1828800"/>
+            <a:ext cx="457200" cy="457200"/>
+          </a:xfrm>
+          <a:prstGeom prst="ellipse">
+            <a:avLst/>
           </a:prstGeom>
           <a:solidFill>
-            <a:schemeClr val="bg2"/>
+            <a:schemeClr val="accent1"/>
           </a:solidFill>
           <a:ln w="12700">
             <a:solidFill>
-              <a:schemeClr val="bg2"/>
-            </a:solidFill>
-          </a:ln>
-        </p:spPr>
-        <p:txBody>
-          <a:bodyPr wrap="square" lIns="762" tIns="762" rIns="762" bIns="762" rtlCol="0" anchor="ctr"/>
-          <a:lstStyle/>
-          <a:p>
-            <a:pPr algn="ctr" indent="0" marL="0">
-              <a:buNone/>
-            </a:pPr>
-            <a:endParaRPr lang="en-US" sz="1200" dirty="0"/>
-          </a:p>
-        </p:txBody>
-      </p:sp>
-      <p:sp>
-        <p:nvSpPr>
-          <p:cNvPr id="5" name="Text 3"/>
-          <p:cNvSpPr txBox="1"/>
-          <p:nvPr/>
-        </p:nvSpPr>
-        <p:spPr>
-          <a:xfrm>
-            <a:off x="640080" y="1143000"/>
-            <a:ext cx="3657600" cy="320040"/>
-          </a:xfrm>
-          <a:prstGeom prst="rect">
-            <a:avLst/>
-          </a:prstGeom>
-          <a:noFill/>
-          <a:ln/>
-        </p:spPr>
-        <p:txBody>
-          <a:bodyPr wrap="square" lIns="0" tIns="0" rIns="0" bIns="0" rtlCol="0" anchor="t"/>
-          <a:lstStyle/>
-          <a:p>
-            <a:pPr algn="l" indent="0" marL="0">
-              <a:buNone/>
-            </a:pPr>
-            <a:r>
-              <a:rPr lang="en-US" sz="1600" b="1" dirty="0">
-                <a:solidFill>
-                  <a:schemeClr val="accent2"/>
-                </a:solidFill>
-              </a:rPr>
-              <a:t>Technical limitations</a:t>
-            </a:r>
-            <a:endParaRPr lang="en-US" sz="1600" dirty="0"/>
-          </a:p>
-        </p:txBody>
-      </p:sp>
-      <p:sp>
-        <p:nvSpPr>
-          <p:cNvPr id="6" name="Text 4"/>
-          <p:cNvSpPr txBox="1"/>
-          <p:nvPr/>
-        </p:nvSpPr>
-        <p:spPr>
-          <a:xfrm>
-            <a:off x="640080" y="1554480"/>
-            <a:ext cx="3657600" cy="2926080"/>
-          </a:xfrm>
-          <a:prstGeom prst="rect">
-            <a:avLst/>
-          </a:prstGeom>
-          <a:noFill/>
-          <a:ln/>
-        </p:spPr>
-        <p:txBody>
-          <a:bodyPr wrap="square" lIns="0" tIns="0" rIns="0" bIns="0" rtlCol="0" anchor="t"/>
-          <a:lstStyle/>
-          <a:p>
-            <a:pPr marL="342900" indent="-342900">
-              <a:spcAft>
-                <a:spcPts val="600"/>
-              </a:spcAft>
-              <a:buSzPct val="100000"/>
-              <a:buChar char="•"/>
-            </a:pPr>
-            <a:r>
-              <a:rPr lang="en-US" sz="1500" dirty="0">
-                <a:solidFill>
-                  <a:schemeClr val="tx1"/>
-                </a:solidFill>
-              </a:rPr>
-              <a:t>Small dataset: 1,635 posts from 153 users</a:t>
-            </a:r>
-            <a:endParaRPr lang="en-US" sz="1500" dirty="0"/>
-          </a:p>
-          <a:p>
-            <a:pPr marL="342900" indent="-342900">
-              <a:spcAft>
-                <a:spcPts val="600"/>
-              </a:spcAft>
-              <a:buSzPct val="100000"/>
-              <a:buChar char="•"/>
-            </a:pPr>
-            <a:r>
-              <a:rPr lang="en-US" sz="1500" dirty="0">
-                <a:solidFill>
-                  <a:schemeClr val="tx1"/>
-                </a:solidFill>
-              </a:rPr>
-              <a:t>Ambiguous, contextual, culture-dependent language</a:t>
-            </a:r>
-            <a:endParaRPr lang="en-US" sz="1500" dirty="0"/>
-          </a:p>
-          <a:p>
-            <a:pPr marL="342900" indent="-342900">
-              <a:spcAft>
-                <a:spcPts val="600"/>
-              </a:spcAft>
-              <a:buSzPct val="100000"/>
-              <a:buChar char="•"/>
-            </a:pPr>
-            <a:r>
-              <a:rPr lang="en-US" sz="1500" dirty="0">
-                <a:solidFill>
-                  <a:schemeClr val="tx1"/>
-                </a:solidFill>
-              </a:rPr>
-              <a:t>Factor prediction is weak (Macro F1 0.442) and tends to over-predict</a:t>
-            </a:r>
-            <a:endParaRPr lang="en-US" sz="1500" dirty="0"/>
-          </a:p>
-          <a:p>
-            <a:pPr marL="342900" indent="-342900">
-              <a:spcAft>
-                <a:spcPts val="600"/>
-              </a:spcAft>
-              <a:buSzPct val="100000"/>
-              <a:buChar char="•"/>
-            </a:pPr>
-            <a:r>
-              <a:rPr lang="en-US" sz="1500" dirty="0">
-                <a:solidFill>
-                  <a:schemeClr val="tx1"/>
-                </a:solidFill>
-              </a:rPr>
-              <a:t>Rare classes are weak (Attempt F1 0.415)</a:t>
-            </a:r>
-            <a:endParaRPr lang="en-US" sz="1500" dirty="0"/>
-          </a:p>
-          <a:p>
-            <a:pPr marL="342900" indent="-342900">
-              <a:spcAft>
-                <a:spcPts val="600"/>
-              </a:spcAft>
-              <a:buSzPct val="100000"/>
-              <a:buChar char="•"/>
-            </a:pPr>
-            <a:r>
-              <a:rPr lang="en-US" sz="1500" dirty="0">
-                <a:solidFill>
-                  <a:schemeClr val="tx1"/>
-                </a:solidFill>
-              </a:rPr>
-              <a:t>False positives and false negatives occur</a:t>
-            </a:r>
-            <a:endParaRPr lang="en-US" sz="1500" dirty="0"/>
-          </a:p>
-        </p:txBody>
+              <a:schemeClr val="accent1"/>
+            </a:solidFill>
+            <a:prstDash val="solid"/>
+          </a:ln>
+        </p:spPr>
       </p:sp>
       <p:sp>
         <p:nvSpPr>
@@ -5670,8 +5657,8 @@
         </p:nvSpPr>
         <p:spPr>
           <a:xfrm>
-            <a:off x="4846320" y="1143000"/>
-            <a:ext cx="3657600" cy="320040"/>
+            <a:off x="457200" y="1828800"/>
+            <a:ext cx="457200" cy="457200"/>
           </a:xfrm>
           <a:prstGeom prst="rect">
             <a:avLst/>
@@ -5680,19 +5667,19 @@
           <a:ln/>
         </p:spPr>
         <p:txBody>
-          <a:bodyPr wrap="square" lIns="0" tIns="0" rIns="0" bIns="0" rtlCol="0" anchor="t"/>
-          <a:lstStyle/>
-          <a:p>
-            <a:pPr algn="l" indent="0" marL="0">
+          <a:bodyPr wrap="square" lIns="0" tIns="0" rIns="0" bIns="0" rtlCol="0" anchor="ctr"/>
+          <a:lstStyle/>
+          <a:p>
+            <a:pPr algn="ctr" indent="0" marL="0">
               <a:buNone/>
             </a:pPr>
             <a:r>
               <a:rPr lang="en-US" sz="1600" b="1" dirty="0">
                 <a:solidFill>
-                  <a:schemeClr val="accent1"/>
-                </a:solidFill>
-              </a:rPr>
-              <a:t>Responsible use</a:t>
+                  <a:schemeClr val="bg1"/>
+                </a:solidFill>
+              </a:rPr>
+              <a:t>2</a:t>
             </a:r>
             <a:endParaRPr lang="en-US" sz="1600" dirty="0"/>
           </a:p>
@@ -5706,8 +5693,8 @@
         </p:nvSpPr>
         <p:spPr>
           <a:xfrm>
-            <a:off x="4846320" y="1554480"/>
-            <a:ext cx="3657600" cy="2926080"/>
+            <a:off x="1143000" y="1783080"/>
+            <a:ext cx="7498080" cy="594360"/>
           </a:xfrm>
           <a:prstGeom prst="rect">
             <a:avLst/>
@@ -5716,77 +5703,366 @@
           <a:ln/>
         </p:spPr>
         <p:txBody>
-          <a:bodyPr wrap="square" lIns="0" tIns="0" rIns="0" bIns="0" rtlCol="0" anchor="t"/>
-          <a:lstStyle/>
-          <a:p>
-            <a:pPr marL="342900" indent="-342900">
-              <a:spcAft>
-                <a:spcPts val="600"/>
-              </a:spcAft>
-              <a:buSzPct val="100000"/>
-              <a:buChar char="•"/>
-            </a:pPr>
-            <a:r>
-              <a:rPr lang="en-US" sz="1500" dirty="0">
+          <a:bodyPr wrap="square" lIns="0" tIns="0" rIns="0" bIns="0" rtlCol="0" anchor="ctr"/>
+          <a:lstStyle/>
+          <a:p>
+            <a:pPr algn="l" indent="0" marL="0">
+              <a:buNone/>
+            </a:pPr>
+            <a:r>
+              <a:rPr lang="en-US" sz="1500" b="1" dirty="0">
                 <a:solidFill>
                   <a:schemeClr val="tx1"/>
                 </a:solidFill>
               </a:rPr>
-              <a:t>Decision support for trained human reviewers, not a replacement</a:t>
+              <a:t>Behavior and Attempt improve most.</a:t>
             </a:r>
             <a:endParaRPr lang="en-US" sz="1500" dirty="0"/>
           </a:p>
           <a:p>
-            <a:pPr marL="342900" indent="-342900">
-              <a:spcAft>
-                <a:spcPts val="600"/>
-              </a:spcAft>
-              <a:buSzPct val="100000"/>
-              <a:buChar char="•"/>
-            </a:pPr>
-            <a:r>
-              <a:rPr lang="en-US" sz="1500" dirty="0">
+            <a:pPr algn="l" indent="0" marL="0">
+              <a:buNone/>
+            </a:pPr>
+            <a:r>
+              <a:rPr lang="en-US" sz="1300" dirty="0">
+                <a:solidFill>
+                  <a:schemeClr val="accent3"/>
+                </a:solidFill>
+              </a:rPr>
+              <a:t>F1 +0.28 and +0.30; Attempt has only 20 held-out posts.</a:t>
+            </a:r>
+            <a:endParaRPr lang="en-US" sz="1500" dirty="0"/>
+          </a:p>
+        </p:txBody>
+      </p:sp>
+      <p:sp>
+        <p:nvSpPr>
+          <p:cNvPr id="9" name="Shape 7"/>
+          <p:cNvSpPr/>
+          <p:nvPr/>
+        </p:nvSpPr>
+        <p:spPr>
+          <a:xfrm>
+            <a:off x="457200" y="2560320"/>
+            <a:ext cx="457200" cy="457200"/>
+          </a:xfrm>
+          <a:prstGeom prst="ellipse">
+            <a:avLst/>
+          </a:prstGeom>
+          <a:solidFill>
+            <a:schemeClr val="accent1"/>
+          </a:solidFill>
+          <a:ln w="12700">
+            <a:solidFill>
+              <a:schemeClr val="accent1"/>
+            </a:solidFill>
+            <a:prstDash val="solid"/>
+          </a:ln>
+        </p:spPr>
+      </p:sp>
+      <p:sp>
+        <p:nvSpPr>
+          <p:cNvPr id="10" name="Text 8"/>
+          <p:cNvSpPr txBox="1"/>
+          <p:nvPr/>
+        </p:nvSpPr>
+        <p:spPr>
+          <a:xfrm>
+            <a:off x="457200" y="2560320"/>
+            <a:ext cx="457200" cy="457200"/>
+          </a:xfrm>
+          <a:prstGeom prst="rect">
+            <a:avLst/>
+          </a:prstGeom>
+          <a:noFill/>
+          <a:ln/>
+        </p:spPr>
+        <p:txBody>
+          <a:bodyPr wrap="square" lIns="0" tIns="0" rIns="0" bIns="0" rtlCol="0" anchor="ctr"/>
+          <a:lstStyle/>
+          <a:p>
+            <a:pPr algn="ctr" indent="0" marL="0">
+              <a:buNone/>
+            </a:pPr>
+            <a:r>
+              <a:rPr lang="en-US" sz="1600" b="1" dirty="0">
+                <a:solidFill>
+                  <a:schemeClr val="bg1"/>
+                </a:solidFill>
+              </a:rPr>
+              <a:t>3</a:t>
+            </a:r>
+            <a:endParaRPr lang="en-US" sz="1600" dirty="0"/>
+          </a:p>
+        </p:txBody>
+      </p:sp>
+      <p:sp>
+        <p:nvSpPr>
+          <p:cNvPr id="11" name="Text 9"/>
+          <p:cNvSpPr txBox="1"/>
+          <p:nvPr/>
+        </p:nvSpPr>
+        <p:spPr>
+          <a:xfrm>
+            <a:off x="1143000" y="2514600"/>
+            <a:ext cx="7498080" cy="594360"/>
+          </a:xfrm>
+          <a:prstGeom prst="rect">
+            <a:avLst/>
+          </a:prstGeom>
+          <a:noFill/>
+          <a:ln/>
+        </p:spPr>
+        <p:txBody>
+          <a:bodyPr wrap="square" lIns="0" tIns="0" rIns="0" bIns="0" rtlCol="0" anchor="ctr"/>
+          <a:lstStyle/>
+          <a:p>
+            <a:pPr algn="l" indent="0" marL="0">
+              <a:buNone/>
+            </a:pPr>
+            <a:r>
+              <a:rPr lang="en-US" sz="1500" b="1" dirty="0">
                 <a:solidFill>
                   <a:schemeClr val="tx1"/>
                 </a:solidFill>
               </a:rPr>
-              <a:t>Research prototype, not a clinical diagnostic tool</a:t>
+              <a:t>80.5% of errors are between adjacent levels.</a:t>
             </a:r>
             <a:endParaRPr lang="en-US" sz="1500" dirty="0"/>
           </a:p>
           <a:p>
-            <a:pPr marL="342900" indent="-342900">
-              <a:spcAft>
-                <a:spcPts val="600"/>
-              </a:spcAft>
-              <a:buSzPct val="100000"/>
-              <a:buChar char="•"/>
-            </a:pPr>
-            <a:r>
-              <a:rPr lang="en-US" sz="1500" dirty="0">
+            <a:pPr algn="l" indent="0" marL="0">
+              <a:buNone/>
+            </a:pPr>
+            <a:r>
+              <a:rPr lang="en-US" sz="1300" dirty="0">
+                <a:solidFill>
+                  <a:schemeClr val="accent3"/>
+                </a:solidFill>
+              </a:rPr>
+              <a:t>Largest confusion: Indicator predicted as Ideation (21 posts).</a:t>
+            </a:r>
+            <a:endParaRPr lang="en-US" sz="1500" dirty="0"/>
+          </a:p>
+        </p:txBody>
+      </p:sp>
+      <p:sp>
+        <p:nvSpPr>
+          <p:cNvPr id="12" name="Shape 10"/>
+          <p:cNvSpPr/>
+          <p:nvPr/>
+        </p:nvSpPr>
+        <p:spPr>
+          <a:xfrm>
+            <a:off x="457200" y="3291840"/>
+            <a:ext cx="457200" cy="457200"/>
+          </a:xfrm>
+          <a:prstGeom prst="ellipse">
+            <a:avLst/>
+          </a:prstGeom>
+          <a:solidFill>
+            <a:schemeClr val="accent1"/>
+          </a:solidFill>
+          <a:ln w="12700">
+            <a:solidFill>
+              <a:schemeClr val="accent1"/>
+            </a:solidFill>
+            <a:prstDash val="solid"/>
+          </a:ln>
+        </p:spPr>
+      </p:sp>
+      <p:sp>
+        <p:nvSpPr>
+          <p:cNvPr id="13" name="Text 11"/>
+          <p:cNvSpPr txBox="1"/>
+          <p:nvPr/>
+        </p:nvSpPr>
+        <p:spPr>
+          <a:xfrm>
+            <a:off x="457200" y="3291840"/>
+            <a:ext cx="457200" cy="457200"/>
+          </a:xfrm>
+          <a:prstGeom prst="rect">
+            <a:avLst/>
+          </a:prstGeom>
+          <a:noFill/>
+          <a:ln/>
+        </p:spPr>
+        <p:txBody>
+          <a:bodyPr wrap="square" lIns="0" tIns="0" rIns="0" bIns="0" rtlCol="0" anchor="ctr"/>
+          <a:lstStyle/>
+          <a:p>
+            <a:pPr algn="ctr" indent="0" marL="0">
+              <a:buNone/>
+            </a:pPr>
+            <a:r>
+              <a:rPr lang="en-US" sz="1600" b="1" dirty="0">
+                <a:solidFill>
+                  <a:schemeClr val="bg1"/>
+                </a:solidFill>
+              </a:rPr>
+              <a:t>4</a:t>
+            </a:r>
+            <a:endParaRPr lang="en-US" sz="1600" dirty="0"/>
+          </a:p>
+        </p:txBody>
+      </p:sp>
+      <p:sp>
+        <p:nvSpPr>
+          <p:cNvPr id="14" name="Text 12"/>
+          <p:cNvSpPr txBox="1"/>
+          <p:nvPr/>
+        </p:nvSpPr>
+        <p:spPr>
+          <a:xfrm>
+            <a:off x="1143000" y="3246120"/>
+            <a:ext cx="7498080" cy="594360"/>
+          </a:xfrm>
+          <a:prstGeom prst="rect">
+            <a:avLst/>
+          </a:prstGeom>
+          <a:noFill/>
+          <a:ln/>
+        </p:spPr>
+        <p:txBody>
+          <a:bodyPr wrap="square" lIns="0" tIns="0" rIns="0" bIns="0" rtlCol="0" anchor="ctr"/>
+          <a:lstStyle/>
+          <a:p>
+            <a:pPr algn="l" indent="0" marL="0">
+              <a:buNone/>
+            </a:pPr>
+            <a:r>
+              <a:rPr lang="en-US" sz="1500" b="1" dirty="0">
                 <a:solidFill>
                   <a:schemeClr val="tx1"/>
                 </a:solidFill>
               </a:rPr>
-              <a:t>Not intended for autonomous action on individuals</a:t>
+              <a:t>A claimed gain did not survive stricter tuning.</a:t>
             </a:r>
             <a:endParaRPr lang="en-US" sz="1500" dirty="0"/>
           </a:p>
           <a:p>
-            <a:pPr marL="342900" indent="-342900">
-              <a:spcAft>
-                <a:spcPts val="600"/>
-              </a:spcAft>
-              <a:buSzPct val="100000"/>
-              <a:buChar char="•"/>
-            </a:pPr>
-            <a:r>
-              <a:rPr lang="en-US" sz="1500" dirty="0">
+            <a:pPr algn="l" indent="0" marL="0">
+              <a:buNone/>
+            </a:pPr>
+            <a:r>
+              <a:rPr lang="en-US" sz="1300" dirty="0">
+                <a:solidFill>
+                  <a:schemeClr val="accent3"/>
+                </a:solidFill>
+              </a:rPr>
+              <a:t>Per-factor thresholds: no gain for the classical model once cross-fitted.</a:t>
+            </a:r>
+            <a:endParaRPr lang="en-US" sz="1500" dirty="0"/>
+          </a:p>
+        </p:txBody>
+      </p:sp>
+      <p:sp>
+        <p:nvSpPr>
+          <p:cNvPr id="15" name="Shape 13"/>
+          <p:cNvSpPr/>
+          <p:nvPr/>
+        </p:nvSpPr>
+        <p:spPr>
+          <a:xfrm>
+            <a:off x="457200" y="4023360"/>
+            <a:ext cx="457200" cy="457200"/>
+          </a:xfrm>
+          <a:prstGeom prst="ellipse">
+            <a:avLst/>
+          </a:prstGeom>
+          <a:solidFill>
+            <a:schemeClr val="accent1"/>
+          </a:solidFill>
+          <a:ln w="12700">
+            <a:solidFill>
+              <a:schemeClr val="accent1"/>
+            </a:solidFill>
+            <a:prstDash val="solid"/>
+          </a:ln>
+        </p:spPr>
+      </p:sp>
+      <p:sp>
+        <p:nvSpPr>
+          <p:cNvPr id="16" name="Text 14"/>
+          <p:cNvSpPr txBox="1"/>
+          <p:nvPr/>
+        </p:nvSpPr>
+        <p:spPr>
+          <a:xfrm>
+            <a:off x="457200" y="4023360"/>
+            <a:ext cx="457200" cy="457200"/>
+          </a:xfrm>
+          <a:prstGeom prst="rect">
+            <a:avLst/>
+          </a:prstGeom>
+          <a:noFill/>
+          <a:ln/>
+        </p:spPr>
+        <p:txBody>
+          <a:bodyPr wrap="square" lIns="0" tIns="0" rIns="0" bIns="0" rtlCol="0" anchor="ctr"/>
+          <a:lstStyle/>
+          <a:p>
+            <a:pPr algn="ctr" indent="0" marL="0">
+              <a:buNone/>
+            </a:pPr>
+            <a:r>
+              <a:rPr lang="en-US" sz="1600" b="1" dirty="0">
+                <a:solidFill>
+                  <a:schemeClr val="bg1"/>
+                </a:solidFill>
+              </a:rPr>
+              <a:t>5</a:t>
+            </a:r>
+            <a:endParaRPr lang="en-US" sz="1600" dirty="0"/>
+          </a:p>
+        </p:txBody>
+      </p:sp>
+      <p:sp>
+        <p:nvSpPr>
+          <p:cNvPr id="17" name="Text 15"/>
+          <p:cNvSpPr txBox="1"/>
+          <p:nvPr/>
+        </p:nvSpPr>
+        <p:spPr>
+          <a:xfrm>
+            <a:off x="1143000" y="3977640"/>
+            <a:ext cx="7498080" cy="594360"/>
+          </a:xfrm>
+          <a:prstGeom prst="rect">
+            <a:avLst/>
+          </a:prstGeom>
+          <a:noFill/>
+          <a:ln/>
+        </p:spPr>
+        <p:txBody>
+          <a:bodyPr wrap="square" lIns="0" tIns="0" rIns="0" bIns="0" rtlCol="0" anchor="ctr"/>
+          <a:lstStyle/>
+          <a:p>
+            <a:pPr algn="l" indent="0" marL="0">
+              <a:buNone/>
+            </a:pPr>
+            <a:r>
+              <a:rPr lang="en-US" sz="1500" b="1" dirty="0">
                 <a:solidFill>
                   <a:schemeClr val="tx1"/>
                 </a:solidFill>
               </a:rPr>
-              <a:t>Evidence spans keep every prediction auditable</a:t>
+              <a:t>Evidence improves on a proxy metric only.</a:t>
+            </a:r>
+            <a:endParaRPr lang="en-US" sz="1500" dirty="0"/>
+          </a:p>
+          <a:p>
+            <a:pPr algn="l" indent="0" marL="0">
+              <a:buNone/>
+            </a:pPr>
+            <a:r>
+              <a:rPr lang="en-US" sz="1300" dirty="0">
+                <a:solidFill>
+                  <a:schemeClr val="accent3"/>
+                </a:solidFill>
+              </a:rPr>
+              <a:t>Token F1 0.318 vs 0.229; Phrase F1 was not measured.</a:t>
             </a:r>
             <a:endParaRPr lang="en-US" sz="1500" dirty="0"/>
           </a:p>
@@ -5897,7 +6173,7 @@
                 <a:ea typeface="Cambria" pitchFamily="34" charset="-122"/>
                 <a:cs typeface="Cambria" pitchFamily="34" charset="-120"/>
               </a:rPr>
-              <a:t>Future Research Directions</a:t>
+              <a:t>Limitations and Responsible Use</a:t>
             </a:r>
             <a:endParaRPr lang="en-US" sz="3000" dirty="0"/>
           </a:p>
@@ -6002,10 +6278,10 @@
             <a:r>
               <a:rPr lang="en-US" sz="1600" b="1" dirty="0">
                 <a:solidFill>
-                  <a:schemeClr val="accent5"/>
-                </a:solidFill>
-              </a:rPr>
-              <a:t>Implemented, evaluation pending</a:t>
+                  <a:schemeClr val="accent2"/>
+                </a:solidFill>
+              </a:rPr>
+              <a:t>Technical limitations</a:t>
             </a:r>
             <a:endParaRPr lang="en-US" sz="1600" dirty="0"/>
           </a:p>
@@ -6019,8 +6295,8 @@
         </p:nvSpPr>
         <p:spPr>
           <a:xfrm>
-            <a:off x="640080" y="1600200"/>
-            <a:ext cx="3657600" cy="1737360"/>
+            <a:off x="640080" y="1554480"/>
+            <a:ext cx="3657600" cy="2926080"/>
           </a:xfrm>
           <a:prstGeom prst="rect">
             <a:avLst/>
@@ -6040,14 +6316,14 @@
               <a:buChar char="•"/>
             </a:pPr>
             <a:r>
-              <a:rPr lang="en-US" sz="1600" dirty="0">
+              <a:rPr lang="en-US" sz="1400" dirty="0">
                 <a:solidFill>
                   <a:schemeClr val="tx1"/>
                 </a:solidFill>
               </a:rPr>
-              <a:t>DistilBERT risk classifier with learning-rate sweep</a:t>
-            </a:r>
-            <a:endParaRPr lang="en-US" sz="1600" dirty="0"/>
+              <a:t>Held-out is small: 330 posts, 32 users; Attempt n = 20</a:t>
+            </a:r>
+            <a:endParaRPr lang="en-US" sz="1400" dirty="0"/>
           </a:p>
           <a:p>
             <a:pPr marL="342900" indent="-342900">
@@ -6058,14 +6334,14 @@
               <a:buChar char="•"/>
             </a:pPr>
             <a:r>
-              <a:rPr lang="en-US" sz="1600" dirty="0">
+              <a:rPr lang="en-US" sz="1400" dirty="0">
                 <a:solidFill>
                   <a:schemeClr val="tx1"/>
                 </a:solidFill>
               </a:rPr>
-              <a:t>Multi-label DistilBERT factor model</a:t>
-            </a:r>
-            <a:endParaRPr lang="en-US" sz="1600" dirty="0"/>
+              <a:t>One split seed; DeBERTa-v3 run failed (no result)</a:t>
+            </a:r>
+            <a:endParaRPr lang="en-US" sz="1400" dirty="0"/>
           </a:p>
           <a:p>
             <a:pPr marL="342900" indent="-342900">
@@ -6076,109 +6352,15 @@
               <a:buChar char="•"/>
             </a:pPr>
             <a:r>
-              <a:rPr lang="en-US" sz="1600" dirty="0">
+              <a:rPr lang="en-US" sz="1400" dirty="0">
                 <a:solidFill>
                   <a:schemeClr val="tx1"/>
                 </a:solidFill>
               </a:rPr>
-              <a:t>Ensemble search with classical models</a:t>
-            </a:r>
-            <a:endParaRPr lang="en-US" sz="1600" dirty="0"/>
-          </a:p>
-        </p:txBody>
-      </p:sp>
-      <p:sp>
-        <p:nvSpPr>
-          <p:cNvPr id="7" name="Text 5"/>
-          <p:cNvSpPr txBox="1"/>
-          <p:nvPr/>
-        </p:nvSpPr>
-        <p:spPr>
-          <a:xfrm>
-            <a:off x="640080" y="3566160"/>
-            <a:ext cx="3657600" cy="731520"/>
-          </a:xfrm>
-          <a:prstGeom prst="rect">
-            <a:avLst/>
-          </a:prstGeom>
-          <a:noFill/>
-          <a:ln/>
-        </p:spPr>
-        <p:txBody>
-          <a:bodyPr wrap="square" lIns="0" tIns="0" rIns="0" bIns="0" rtlCol="0" anchor="t"/>
-          <a:lstStyle/>
-          <a:p>
-            <a:pPr algn="l" indent="0" marL="0">
-              <a:buNone/>
-            </a:pPr>
-            <a:r>
-              <a:rPr lang="en-US" sz="1400" i="1" dirty="0">
-                <a:solidFill>
-                  <a:schemeClr val="accent3"/>
-                </a:solidFill>
-              </a:rPr>
-              <a:t>Colab-ready; no Transformer score is reported here.</a:t>
+              <a:t>Evidence: token proxy only; LLM Phrase F1 not measured</a:t>
             </a:r>
             <a:endParaRPr lang="en-US" sz="1400" dirty="0"/>
           </a:p>
-        </p:txBody>
-      </p:sp>
-      <p:sp>
-        <p:nvSpPr>
-          <p:cNvPr id="8" name="Text 6"/>
-          <p:cNvSpPr txBox="1"/>
-          <p:nvPr/>
-        </p:nvSpPr>
-        <p:spPr>
-          <a:xfrm>
-            <a:off x="4846320" y="1143000"/>
-            <a:ext cx="3657600" cy="320040"/>
-          </a:xfrm>
-          <a:prstGeom prst="rect">
-            <a:avLst/>
-          </a:prstGeom>
-          <a:noFill/>
-          <a:ln/>
-        </p:spPr>
-        <p:txBody>
-          <a:bodyPr wrap="square" lIns="0" tIns="0" rIns="0" bIns="0" rtlCol="0" anchor="t"/>
-          <a:lstStyle/>
-          <a:p>
-            <a:pPr algn="l" indent="0" marL="0">
-              <a:buNone/>
-            </a:pPr>
-            <a:r>
-              <a:rPr lang="en-US" sz="1600" b="1" dirty="0">
-                <a:solidFill>
-                  <a:schemeClr val="accent1"/>
-                </a:solidFill>
-              </a:rPr>
-              <a:t>Next-stage research</a:t>
-            </a:r>
-            <a:endParaRPr lang="en-US" sz="1600" dirty="0"/>
-          </a:p>
-        </p:txBody>
-      </p:sp>
-      <p:sp>
-        <p:nvSpPr>
-          <p:cNvPr id="9" name="Text 7"/>
-          <p:cNvSpPr txBox="1"/>
-          <p:nvPr/>
-        </p:nvSpPr>
-        <p:spPr>
-          <a:xfrm>
-            <a:off x="4846320" y="1600200"/>
-            <a:ext cx="3657600" cy="2834640"/>
-          </a:xfrm>
-          <a:prstGeom prst="rect">
-            <a:avLst/>
-          </a:prstGeom>
-          <a:noFill/>
-          <a:ln/>
-        </p:spPr>
-        <p:txBody>
-          <a:bodyPr wrap="square" lIns="0" tIns="0" rIns="0" bIns="0" rtlCol="0" anchor="t"/>
-          <a:lstStyle/>
           <a:p>
             <a:pPr marL="342900" indent="-342900">
               <a:spcAft>
@@ -6188,14 +6370,14 @@
               <a:buChar char="•"/>
             </a:pPr>
             <a:r>
-              <a:rPr lang="en-US" sz="1500" dirty="0">
+              <a:rPr lang="en-US" sz="1400" dirty="0">
                 <a:solidFill>
                   <a:schemeClr val="tx1"/>
                 </a:solidFill>
               </a:rPr>
-              <a:t>Explainable Transformer methods</a:t>
-            </a:r>
-            <a:endParaRPr lang="en-US" sz="1500" dirty="0"/>
+              <a:t>Rare factors remain weak and over-predicted</a:t>
+            </a:r>
+            <a:endParaRPr lang="en-US" sz="1400" dirty="0"/>
           </a:p>
           <a:p>
             <a:pPr marL="342900" indent="-342900">
@@ -6206,15 +6388,73 @@
               <a:buChar char="•"/>
             </a:pPr>
             <a:r>
-              <a:rPr lang="en-US" sz="1500" dirty="0">
+              <a:rPr lang="en-US" sz="1400" dirty="0">
                 <a:solidFill>
                   <a:schemeClr val="tx1"/>
                 </a:solidFill>
               </a:rPr>
-              <a:t>Calibration and uncertainty estimation</a:t>
-            </a:r>
-            <a:endParaRPr lang="en-US" sz="1500" dirty="0"/>
-          </a:p>
+              <a:t>Local validation may differ from the leaderboard</a:t>
+            </a:r>
+            <a:endParaRPr lang="en-US" sz="1400" dirty="0"/>
+          </a:p>
+        </p:txBody>
+      </p:sp>
+      <p:sp>
+        <p:nvSpPr>
+          <p:cNvPr id="7" name="Text 5"/>
+          <p:cNvSpPr txBox="1"/>
+          <p:nvPr/>
+        </p:nvSpPr>
+        <p:spPr>
+          <a:xfrm>
+            <a:off x="4846320" y="1143000"/>
+            <a:ext cx="3657600" cy="320040"/>
+          </a:xfrm>
+          <a:prstGeom prst="rect">
+            <a:avLst/>
+          </a:prstGeom>
+          <a:noFill/>
+          <a:ln/>
+        </p:spPr>
+        <p:txBody>
+          <a:bodyPr wrap="square" lIns="0" tIns="0" rIns="0" bIns="0" rtlCol="0" anchor="t"/>
+          <a:lstStyle/>
+          <a:p>
+            <a:pPr algn="l" indent="0" marL="0">
+              <a:buNone/>
+            </a:pPr>
+            <a:r>
+              <a:rPr lang="en-US" sz="1600" b="1" dirty="0">
+                <a:solidFill>
+                  <a:schemeClr val="accent1"/>
+                </a:solidFill>
+              </a:rPr>
+              <a:t>Responsible use</a:t>
+            </a:r>
+            <a:endParaRPr lang="en-US" sz="1600" dirty="0"/>
+          </a:p>
+        </p:txBody>
+      </p:sp>
+      <p:sp>
+        <p:nvSpPr>
+          <p:cNvPr id="8" name="Text 6"/>
+          <p:cNvSpPr txBox="1"/>
+          <p:nvPr/>
+        </p:nvSpPr>
+        <p:spPr>
+          <a:xfrm>
+            <a:off x="4846320" y="1554480"/>
+            <a:ext cx="3657600" cy="2926080"/>
+          </a:xfrm>
+          <a:prstGeom prst="rect">
+            <a:avLst/>
+          </a:prstGeom>
+          <a:noFill/>
+          <a:ln/>
+        </p:spPr>
+        <p:txBody>
+          <a:bodyPr wrap="square" lIns="0" tIns="0" rIns="0" bIns="0" rtlCol="0" anchor="t"/>
+          <a:lstStyle/>
           <a:p>
             <a:pPr marL="342900" indent="-342900">
               <a:spcAft>
@@ -6224,14 +6464,14 @@
               <a:buChar char="•"/>
             </a:pPr>
             <a:r>
-              <a:rPr lang="en-US" sz="1500" dirty="0">
+              <a:rPr lang="en-US" sz="1400" dirty="0">
                 <a:solidFill>
                   <a:schemeClr val="tx1"/>
                 </a:solidFill>
               </a:rPr>
-              <a:t>External validation on unseen datasets</a:t>
-            </a:r>
-            <a:endParaRPr lang="en-US" sz="1500" dirty="0"/>
+              <a:t>Research prototype, not a clinical diagnostic tool</a:t>
+            </a:r>
+            <a:endParaRPr lang="en-US" sz="1400" dirty="0"/>
           </a:p>
           <a:p>
             <a:pPr marL="342900" indent="-342900">
@@ -6242,14 +6482,14 @@
               <a:buChar char="•"/>
             </a:pPr>
             <a:r>
-              <a:rPr lang="en-US" sz="1500" dirty="0">
+              <a:rPr lang="en-US" sz="1400" dirty="0">
                 <a:solidFill>
                   <a:schemeClr val="tx1"/>
                 </a:solidFill>
               </a:rPr>
-              <a:t>More robust evidence extraction</a:t>
-            </a:r>
-            <a:endParaRPr lang="en-US" sz="1500" dirty="0"/>
+              <a:t>Supports trained human review; never autonomous action</a:t>
+            </a:r>
+            <a:endParaRPr lang="en-US" sz="1400" dirty="0"/>
           </a:p>
           <a:p>
             <a:pPr marL="342900" indent="-342900">
@@ -6260,14 +6500,14 @@
               <a:buChar char="•"/>
             </a:pPr>
             <a:r>
-              <a:rPr lang="en-US" sz="1500" dirty="0">
+              <a:rPr lang="en-US" sz="1400" dirty="0">
                 <a:solidFill>
                   <a:schemeClr val="tx1"/>
                 </a:solidFill>
               </a:rPr>
-              <a:t>Better multi-label factor prediction</a:t>
-            </a:r>
-            <a:endParaRPr lang="en-US" sz="1500" dirty="0"/>
+              <a:t>Evidence step sends post text to an external LLM API: needs data-use approval or a local model</a:t>
+            </a:r>
+            <a:endParaRPr lang="en-US" sz="1400" dirty="0"/>
           </a:p>
           <a:p>
             <a:pPr marL="342900" indent="-342900">
@@ -6278,14 +6518,14 @@
               <a:buChar char="•"/>
             </a:pPr>
             <a:r>
-              <a:rPr lang="en-US" sz="1500" dirty="0">
+              <a:rPr lang="en-US" sz="1400" dirty="0">
                 <a:solidFill>
                   <a:schemeClr val="tx1"/>
                 </a:solidFill>
               </a:rPr>
-              <a:t>Human-in-the-loop, fairness and bias analysis</a:t>
-            </a:r>
-            <a:endParaRPr lang="en-US" sz="1500" dirty="0"/>
+              <a:t>About 1 in 4 held-out posts is misclassified</a:t>
+            </a:r>
+            <a:endParaRPr lang="en-US" sz="1400" dirty="0"/>
           </a:p>
         </p:txBody>
       </p:sp>
@@ -6369,8 +6609,8 @@
         </p:nvSpPr>
         <p:spPr>
           <a:xfrm>
-            <a:off x="548640" y="365760"/>
-            <a:ext cx="8046720" cy="914400"/>
+            <a:off x="457200" y="274320"/>
+            <a:ext cx="8229600" cy="640080"/>
           </a:xfrm>
           <a:prstGeom prst="rect">
             <a:avLst/>
@@ -6386,30 +6626,138 @@
               <a:buNone/>
             </a:pPr>
             <a:r>
-              <a:rPr lang="en-US" sz="3600" b="1" dirty="0">
-                <a:solidFill>
-                  <a:schemeClr val="bg1"/>
+              <a:rPr lang="en-US" sz="3000" b="1" dirty="0">
+                <a:solidFill>
+                  <a:schemeClr val="tx1"/>
                 </a:solidFill>
                 <a:latin typeface="Cambria" pitchFamily="34" charset="0"/>
                 <a:ea typeface="Cambria" pitchFamily="34" charset="-122"/>
                 <a:cs typeface="Cambria" pitchFamily="34" charset="-120"/>
               </a:rPr>
-              <a:t>Conclusion</a:t>
-            </a:r>
-            <a:endParaRPr lang="en-US" sz="3600" dirty="0"/>
-          </a:p>
-        </p:txBody>
-      </p:sp>
-      <p:sp>
-        <p:nvSpPr>
-          <p:cNvPr id="3" name="Text 1"/>
+              <a:t>Future Research Directions</a:t>
+            </a:r>
+            <a:endParaRPr lang="en-US" sz="3000" dirty="0"/>
+          </a:p>
+        </p:txBody>
+      </p:sp>
+      <p:sp>
+        <p:nvSpPr>
+          <p:cNvPr id="3" name="card"/>
+          <p:cNvSpPr/>
+          <p:nvPr/>
+        </p:nvSpPr>
+        <p:spPr>
+          <a:xfrm>
+            <a:off x="457200" y="1051560"/>
+            <a:ext cx="4023360" cy="3520440"/>
+          </a:xfrm>
+          <a:prstGeom prst="roundRect">
+            <a:avLst>
+              <a:gd name="adj" fmla="val 2078"/>
+            </a:avLst>
+          </a:prstGeom>
+          <a:solidFill>
+            <a:schemeClr val="bg2"/>
+          </a:solidFill>
+          <a:ln w="12700">
+            <a:solidFill>
+              <a:schemeClr val="bg2"/>
+            </a:solidFill>
+          </a:ln>
+        </p:spPr>
+        <p:txBody>
+          <a:bodyPr wrap="square" lIns="762" tIns="762" rIns="762" bIns="762" rtlCol="0" anchor="ctr"/>
+          <a:lstStyle/>
+          <a:p>
+            <a:pPr algn="ctr" indent="0" marL="0">
+              <a:buNone/>
+            </a:pPr>
+            <a:endParaRPr lang="en-US" sz="1200" dirty="0"/>
+          </a:p>
+        </p:txBody>
+      </p:sp>
+      <p:sp>
+        <p:nvSpPr>
+          <p:cNvPr id="4" name="card"/>
+          <p:cNvSpPr/>
+          <p:nvPr/>
+        </p:nvSpPr>
+        <p:spPr>
+          <a:xfrm>
+            <a:off x="4663440" y="1051560"/>
+            <a:ext cx="4023360" cy="3520440"/>
+          </a:xfrm>
+          <a:prstGeom prst="roundRect">
+            <a:avLst>
+              <a:gd name="adj" fmla="val 2078"/>
+            </a:avLst>
+          </a:prstGeom>
+          <a:solidFill>
+            <a:schemeClr val="bg2"/>
+          </a:solidFill>
+          <a:ln w="12700">
+            <a:solidFill>
+              <a:schemeClr val="bg2"/>
+            </a:solidFill>
+          </a:ln>
+        </p:spPr>
+        <p:txBody>
+          <a:bodyPr wrap="square" lIns="762" tIns="762" rIns="762" bIns="762" rtlCol="0" anchor="ctr"/>
+          <a:lstStyle/>
+          <a:p>
+            <a:pPr algn="ctr" indent="0" marL="0">
+              <a:buNone/>
+            </a:pPr>
+            <a:endParaRPr lang="en-US" sz="1200" dirty="0"/>
+          </a:p>
+        </p:txBody>
+      </p:sp>
+      <p:sp>
+        <p:nvSpPr>
+          <p:cNvPr id="5" name="Text 3"/>
           <p:cNvSpPr txBox="1"/>
           <p:nvPr/>
         </p:nvSpPr>
         <p:spPr>
           <a:xfrm>
-            <a:off x="548640" y="1371600"/>
-            <a:ext cx="8046720" cy="1828800"/>
+            <a:off x="640080" y="1143000"/>
+            <a:ext cx="3657600" cy="320040"/>
+          </a:xfrm>
+          <a:prstGeom prst="rect">
+            <a:avLst/>
+          </a:prstGeom>
+          <a:noFill/>
+          <a:ln/>
+        </p:spPr>
+        <p:txBody>
+          <a:bodyPr wrap="square" lIns="0" tIns="0" rIns="0" bIns="0" rtlCol="0" anchor="t"/>
+          <a:lstStyle/>
+          <a:p>
+            <a:pPr algn="l" indent="0" marL="0">
+              <a:buNone/>
+            </a:pPr>
+            <a:r>
+              <a:rPr lang="en-US" sz="1600" b="1" dirty="0">
+                <a:solidFill>
+                  <a:schemeClr val="accent5"/>
+                </a:solidFill>
+              </a:rPr>
+              <a:t>Next experiments</a:t>
+            </a:r>
+            <a:endParaRPr lang="en-US" sz="1600" dirty="0"/>
+          </a:p>
+        </p:txBody>
+      </p:sp>
+      <p:sp>
+        <p:nvSpPr>
+          <p:cNvPr id="6" name="Text 4"/>
+          <p:cNvSpPr txBox="1"/>
+          <p:nvPr/>
+        </p:nvSpPr>
+        <p:spPr>
+          <a:xfrm>
+            <a:off x="640080" y="1554480"/>
+            <a:ext cx="3657600" cy="2926080"/>
           </a:xfrm>
           <a:prstGeom prst="rect">
             <a:avLst/>
@@ -6429,14 +6777,14 @@
               <a:buChar char="•"/>
             </a:pPr>
             <a:r>
-              <a:rPr lang="en-US" sz="1700" dirty="0">
-                <a:solidFill>
-                  <a:schemeClr val="bg1"/>
-                </a:solidFill>
-              </a:rPr>
-              <a:t>Explainable NLP pipeline for suicide-risk assessment</a:t>
-            </a:r>
-            <a:endParaRPr lang="en-US" sz="1700" dirty="0"/>
+              <a:rPr lang="en-US" sz="1400" dirty="0">
+                <a:solidFill>
+                  <a:schemeClr val="tx1"/>
+                </a:solidFill>
+              </a:rPr>
+              <a:t>Multiple seeds and backbones; repair the DeBERTa-v3 run</a:t>
+            </a:r>
+            <a:endParaRPr lang="en-US" sz="1400" dirty="0"/>
           </a:p>
           <a:p>
             <a:pPr marL="342900" indent="-342900">
@@ -6447,14 +6795,14 @@
               <a:buChar char="•"/>
             </a:pPr>
             <a:r>
-              <a:rPr lang="en-US" sz="1700" dirty="0">
-                <a:solidFill>
-                  <a:schemeClr val="bg1"/>
-                </a:solidFill>
-              </a:rPr>
-              <a:t>Jointly addresses risk classification, evidence extraction and factor identification</a:t>
-            </a:r>
-            <a:endParaRPr lang="en-US" sz="1700" dirty="0"/>
+              <a:rPr lang="en-US" sz="1400" dirty="0">
+                <a:solidFill>
+                  <a:schemeClr val="tx1"/>
+                </a:solidFill>
+              </a:rPr>
+              <a:t>Ablate each fine-tuning setting</a:t>
+            </a:r>
+            <a:endParaRPr lang="en-US" sz="1400" dirty="0"/>
           </a:p>
           <a:p>
             <a:pPr marL="342900" indent="-342900">
@@ -6465,14 +6813,14 @@
               <a:buChar char="•"/>
             </a:pPr>
             <a:r>
-              <a:rPr lang="en-US" sz="1700" dirty="0">
-                <a:solidFill>
-                  <a:schemeClr val="bg1"/>
-                </a:solidFill>
-              </a:rPr>
-              <a:t>Risk model improved with richer TF-IDF features and multi-seed validation</a:t>
-            </a:r>
-            <a:endParaRPr lang="en-US" sz="1700" dirty="0"/>
+              <a:rPr lang="en-US" sz="1400" dirty="0">
+                <a:solidFill>
+                  <a:schemeClr val="tx1"/>
+                </a:solidFill>
+              </a:rPr>
+              <a:t>Store evidence predictions; compute the challenge span metric</a:t>
+            </a:r>
+            <a:endParaRPr lang="en-US" sz="1400" dirty="0"/>
           </a:p>
           <a:p>
             <a:pPr marL="342900" indent="-342900">
@@ -6483,27 +6831,45 @@
               <a:buChar char="•"/>
             </a:pPr>
             <a:r>
-              <a:rPr lang="en-US" sz="1700" dirty="0">
-                <a:solidFill>
-                  <a:schemeClr val="bg1"/>
-                </a:solidFill>
-              </a:rPr>
-              <a:t>Evidence is taken verbatim from the source post</a:t>
-            </a:r>
-            <a:endParaRPr lang="en-US" sz="1700" dirty="0"/>
-          </a:p>
-        </p:txBody>
-      </p:sp>
-      <p:sp>
-        <p:nvSpPr>
-          <p:cNvPr id="4" name="Text 2"/>
+              <a:rPr lang="en-US" sz="1400" dirty="0">
+                <a:solidFill>
+                  <a:schemeClr val="tx1"/>
+                </a:solidFill>
+              </a:rPr>
+              <a:t>Let evidence abstain on “none” posts</a:t>
+            </a:r>
+            <a:endParaRPr lang="en-US" sz="1400" dirty="0"/>
+          </a:p>
+          <a:p>
+            <a:pPr marL="342900" indent="-342900">
+              <a:spcAft>
+                <a:spcPts val="600"/>
+              </a:spcAft>
+              <a:buSzPct val="100000"/>
+              <a:buChar char="•"/>
+            </a:pPr>
+            <a:r>
+              <a:rPr lang="en-US" sz="1400" dirty="0">
+                <a:solidFill>
+                  <a:schemeClr val="tx1"/>
+                </a:solidFill>
+              </a:rPr>
+              <a:t>Local open model for evidence</a:t>
+            </a:r>
+            <a:endParaRPr lang="en-US" sz="1400" dirty="0"/>
+          </a:p>
+        </p:txBody>
+      </p:sp>
+      <p:sp>
+        <p:nvSpPr>
+          <p:cNvPr id="7" name="Text 5"/>
           <p:cNvSpPr txBox="1"/>
           <p:nvPr/>
         </p:nvSpPr>
         <p:spPr>
           <a:xfrm>
-            <a:off x="548640" y="3246120"/>
-            <a:ext cx="8046720" cy="457200"/>
+            <a:off x="4846320" y="1143000"/>
+            <a:ext cx="3657600" cy="320040"/>
           </a:xfrm>
           <a:prstGeom prst="rect">
             <a:avLst/>
@@ -6519,27 +6885,27 @@
               <a:buNone/>
             </a:pPr>
             <a:r>
-              <a:rPr lang="en-US" sz="2000" i="1" dirty="0">
-                <a:solidFill>
-                  <a:schemeClr val="accent4"/>
-                </a:solidFill>
-              </a:rPr>
-              <a:t>“Explainable AI should assist human judgment — not replace it.”</a:t>
-            </a:r>
-            <a:endParaRPr lang="en-US" sz="2000" dirty="0"/>
-          </a:p>
-        </p:txBody>
-      </p:sp>
-      <p:sp>
-        <p:nvSpPr>
-          <p:cNvPr id="5" name="Text 3"/>
+              <a:rPr lang="en-US" sz="1600" b="1" dirty="0">
+                <a:solidFill>
+                  <a:schemeClr val="accent1"/>
+                </a:solidFill>
+              </a:rPr>
+              <a:t>Research directions</a:t>
+            </a:r>
+            <a:endParaRPr lang="en-US" sz="1600" dirty="0"/>
+          </a:p>
+        </p:txBody>
+      </p:sp>
+      <p:sp>
+        <p:nvSpPr>
+          <p:cNvPr id="8" name="Text 6"/>
           <p:cNvSpPr txBox="1"/>
           <p:nvPr/>
         </p:nvSpPr>
         <p:spPr>
           <a:xfrm>
-            <a:off x="548640" y="4023360"/>
-            <a:ext cx="8046720" cy="457200"/>
+            <a:off x="4846320" y="1554480"/>
+            <a:ext cx="3657600" cy="2926080"/>
           </a:xfrm>
           <a:prstGeom prst="rect">
             <a:avLst/>
@@ -6551,21 +6917,76 @@
           <a:bodyPr wrap="square" lIns="0" tIns="0" rIns="0" bIns="0" rtlCol="0" anchor="t"/>
           <a:lstStyle/>
           <a:p>
-            <a:pPr algn="l" indent="0" marL="0">
-              <a:buNone/>
-            </a:pPr>
-            <a:r>
-              <a:rPr lang="en-US" sz="2600" b="1" dirty="0">
-                <a:solidFill>
-                  <a:schemeClr val="bg1"/>
-                </a:solidFill>
-                <a:latin typeface="Cambria" pitchFamily="34" charset="0"/>
-                <a:ea typeface="Cambria" pitchFamily="34" charset="-122"/>
-                <a:cs typeface="Cambria" pitchFamily="34" charset="-120"/>
-              </a:rPr>
-              <a:t>Thank You  |  Questions?</a:t>
-            </a:r>
-            <a:endParaRPr lang="en-US" sz="2600" dirty="0"/>
+            <a:pPr marL="342900" indent="-342900">
+              <a:spcAft>
+                <a:spcPts val="600"/>
+              </a:spcAft>
+              <a:buSzPct val="100000"/>
+              <a:buChar char="•"/>
+            </a:pPr>
+            <a:r>
+              <a:rPr lang="en-US" sz="1400" dirty="0">
+                <a:solidFill>
+                  <a:schemeClr val="tx1"/>
+                </a:solidFill>
+              </a:rPr>
+              <a:t>Calibration and uncertainty estimation</a:t>
+            </a:r>
+            <a:endParaRPr lang="en-US" sz="1400" dirty="0"/>
+          </a:p>
+          <a:p>
+            <a:pPr marL="342900" indent="-342900">
+              <a:spcAft>
+                <a:spcPts val="600"/>
+              </a:spcAft>
+              <a:buSzPct val="100000"/>
+              <a:buChar char="•"/>
+            </a:pPr>
+            <a:r>
+              <a:rPr lang="en-US" sz="1400" dirty="0">
+                <a:solidFill>
+                  <a:schemeClr val="tx1"/>
+                </a:solidFill>
+              </a:rPr>
+              <a:t>Fairness and cross-domain evaluation</a:t>
+            </a:r>
+            <a:endParaRPr lang="en-US" sz="1400" dirty="0"/>
+          </a:p>
+          <a:p>
+            <a:pPr marL="342900" indent="-342900">
+              <a:spcAft>
+                <a:spcPts val="600"/>
+              </a:spcAft>
+              <a:buSzPct val="100000"/>
+              <a:buChar char="•"/>
+            </a:pPr>
+            <a:r>
+              <a:rPr lang="en-US" sz="1400" dirty="0">
+                <a:solidFill>
+                  <a:schemeClr val="tx1"/>
+                </a:solidFill>
+              </a:rPr>
+              <a:t>Better handling of rare factors</a:t>
+            </a:r>
+            <a:endParaRPr lang="en-US" sz="1400" dirty="0"/>
+          </a:p>
+          <a:p>
+            <a:pPr marL="342900" indent="-342900">
+              <a:spcAft>
+                <a:spcPts val="600"/>
+              </a:spcAft>
+              <a:buSzPct val="100000"/>
+              <a:buChar char="•"/>
+            </a:pPr>
+            <a:r>
+              <a:rPr lang="en-US" sz="1400" dirty="0">
+                <a:solidFill>
+                  <a:schemeClr val="tx1"/>
+                </a:solidFill>
+              </a:rPr>
+              <a:t>Human-in-the-loop study with clinicians</a:t>
+            </a:r>
+            <a:endParaRPr lang="en-US" sz="1400" dirty="0"/>
           </a:p>
         </p:txBody>
       </p:sp>
@@ -6599,7 +7020,7 @@
             <a:lvl1pPr>
               <a:defRPr sz="1000">
                 <a:solidFill>
-                  <a:schemeClr val="accent4"/>
+                  <a:schemeClr val="accent3"/>
                 </a:solidFill>
               </a:defRPr>
             </a:lvl1pPr>
@@ -6609,6 +7030,286 @@
             <a:fld id="{F7021451-1387-4CA6-816F-3879F97B5CBC}" type="slidenum">
               <a:rPr b="0" lang="en-US"/>
               <a:t>14</a:t>
+            </a:fld>
+            <a:endParaRPr lang="en-US"/>
+          </a:p>
+        </p:txBody>
+      </p:sp>
+    </p:spTree>
+  </p:cSld>
+  <p:clrMapOvr>
+    <a:masterClrMapping/>
+  </p:clrMapOvr>
+</p:sld>
+</file>
+
+<file path=ppt/slides/slide15.xml><?xml version="1.0" encoding="utf-8"?>
+<p:sld xmlns:a="http://schemas.openxmlformats.org/drawingml/2006/main" xmlns:r="http://schemas.openxmlformats.org/officeDocument/2006/relationships" xmlns:p="http://schemas.openxmlformats.org/presentationml/2006/main">
+  <p:cSld name="Slide 15">
+    <p:spTree>
+      <p:nvGrpSpPr>
+        <p:cNvPr id="1" name=""/>
+        <p:cNvGrpSpPr/>
+        <p:nvPr/>
+      </p:nvGrpSpPr>
+      <p:grpSpPr>
+        <a:xfrm>
+          <a:off x="0" y="0"/>
+          <a:ext cx="0" cy="0"/>
+          <a:chOff x="0" y="0"/>
+          <a:chExt cx="0" cy="0"/>
+        </a:xfrm>
+      </p:grpSpPr>
+      <p:sp>
+        <p:nvSpPr>
+          <p:cNvPr id="2" name="Text 1"/>
+          <p:cNvSpPr/>
+          <p:nvPr>
+            <p:ph idx="101" type="title" hasCustomPrompt="1"/>
+          </p:nvPr>
+        </p:nvSpPr>
+        <p:spPr>
+          <a:xfrm>
+            <a:off x="548640" y="365760"/>
+            <a:ext cx="8046720" cy="914400"/>
+          </a:xfrm>
+          <a:prstGeom prst="rect">
+            <a:avLst/>
+          </a:prstGeom>
+          <a:noFill/>
+          <a:ln/>
+        </p:spPr>
+        <p:txBody>
+          <a:bodyPr wrap="square" lIns="0" tIns="0" rIns="0" bIns="0" rtlCol="0" anchor="ctr"/>
+          <a:lstStyle/>
+          <a:p>
+            <a:pPr algn="l" indent="0" marL="0">
+              <a:buNone/>
+            </a:pPr>
+            <a:r>
+              <a:rPr lang="en-US" sz="3600" b="1" dirty="0">
+                <a:solidFill>
+                  <a:schemeClr val="bg1"/>
+                </a:solidFill>
+                <a:latin typeface="Cambria" pitchFamily="34" charset="0"/>
+                <a:ea typeface="Cambria" pitchFamily="34" charset="-122"/>
+                <a:cs typeface="Cambria" pitchFamily="34" charset="-120"/>
+              </a:rPr>
+              <a:t>Conclusion</a:t>
+            </a:r>
+            <a:endParaRPr lang="en-US" sz="3600" dirty="0"/>
+          </a:p>
+        </p:txBody>
+      </p:sp>
+      <p:sp>
+        <p:nvSpPr>
+          <p:cNvPr id="3" name="Text 1"/>
+          <p:cNvSpPr txBox="1"/>
+          <p:nvPr/>
+        </p:nvSpPr>
+        <p:spPr>
+          <a:xfrm>
+            <a:off x="548640" y="1371600"/>
+            <a:ext cx="8046720" cy="1828800"/>
+          </a:xfrm>
+          <a:prstGeom prst="rect">
+            <a:avLst/>
+          </a:prstGeom>
+          <a:noFill/>
+          <a:ln/>
+        </p:spPr>
+        <p:txBody>
+          <a:bodyPr wrap="square" lIns="0" tIns="0" rIns="0" bIns="0" rtlCol="0" anchor="t"/>
+          <a:lstStyle/>
+          <a:p>
+            <a:pPr marL="342900" indent="-342900">
+              <a:spcAft>
+                <a:spcPts val="600"/>
+              </a:spcAft>
+              <a:buSzPct val="100000"/>
+              <a:buChar char="•"/>
+            </a:pPr>
+            <a:r>
+              <a:rPr lang="en-US" sz="1700" dirty="0">
+                <a:solidFill>
+                  <a:schemeClr val="bg1"/>
+                </a:solidFill>
+              </a:rPr>
+              <a:t>Fine-tuned MentalRoBERTa raised held-out risk accuracy from 62.4% to 76.7%</a:t>
+            </a:r>
+            <a:endParaRPr lang="en-US" sz="1700" dirty="0"/>
+          </a:p>
+          <a:p>
+            <a:pPr marL="342900" indent="-342900">
+              <a:spcAft>
+                <a:spcPts val="600"/>
+              </a:spcAft>
+              <a:buSzPct val="100000"/>
+              <a:buChar char="•"/>
+            </a:pPr>
+            <a:r>
+              <a:rPr lang="en-US" sz="1700" dirty="0">
+                <a:solidFill>
+                  <a:schemeClr val="bg1"/>
+                </a:solidFill>
+              </a:rPr>
+              <a:t>Factor macro F1 0.389 → 0.481; evidence token F1 0.229 → 0.318 (proxy)</a:t>
+            </a:r>
+            <a:endParaRPr lang="en-US" sz="1700" dirty="0"/>
+          </a:p>
+          <a:p>
+            <a:pPr marL="342900" indent="-342900">
+              <a:spcAft>
+                <a:spcPts val="600"/>
+              </a:spcAft>
+              <a:buSzPct val="100000"/>
+              <a:buChar char="•"/>
+            </a:pPr>
+            <a:r>
+              <a:rPr lang="en-US" sz="1700" dirty="0">
+                <a:solidFill>
+                  <a:schemeClr val="bg1"/>
+                </a:solidFill>
+              </a:rPr>
+              <a:t>Evidence is verified verbatim, but selected by an external LLM</a:t>
+            </a:r>
+            <a:endParaRPr lang="en-US" sz="1700" dirty="0"/>
+          </a:p>
+          <a:p>
+            <a:pPr marL="342900" indent="-342900">
+              <a:spcAft>
+                <a:spcPts val="600"/>
+              </a:spcAft>
+              <a:buSzPct val="100000"/>
+              <a:buChar char="•"/>
+            </a:pPr>
+            <a:r>
+              <a:rPr lang="en-US" sz="1700" dirty="0">
+                <a:solidFill>
+                  <a:schemeClr val="bg1"/>
+                </a:solidFill>
+              </a:rPr>
+              <a:t>Stricter validation corrected an earlier conclusion</a:t>
+            </a:r>
+            <a:endParaRPr lang="en-US" sz="1700" dirty="0"/>
+          </a:p>
+        </p:txBody>
+      </p:sp>
+      <p:sp>
+        <p:nvSpPr>
+          <p:cNvPr id="4" name="Text 2"/>
+          <p:cNvSpPr txBox="1"/>
+          <p:nvPr/>
+        </p:nvSpPr>
+        <p:spPr>
+          <a:xfrm>
+            <a:off x="548640" y="3246120"/>
+            <a:ext cx="8046720" cy="457200"/>
+          </a:xfrm>
+          <a:prstGeom prst="rect">
+            <a:avLst/>
+          </a:prstGeom>
+          <a:noFill/>
+          <a:ln/>
+        </p:spPr>
+        <p:txBody>
+          <a:bodyPr wrap="square" lIns="0" tIns="0" rIns="0" bIns="0" rtlCol="0" anchor="t"/>
+          <a:lstStyle/>
+          <a:p>
+            <a:pPr algn="l" indent="0" marL="0">
+              <a:buNone/>
+            </a:pPr>
+            <a:r>
+              <a:rPr lang="en-US" sz="2000" i="1" dirty="0">
+                <a:solidFill>
+                  <a:schemeClr val="accent4"/>
+                </a:solidFill>
+              </a:rPr>
+              <a:t>“Explainable AI should assist human judgment — not replace it.”</a:t>
+            </a:r>
+            <a:endParaRPr lang="en-US" sz="2000" dirty="0"/>
+          </a:p>
+        </p:txBody>
+      </p:sp>
+      <p:sp>
+        <p:nvSpPr>
+          <p:cNvPr id="5" name="Text 3"/>
+          <p:cNvSpPr txBox="1"/>
+          <p:nvPr/>
+        </p:nvSpPr>
+        <p:spPr>
+          <a:xfrm>
+            <a:off x="548640" y="4023360"/>
+            <a:ext cx="8046720" cy="457200"/>
+          </a:xfrm>
+          <a:prstGeom prst="rect">
+            <a:avLst/>
+          </a:prstGeom>
+          <a:noFill/>
+          <a:ln/>
+        </p:spPr>
+        <p:txBody>
+          <a:bodyPr wrap="square" lIns="0" tIns="0" rIns="0" bIns="0" rtlCol="0" anchor="t"/>
+          <a:lstStyle/>
+          <a:p>
+            <a:pPr algn="l" indent="0" marL="0">
+              <a:buNone/>
+            </a:pPr>
+            <a:r>
+              <a:rPr lang="en-US" sz="2600" b="1" dirty="0">
+                <a:solidFill>
+                  <a:schemeClr val="bg1"/>
+                </a:solidFill>
+                <a:latin typeface="Cambria" pitchFamily="34" charset="0"/>
+                <a:ea typeface="Cambria" pitchFamily="34" charset="-122"/>
+                <a:cs typeface="Cambria" pitchFamily="34" charset="-120"/>
+              </a:rPr>
+              <a:t>Thank You  |  Questions?</a:t>
+            </a:r>
+            <a:endParaRPr lang="en-US" sz="2600" dirty="0"/>
+          </a:p>
+        </p:txBody>
+      </p:sp>
+      <p:sp>
+        <p:nvSpPr>
+          <p:cNvPr id="25" name="Slide Number Placeholder 0"/>
+          <p:cNvSpPr>
+            <a:spLocks noGrp="1"/>
+          </p:cNvSpPr>
+          <p:nvPr>
+            <p:ph type="sldNum" sz="quarter" idx="4294967295"/>
+          </p:nvPr>
+        </p:nvSpPr>
+        <p:spPr>
+          <a:xfrm>
+            <a:off x="8229600" y="4773168"/>
+            <a:ext cx="457200" cy="256032"/>
+          </a:xfrm>
+          <a:prstGeom prst="rect">
+            <a:avLst/>
+          </a:prstGeom>
+          <a:extLst>
+            <a:ext uri="{C572A759-6A51-4108-AA02-DFA0A04FC94B}">
+              <ma14:wrappingTextBoxFlag xmlns:ma14="http://schemas.microsoft.com/office/mac/drawingml/2011/main" val="0"/>
+            </a:ext>
+          </a:extLst>
+        </p:spPr>
+        <p:txBody>
+          <a:bodyPr/>
+          <a:lstStyle>
+            <a:lvl1pPr>
+              <a:defRPr sz="1000">
+                <a:solidFill>
+                  <a:schemeClr val="accent4"/>
+                </a:solidFill>
+              </a:defRPr>
+            </a:lvl1pPr>
+          </a:lstStyle>
+          <a:p>
+            <a:pPr algn="l"/>
+            <a:fld id="{F7021451-1387-4CA6-816F-3879F97B5CBC}" type="slidenum">
+              <a:rPr b="0" lang="en-US"/>
+              <a:t>15</a:t>
             </a:fld>
             <a:endParaRPr lang="en-US"/>
           </a:p>
@@ -7286,7 +7987,7 @@
         <p:spPr>
           <a:xfrm>
             <a:off x="640080" y="2011680"/>
-            <a:ext cx="3657600" cy="1097280"/>
+            <a:ext cx="3657600" cy="822960"/>
           </a:xfrm>
           <a:prstGeom prst="rect">
             <a:avLst/>
@@ -7394,7 +8095,7 @@
         <p:spPr>
           <a:xfrm>
             <a:off x="4846320" y="2011680"/>
-            <a:ext cx="3657600" cy="1097280"/>
+            <a:ext cx="3657600" cy="822960"/>
           </a:xfrm>
           <a:prstGeom prst="rect">
             <a:avLst/>
@@ -7769,7 +8470,7 @@
                   <a:schemeClr val="accent3"/>
                 </a:solidFill>
               </a:rPr>
-              <a:t>Data: 1,635 labeled training posts  |  378 unlabeled leaderboard posts</a:t>
+              <a:t>Data: 1,635 labeled training posts  |  502 unlabeled prediction posts</a:t>
             </a:r>
             <a:endParaRPr lang="en-US" sz="1300" dirty="0"/>
           </a:p>
@@ -7880,7 +8581,7 @@
                 <a:ea typeface="Cambria" pitchFamily="34" charset="-122"/>
                 <a:cs typeface="Cambria" pitchFamily="34" charset="-120"/>
               </a:rPr>
-              <a:t>Dataset and Processing Pipeline</a:t>
+              <a:t>Dataset and Evaluation Protocol</a:t>
             </a:r>
             <a:endParaRPr lang="en-US" sz="3000" dirty="0"/>
           </a:p>
@@ -7992,7 +8693,7 @@
                   <a:schemeClr val="tx1"/>
                 </a:solidFill>
               </a:rPr>
-              <a:t>Data cleaning</a:t>
+              <a:t>Cleaning</a:t>
             </a:r>
             <a:endParaRPr lang="en-US" sz="1200" dirty="0"/>
           </a:p>
@@ -8060,7 +8761,7 @@
                   <a:schemeClr val="tx1"/>
                 </a:solidFill>
               </a:rPr>
-              <a:t>Exploratory analysis</a:t>
+              <a:t>Leakage check (by user)</a:t>
             </a:r>
             <a:endParaRPr lang="en-US" sz="1200" dirty="0"/>
           </a:p>
@@ -8128,7 +8829,7 @@
                   <a:schemeClr val="tx1"/>
                 </a:solidFill>
               </a:rPr>
-              <a:t>Leakage check</a:t>
+              <a:t>20% held-out split</a:t>
             </a:r>
             <a:endParaRPr lang="en-US" sz="1200" dirty="0"/>
           </a:p>
@@ -8196,7 +8897,7 @@
                   <a:schemeClr val="tx1"/>
                 </a:solidFill>
               </a:rPr>
-              <a:t>Text preprocessing</a:t>
+              <a:t>5-fold grouped CV</a:t>
             </a:r>
             <a:endParaRPr lang="en-US" sz="1200" dirty="0"/>
           </a:p>
@@ -8264,7 +8965,7 @@
                   <a:schemeClr val="tx1"/>
                 </a:solidFill>
               </a:rPr>
-              <a:t>Train / validation split</a:t>
+              <a:t>Fine-tune models</a:t>
             </a:r>
             <a:endParaRPr lang="en-US" sz="1200" dirty="0"/>
           </a:p>
@@ -8332,7 +9033,7 @@
                   <a:schemeClr val="tx1"/>
                 </a:solidFill>
               </a:rPr>
-              <a:t>Feature extraction</a:t>
+              <a:t>Out-of-fold (OOF) predictions</a:t>
             </a:r>
             <a:endParaRPr lang="en-US" sz="1200" dirty="0"/>
           </a:p>
@@ -8400,7 +9101,7 @@
                   <a:schemeClr val="tx1"/>
                 </a:solidFill>
               </a:rPr>
-              <a:t>Model training</a:t>
+              <a:t>Tune blend + thresholds</a:t>
             </a:r>
             <a:endParaRPr lang="en-US" sz="1200" dirty="0"/>
           </a:p>
@@ -8468,7 +9169,7 @@
                   <a:schemeClr val="tx1"/>
                 </a:solidFill>
               </a:rPr>
-              <a:t>Validation</a:t>
+              <a:t>Score held-out once</a:t>
             </a:r>
             <a:endParaRPr lang="en-US" sz="1200" dirty="0"/>
           </a:p>
@@ -8536,7 +9237,7 @@
                   <a:schemeClr val="bg1"/>
                 </a:solidFill>
               </a:rPr>
-              <a:t>Final prediction</a:t>
+              <a:t>Final output</a:t>
             </a:r>
             <a:endParaRPr lang="en-US" sz="1200" dirty="0"/>
           </a:p>
@@ -8644,7 +9345,7 @@
                   <a:schemeClr val="tx1"/>
                 </a:solidFill>
               </a:rPr>
-              <a:t>labeled posts</a:t>
+              <a:t>labeled posts, 153 users</a:t>
             </a:r>
             <a:endParaRPr lang="en-US" sz="1200" dirty="0"/>
           </a:p>
@@ -8716,7 +9417,7 @@
                   <a:schemeClr val="accent1"/>
                 </a:solidFill>
               </a:rPr>
-              <a:t>378</a:t>
+              <a:t>1,305</a:t>
             </a:r>
             <a:endParaRPr lang="en-US" sz="3600" dirty="0"/>
           </a:p>
@@ -8752,7 +9453,7 @@
                   <a:schemeClr val="tx1"/>
                 </a:solidFill>
               </a:rPr>
-              <a:t>leaderboard posts</a:t>
+              <a:t>development posts, 121 users</a:t>
             </a:r>
             <a:endParaRPr lang="en-US" sz="1200" dirty="0"/>
           </a:p>
@@ -8824,7 +9525,7 @@
                   <a:schemeClr val="accent1"/>
                 </a:solidFill>
               </a:rPr>
-              <a:t>153</a:t>
+              <a:t>330</a:t>
             </a:r>
             <a:endParaRPr lang="en-US" sz="3600" dirty="0"/>
           </a:p>
@@ -8860,7 +9561,7 @@
                   <a:schemeClr val="tx1"/>
                 </a:solidFill>
               </a:rPr>
-              <a:t>users; user-grouped split, no overlap</a:t>
+              <a:t>held-out posts, 32 users</a:t>
             </a:r>
             <a:endParaRPr lang="en-US" sz="1200" dirty="0"/>
           </a:p>
@@ -9191,7 +9892,7 @@
                   <a:schemeClr val="tx1"/>
                 </a:solidFill>
               </a:rPr>
-              <a:t>Text preprocessing</a:t>
+              <a:t>Cleaning + user-grouped split</a:t>
             </a:r>
             <a:endParaRPr lang="en-US" sz="1200" dirty="0"/>
           </a:p>
@@ -9306,7 +10007,7 @@
                   <a:schemeClr val="tx1"/>
                 </a:solidFill>
               </a:rPr>
-              <a:t>TF-IDF: word + char 3–5-grams</a:t>
+              <a:t>MentalRoBERTa, 5 fold models + TF-IDF member</a:t>
             </a:r>
             <a:endParaRPr lang="en-US" sz="1200" dirty="0"/>
           </a:p>
@@ -9374,7 +10075,7 @@
                   <a:schemeClr val="tx1"/>
                 </a:solidFill>
               </a:rPr>
-              <a:t>Logistic Regression</a:t>
+              <a:t>Blend (w = 0.20, chosen on OOF)</a:t>
             </a:r>
             <a:endParaRPr lang="en-US" sz="1200" dirty="0"/>
           </a:p>
@@ -9534,7 +10235,7 @@
                   <a:schemeClr val="tx1"/>
                 </a:solidFill>
               </a:rPr>
-              <a:t>Candidate spans: sentences, sub-clauses</a:t>
+              <a:t>LLM proposes 1–3 spans (post + predicted risk)</a:t>
             </a:r>
             <a:endParaRPr lang="en-US" sz="1200" dirty="0"/>
           </a:p>
@@ -9602,7 +10303,7 @@
                   <a:schemeClr val="tx1"/>
                 </a:solidFill>
               </a:rPr>
-              <a:t>Span scoring + tuned threshold (0.7)</a:t>
+              <a:t>Keep only exact matches in the post</a:t>
             </a:r>
             <a:endParaRPr lang="en-US" sz="1200" dirty="0"/>
           </a:p>
@@ -9670,7 +10371,7 @@
                   <a:schemeClr val="bg1"/>
                 </a:solidFill>
               </a:rPr>
-              <a:t>Evidence phrase(s), verbatim</a:t>
+              <a:t>Verbatim evidence</a:t>
             </a:r>
             <a:endParaRPr lang="en-US" sz="1200" dirty="0"/>
           </a:p>
@@ -9762,7 +10463,7 @@
                   <a:schemeClr val="tx1"/>
                 </a:solidFill>
               </a:rPr>
-              <a:t>TF-IDF: word 1–2-grams</a:t>
+              <a:t>MentalRoBERTa multi-label (24 outputs)</a:t>
             </a:r>
             <a:endParaRPr lang="en-US" sz="1200" dirty="0"/>
           </a:p>
@@ -9830,7 +10531,7 @@
                   <a:schemeClr val="tx1"/>
                 </a:solidFill>
               </a:rPr>
-              <a:t>One-vs-Rest Logistic Regression, per-factor thresholds</a:t>
+              <a:t>Per-factor thresholds tuned on OOF</a:t>
             </a:r>
             <a:endParaRPr lang="en-US" sz="1200" dirty="0"/>
           </a:p>
@@ -10259,7 +10960,7 @@
                   <a:schemeClr val="accent3"/>
                 </a:solidFill>
               </a:rPr>
-              <a:t>TF-IDF (word + char n-grams) + Logistic Regression</a:t>
+              <a:t>MentalRoBERTa (fine-tuned) + TF-IDF</a:t>
             </a:r>
             <a:endParaRPr lang="en-US" sz="1300" dirty="0"/>
           </a:p>
@@ -10299,7 +11000,7 @@
                   <a:schemeClr val="tx1"/>
                 </a:solidFill>
               </a:rPr>
-              <a:t>Word 1–2-grams</a:t>
+              <a:t>512 tokens, head + tail kept</a:t>
             </a:r>
             <a:endParaRPr lang="en-US" sz="1300" dirty="0"/>
           </a:p>
@@ -10317,7 +11018,7 @@
                   <a:schemeClr val="tx1"/>
                 </a:solidFill>
               </a:rPr>
-              <a:t>Character 3–5-grams</a:t>
+              <a:t>Layer-wise LR decay, label smoothing</a:t>
             </a:r>
             <a:endParaRPr lang="en-US" sz="1300" dirty="0"/>
           </a:p>
@@ -10335,7 +11036,7 @@
                   <a:schemeClr val="tx1"/>
                 </a:solidFill>
               </a:rPr>
-              <a:t>Balanced class weights</a:t>
+              <a:t>TF-IDF blend weight 0.20 from OOF</a:t>
             </a:r>
             <a:endParaRPr lang="en-US" sz="1300" dirty="0"/>
           </a:p>
@@ -10470,7 +11171,7 @@
                   <a:schemeClr val="accent3"/>
                 </a:solidFill>
               </a:rPr>
-              <a:t>Phrase-level span scoring</a:t>
+              <a:t>LLM span selection + verification</a:t>
             </a:r>
             <a:endParaRPr lang="en-US" sz="1300" dirty="0"/>
           </a:p>
@@ -10510,7 +11211,7 @@
                   <a:schemeClr val="tx1"/>
                 </a:solidFill>
               </a:rPr>
-              <a:t>Split into sentences / sub-clauses</a:t>
+              <a:t>gpt-oss-120b, temperature 0</a:t>
             </a:r>
             <a:endParaRPr lang="en-US" sz="1300" dirty="0"/>
           </a:p>
@@ -10528,7 +11229,7 @@
                   <a:schemeClr val="tx1"/>
                 </a:solidFill>
               </a:rPr>
-              <a:t>Score candidates (TF-IDF + LR)</a:t>
+              <a:t>Spans matched exactly in the post</a:t>
             </a:r>
             <a:endParaRPr lang="en-US" sz="1300" dirty="0"/>
           </a:p>
@@ -10546,7 +11247,7 @@
                   <a:schemeClr val="tx1"/>
                 </a:solidFill>
               </a:rPr>
-              <a:t>Threshold 0.7; prefer concise spans</a:t>
+              <a:t>No match: best-cue sentence</a:t>
             </a:r>
             <a:endParaRPr lang="en-US" sz="1300" dirty="0"/>
           </a:p>
@@ -10681,7 +11382,7 @@
                   <a:schemeClr val="accent3"/>
                 </a:solidFill>
               </a:rPr>
-              <a:t>TF-IDF + One-vs-Rest Logistic Regression</a:t>
+              <a:t>MentalRoBERTa multi-label</a:t>
             </a:r>
             <a:endParaRPr lang="en-US" sz="1300" dirty="0"/>
           </a:p>
@@ -10721,7 +11422,7 @@
                   <a:schemeClr val="tx1"/>
                 </a:solidFill>
               </a:rPr>
-              <a:t>24 independent binary models</a:t>
+              <a:t>24 sigmoid outputs, 5 folds</a:t>
             </a:r>
             <a:endParaRPr lang="en-US" sz="1300" dirty="0"/>
           </a:p>
@@ -10739,7 +11440,7 @@
                   <a:schemeClr val="tx1"/>
                 </a:solidFill>
               </a:rPr>
-              <a:t>Individually tuned thresholds</a:t>
+              <a:t>Per-factor thresholds, cross-fitted</a:t>
             </a:r>
             <a:endParaRPr lang="en-US" sz="1300" dirty="0"/>
           </a:p>
@@ -10757,7 +11458,7 @@
                   <a:schemeClr val="tx1"/>
                 </a:solidFill>
               </a:rPr>
-              <a:t>Multi-label output</a:t>
+              <a:t>Rare factors keep 0.5</a:t>
             </a:r>
             <a:endParaRPr lang="en-US" sz="1300" dirty="0"/>
           </a:p>
@@ -10801,7 +11502,7 @@
                   <a:schemeClr val="bg1"/>
                 </a:solidFill>
               </a:rPr>
-              <a:t>Evidence is never generated or paraphrased: every span is an exact substring of the source post.</a:t>
+              <a:t>Every evidence span is copied from the post; the LLM only chooses which text to copy.</a:t>
             </a:r>
             <a:endParaRPr lang="en-US" sz="1500" dirty="0"/>
           </a:p>
@@ -10912,7 +11613,7 @@
                 <a:ea typeface="Cambria" pitchFamily="34" charset="-122"/>
                 <a:cs typeface="Cambria" pitchFamily="34" charset="-120"/>
               </a:rPr>
-              <a:t>Systematic Model Improvement</a:t>
+              <a:t>Without This / With This</a:t>
             </a:r>
             <a:endParaRPr lang="en-US" sz="3000" dirty="0"/>
           </a:p>
@@ -10920,14 +11621,86 @@
       </p:sp>
       <p:sp>
         <p:nvSpPr>
-          <p:cNvPr id="3" name="step"/>
-          <p:cNvSpPr/>
-          <p:nvPr/>
-        </p:nvSpPr>
-        <p:spPr>
-          <a:xfrm>
-            <a:off x="457200" y="1097280"/>
-            <a:ext cx="3383280" cy="502920"/>
+          <p:cNvPr id="3" name="Text 1"/>
+          <p:cNvSpPr txBox="1"/>
+          <p:nvPr/>
+        </p:nvSpPr>
+        <p:spPr>
+          <a:xfrm>
+            <a:off x="457200" y="960120"/>
+            <a:ext cx="3474720" cy="274320"/>
+          </a:xfrm>
+          <a:prstGeom prst="rect">
+            <a:avLst/>
+          </a:prstGeom>
+          <a:noFill/>
+          <a:ln/>
+        </p:spPr>
+        <p:txBody>
+          <a:bodyPr wrap="square" lIns="0" tIns="0" rIns="0" bIns="0" rtlCol="0" anchor="t"/>
+          <a:lstStyle/>
+          <a:p>
+            <a:pPr algn="l" indent="0" marL="0">
+              <a:buNone/>
+            </a:pPr>
+            <a:r>
+              <a:rPr lang="en-US" sz="1200" b="1" dirty="0">
+                <a:solidFill>
+                  <a:schemeClr val="accent3"/>
+                </a:solidFill>
+              </a:rPr>
+              <a:t>WITHOUT (earlier pipeline)</a:t>
+            </a:r>
+            <a:endParaRPr lang="en-US" sz="1200" dirty="0"/>
+          </a:p>
+        </p:txBody>
+      </p:sp>
+      <p:sp>
+        <p:nvSpPr>
+          <p:cNvPr id="4" name="Text 2"/>
+          <p:cNvSpPr txBox="1"/>
+          <p:nvPr/>
+        </p:nvSpPr>
+        <p:spPr>
+          <a:xfrm>
+            <a:off x="5212080" y="960120"/>
+            <a:ext cx="3474720" cy="274320"/>
+          </a:xfrm>
+          <a:prstGeom prst="rect">
+            <a:avLst/>
+          </a:prstGeom>
+          <a:noFill/>
+          <a:ln/>
+        </p:spPr>
+        <p:txBody>
+          <a:bodyPr wrap="square" lIns="0" tIns="0" rIns="0" bIns="0" rtlCol="0" anchor="t"/>
+          <a:lstStyle/>
+          <a:p>
+            <a:pPr algn="l" indent="0" marL="0">
+              <a:buNone/>
+            </a:pPr>
+            <a:r>
+              <a:rPr lang="en-US" sz="1200" b="1" dirty="0">
+                <a:solidFill>
+                  <a:schemeClr val="accent1"/>
+                </a:solidFill>
+              </a:rPr>
+              <a:t>WITH (current pipeline)</a:t>
+            </a:r>
+            <a:endParaRPr lang="en-US" sz="1200" dirty="0"/>
+          </a:p>
+        </p:txBody>
+      </p:sp>
+      <p:sp>
+        <p:nvSpPr>
+          <p:cNvPr id="5" name="without"/>
+          <p:cNvSpPr/>
+          <p:nvPr/>
+        </p:nvSpPr>
+        <p:spPr>
+          <a:xfrm>
+            <a:off x="457200" y="1280160"/>
+            <a:ext cx="3840480" cy="502920"/>
           </a:xfrm>
           <a:prstGeom prst="roundRect">
             <a:avLst>
@@ -10951,27 +11724,27 @@
               <a:buNone/>
             </a:pPr>
             <a:r>
-              <a:rPr lang="en-US" sz="1300" b="1" dirty="0">
+              <a:rPr lang="en-US" sz="1200" dirty="0">
                 <a:solidFill>
                   <a:schemeClr val="tx1"/>
                 </a:solidFill>
               </a:rPr>
-              <a:t>Baseline: word TF-IDF + LogReg</a:t>
-            </a:r>
-            <a:endParaRPr lang="en-US" sz="1300" dirty="0"/>
-          </a:p>
-        </p:txBody>
-      </p:sp>
-      <p:sp>
-        <p:nvSpPr>
-          <p:cNvPr id="4" name="Shape 2"/>
-          <p:cNvSpPr/>
-          <p:nvPr/>
-        </p:nvSpPr>
-        <p:spPr>
-          <a:xfrm>
-            <a:off x="2148840" y="1600200"/>
-            <a:ext cx="0" cy="182880"/>
+              <a:t>Risk: TF-IDF + logistic regression</a:t>
+            </a:r>
+            <a:endParaRPr lang="en-US" sz="1200" dirty="0"/>
+          </a:p>
+        </p:txBody>
+      </p:sp>
+      <p:sp>
+        <p:nvSpPr>
+          <p:cNvPr id="6" name="Shape 4"/>
+          <p:cNvSpPr/>
+          <p:nvPr/>
+        </p:nvSpPr>
+        <p:spPr>
+          <a:xfrm>
+            <a:off x="4343400" y="1531620"/>
+            <a:ext cx="777240" cy="0"/>
           </a:xfrm>
           <a:prstGeom prst="line">
             <a:avLst/>
@@ -10979,7 +11752,7 @@
           <a:noFill/>
           <a:ln w="19050">
             <a:solidFill>
-              <a:schemeClr val="accent3"/>
+              <a:schemeClr val="accent1"/>
             </a:solidFill>
             <a:prstDash val="solid"/>
             <a:tailEnd type="triangle"/>
@@ -10988,14 +11761,14 @@
       </p:sp>
       <p:sp>
         <p:nvSpPr>
-          <p:cNvPr id="5" name="step"/>
-          <p:cNvSpPr/>
-          <p:nvPr/>
-        </p:nvSpPr>
-        <p:spPr>
-          <a:xfrm>
-            <a:off x="457200" y="1783080"/>
-            <a:ext cx="3383280" cy="502920"/>
+          <p:cNvPr id="7" name="with"/>
+          <p:cNvSpPr/>
+          <p:nvPr/>
+        </p:nvSpPr>
+        <p:spPr>
+          <a:xfrm>
+            <a:off x="5212080" y="1280160"/>
+            <a:ext cx="3474720" cy="502920"/>
           </a:xfrm>
           <a:prstGeom prst="roundRect">
             <a:avLst>
@@ -11003,11 +11776,11 @@
             </a:avLst>
           </a:prstGeom>
           <a:solidFill>
-            <a:schemeClr val="bg2"/>
+            <a:schemeClr val="accent1"/>
           </a:solidFill>
           <a:ln w="12700">
             <a:solidFill>
-              <a:schemeClr val="bg2"/>
+              <a:schemeClr val="accent1"/>
             </a:solidFill>
           </a:ln>
         </p:spPr>
@@ -11019,51 +11792,27 @@
               <a:buNone/>
             </a:pPr>
             <a:r>
-              <a:rPr lang="en-US" sz="1300" b="1" dirty="0">
-                <a:solidFill>
-                  <a:schemeClr val="tx1"/>
-                </a:solidFill>
-              </a:rPr>
-              <a:t>Add character 3–5-gram features</a:t>
-            </a:r>
-            <a:endParaRPr lang="en-US" sz="1300" dirty="0"/>
-          </a:p>
-        </p:txBody>
-      </p:sp>
-      <p:sp>
-        <p:nvSpPr>
-          <p:cNvPr id="6" name="Shape 4"/>
-          <p:cNvSpPr/>
-          <p:nvPr/>
-        </p:nvSpPr>
-        <p:spPr>
-          <a:xfrm>
-            <a:off x="2148840" y="2286000"/>
-            <a:ext cx="0" cy="182880"/>
-          </a:xfrm>
-          <a:prstGeom prst="line">
-            <a:avLst/>
-          </a:prstGeom>
-          <a:noFill/>
-          <a:ln w="19050">
-            <a:solidFill>
-              <a:schemeClr val="accent3"/>
-            </a:solidFill>
-            <a:prstDash val="solid"/>
-            <a:tailEnd type="triangle"/>
-          </a:ln>
-        </p:spPr>
-      </p:sp>
-      <p:sp>
-        <p:nvSpPr>
-          <p:cNvPr id="7" name="step"/>
-          <p:cNvSpPr/>
-          <p:nvPr/>
-        </p:nvSpPr>
-        <p:spPr>
-          <a:xfrm>
-            <a:off x="457200" y="2468880"/>
-            <a:ext cx="3383280" cy="502920"/>
+              <a:rPr lang="en-US" sz="1200" b="1" dirty="0">
+                <a:solidFill>
+                  <a:schemeClr val="bg1"/>
+                </a:solidFill>
+              </a:rPr>
+              <a:t>Risk: MentalRoBERTa + TF-IDF blend</a:t>
+            </a:r>
+            <a:endParaRPr lang="en-US" sz="1200" dirty="0"/>
+          </a:p>
+        </p:txBody>
+      </p:sp>
+      <p:sp>
+        <p:nvSpPr>
+          <p:cNvPr id="8" name="without"/>
+          <p:cNvSpPr/>
+          <p:nvPr/>
+        </p:nvSpPr>
+        <p:spPr>
+          <a:xfrm>
+            <a:off x="457200" y="1938528"/>
+            <a:ext cx="3840480" cy="502920"/>
           </a:xfrm>
           <a:prstGeom prst="roundRect">
             <a:avLst>
@@ -11087,27 +11836,27 @@
               <a:buNone/>
             </a:pPr>
             <a:r>
-              <a:rPr lang="en-US" sz="1300" b="1" dirty="0">
+              <a:rPr lang="en-US" sz="1200" dirty="0">
                 <a:solidFill>
                   <a:schemeClr val="tx1"/>
                 </a:solidFill>
               </a:rPr>
-              <a:t>Hyperparameter + threshold tuning</a:t>
-            </a:r>
-            <a:endParaRPr lang="en-US" sz="1300" dirty="0"/>
-          </a:p>
-        </p:txBody>
-      </p:sp>
-      <p:sp>
-        <p:nvSpPr>
-          <p:cNvPr id="8" name="Shape 6"/>
-          <p:cNvSpPr/>
-          <p:nvPr/>
-        </p:nvSpPr>
-        <p:spPr>
-          <a:xfrm>
-            <a:off x="2148840" y="2971800"/>
-            <a:ext cx="0" cy="182880"/>
+              <a:t>Factors: TF-IDF, one-vs-rest LR</a:t>
+            </a:r>
+            <a:endParaRPr lang="en-US" sz="1200" dirty="0"/>
+          </a:p>
+        </p:txBody>
+      </p:sp>
+      <p:sp>
+        <p:nvSpPr>
+          <p:cNvPr id="9" name="Shape 7"/>
+          <p:cNvSpPr/>
+          <p:nvPr/>
+        </p:nvSpPr>
+        <p:spPr>
+          <a:xfrm>
+            <a:off x="4343400" y="2189988"/>
+            <a:ext cx="777240" cy="0"/>
           </a:xfrm>
           <a:prstGeom prst="line">
             <a:avLst/>
@@ -11115,7 +11864,7 @@
           <a:noFill/>
           <a:ln w="19050">
             <a:solidFill>
-              <a:schemeClr val="accent3"/>
+              <a:schemeClr val="accent1"/>
             </a:solidFill>
             <a:prstDash val="solid"/>
             <a:tailEnd type="triangle"/>
@@ -11124,14 +11873,14 @@
       </p:sp>
       <p:sp>
         <p:nvSpPr>
-          <p:cNvPr id="9" name="step"/>
-          <p:cNvSpPr/>
-          <p:nvPr/>
-        </p:nvSpPr>
-        <p:spPr>
-          <a:xfrm>
-            <a:off x="457200" y="3154680"/>
-            <a:ext cx="3383280" cy="502920"/>
+          <p:cNvPr id="10" name="with"/>
+          <p:cNvSpPr/>
+          <p:nvPr/>
+        </p:nvSpPr>
+        <p:spPr>
+          <a:xfrm>
+            <a:off x="5212080" y="1938528"/>
+            <a:ext cx="3474720" cy="502920"/>
           </a:xfrm>
           <a:prstGeom prst="roundRect">
             <a:avLst>
@@ -11139,11 +11888,11 @@
             </a:avLst>
           </a:prstGeom>
           <a:solidFill>
-            <a:schemeClr val="bg2"/>
+            <a:schemeClr val="accent1"/>
           </a:solidFill>
           <a:ln w="12700">
             <a:solidFill>
-              <a:schemeClr val="bg2"/>
+              <a:schemeClr val="accent1"/>
             </a:solidFill>
           </a:ln>
         </p:spPr>
@@ -11155,51 +11904,27 @@
               <a:buNone/>
             </a:pPr>
             <a:r>
-              <a:rPr lang="en-US" sz="1300" b="1" dirty="0">
-                <a:solidFill>
-                  <a:schemeClr val="tx1"/>
-                </a:solidFill>
-              </a:rPr>
-              <a:t>Multi-seed validation</a:t>
-            </a:r>
-            <a:endParaRPr lang="en-US" sz="1300" dirty="0"/>
-          </a:p>
-        </p:txBody>
-      </p:sp>
-      <p:sp>
-        <p:nvSpPr>
-          <p:cNvPr id="10" name="Shape 8"/>
-          <p:cNvSpPr/>
-          <p:nvPr/>
-        </p:nvSpPr>
-        <p:spPr>
-          <a:xfrm>
-            <a:off x="2148840" y="3657600"/>
-            <a:ext cx="0" cy="182880"/>
-          </a:xfrm>
-          <a:prstGeom prst="line">
-            <a:avLst/>
-          </a:prstGeom>
-          <a:noFill/>
-          <a:ln w="19050">
-            <a:solidFill>
-              <a:schemeClr val="accent3"/>
-            </a:solidFill>
-            <a:prstDash val="solid"/>
-            <a:tailEnd type="triangle"/>
-          </a:ln>
-        </p:spPr>
-      </p:sp>
-      <p:sp>
-        <p:nvSpPr>
-          <p:cNvPr id="11" name="step"/>
-          <p:cNvSpPr/>
-          <p:nvPr/>
-        </p:nvSpPr>
-        <p:spPr>
-          <a:xfrm>
-            <a:off x="457200" y="3840480"/>
-            <a:ext cx="3383280" cy="502920"/>
+              <a:rPr lang="en-US" sz="1200" b="1" dirty="0">
+                <a:solidFill>
+                  <a:schemeClr val="bg1"/>
+                </a:solidFill>
+              </a:rPr>
+              <a:t>Factors: MentalRoBERTa multi-label</a:t>
+            </a:r>
+            <a:endParaRPr lang="en-US" sz="1200" dirty="0"/>
+          </a:p>
+        </p:txBody>
+      </p:sp>
+      <p:sp>
+        <p:nvSpPr>
+          <p:cNvPr id="11" name="without"/>
+          <p:cNvSpPr/>
+          <p:nvPr/>
+        </p:nvSpPr>
+        <p:spPr>
+          <a:xfrm>
+            <a:off x="457200" y="2596896"/>
+            <a:ext cx="3840480" cy="502920"/>
           </a:xfrm>
           <a:prstGeom prst="roundRect">
             <a:avLst>
@@ -11207,6 +11932,74 @@
             </a:avLst>
           </a:prstGeom>
           <a:solidFill>
+            <a:schemeClr val="bg2"/>
+          </a:solidFill>
+          <a:ln w="12700">
+            <a:solidFill>
+              <a:schemeClr val="bg2"/>
+            </a:solidFill>
+          </a:ln>
+        </p:spPr>
+        <p:txBody>
+          <a:bodyPr wrap="square" lIns="762" tIns="762" rIns="762" bIns="762" rtlCol="0" anchor="ctr"/>
+          <a:lstStyle/>
+          <a:p>
+            <a:pPr algn="ctr" indent="0" marL="0">
+              <a:buNone/>
+            </a:pPr>
+            <a:r>
+              <a:rPr lang="en-US" sz="1200" dirty="0">
+                <a:solidFill>
+                  <a:schemeClr val="tx1"/>
+                </a:solidFill>
+              </a:rPr>
+              <a:t>Evidence: phrase-level span scorer</a:t>
+            </a:r>
+            <a:endParaRPr lang="en-US" sz="1200" dirty="0"/>
+          </a:p>
+        </p:txBody>
+      </p:sp>
+      <p:sp>
+        <p:nvSpPr>
+          <p:cNvPr id="12" name="Shape 10"/>
+          <p:cNvSpPr/>
+          <p:nvPr/>
+        </p:nvSpPr>
+        <p:spPr>
+          <a:xfrm>
+            <a:off x="4343400" y="2848356"/>
+            <a:ext cx="777240" cy="0"/>
+          </a:xfrm>
+          <a:prstGeom prst="line">
+            <a:avLst/>
+          </a:prstGeom>
+          <a:noFill/>
+          <a:ln w="19050">
+            <a:solidFill>
+              <a:schemeClr val="accent1"/>
+            </a:solidFill>
+            <a:prstDash val="solid"/>
+            <a:tailEnd type="triangle"/>
+          </a:ln>
+        </p:spPr>
+      </p:sp>
+      <p:sp>
+        <p:nvSpPr>
+          <p:cNvPr id="13" name="with"/>
+          <p:cNvSpPr/>
+          <p:nvPr/>
+        </p:nvSpPr>
+        <p:spPr>
+          <a:xfrm>
+            <a:off x="5212080" y="2596896"/>
+            <a:ext cx="3474720" cy="502920"/>
+          </a:xfrm>
+          <a:prstGeom prst="roundRect">
+            <a:avLst>
+              <a:gd name="adj" fmla="val 14545"/>
+            </a:avLst>
+          </a:prstGeom>
+          <a:solidFill>
             <a:schemeClr val="accent1"/>
           </a:solidFill>
           <a:ln w="12700">
@@ -11223,111 +12016,236 @@
               <a:buNone/>
             </a:pPr>
             <a:r>
-              <a:rPr lang="en-US" sz="1300" b="1" dirty="0">
+              <a:rPr lang="en-US" sz="1200" b="1" dirty="0">
                 <a:solidFill>
                   <a:schemeClr val="bg1"/>
                 </a:solidFill>
               </a:rPr>
-              <a:t>Improved robust pipeline</a:t>
-            </a:r>
-            <a:endParaRPr lang="en-US" sz="1300" dirty="0"/>
-          </a:p>
-        </p:txBody>
-      </p:sp>
-      <p:graphicFrame>
-        <p:nvGraphicFramePr>
-          <p:cNvPr id="12" name="Chart 0" descr=""/>
-          <p:cNvGraphicFramePr/>
-          <p:nvPr/>
-        </p:nvGraphicFramePr>
-        <p:xfrm>
-          <a:off x="4114800" y="1005840"/>
-          <a:ext cx="4572000" cy="2743200"/>
-        </p:xfrm>
-        <a:graphic xmlns:a="http://schemas.openxmlformats.org/drawingml/2006/main">
-          <a:graphicData uri="http://schemas.openxmlformats.org/drawingml/2006/chart">
-            <c:chart xmlns:c="http://schemas.openxmlformats.org/drawingml/2006/chart" r:id="rId1"/>
-          </a:graphicData>
-        </a:graphic>
-      </p:graphicFrame>
-      <p:sp>
-        <p:nvSpPr>
-          <p:cNvPr id="13" name="Text 10"/>
-          <p:cNvSpPr txBox="1"/>
-          <p:nvPr/>
-        </p:nvSpPr>
-        <p:spPr>
-          <a:xfrm>
-            <a:off x="4114800" y="3840480"/>
-            <a:ext cx="4572000" cy="365760"/>
-          </a:xfrm>
-          <a:prstGeom prst="rect">
-            <a:avLst/>
-          </a:prstGeom>
-          <a:noFill/>
-          <a:ln/>
-        </p:spPr>
-        <p:txBody>
-          <a:bodyPr wrap="square" lIns="0" tIns="0" rIns="0" bIns="0" rtlCol="0" anchor="t"/>
-          <a:lstStyle/>
-          <a:p>
-            <a:pPr algn="l" indent="0" marL="0">
-              <a:buNone/>
-            </a:pPr>
-            <a:r>
-              <a:rPr lang="en-US" sz="1300" b="1" dirty="0">
+              <a:t>Evidence: LLM-selected, verified verbatim</a:t>
+            </a:r>
+            <a:endParaRPr lang="en-US" sz="1200" dirty="0"/>
+          </a:p>
+        </p:txBody>
+      </p:sp>
+      <p:sp>
+        <p:nvSpPr>
+          <p:cNvPr id="14" name="without"/>
+          <p:cNvSpPr/>
+          <p:nvPr/>
+        </p:nvSpPr>
+        <p:spPr>
+          <a:xfrm>
+            <a:off x="457200" y="3255264"/>
+            <a:ext cx="3840480" cy="502920"/>
+          </a:xfrm>
+          <a:prstGeom prst="roundRect">
+            <a:avLst>
+              <a:gd name="adj" fmla="val 14545"/>
+            </a:avLst>
+          </a:prstGeom>
+          <a:solidFill>
+            <a:schemeClr val="bg2"/>
+          </a:solidFill>
+          <a:ln w="12700">
+            <a:solidFill>
+              <a:schemeClr val="bg2"/>
+            </a:solidFill>
+          </a:ln>
+        </p:spPr>
+        <p:txBody>
+          <a:bodyPr wrap="square" lIns="762" tIns="762" rIns="762" bIns="762" rtlCol="0" anchor="ctr"/>
+          <a:lstStyle/>
+          <a:p>
+            <a:pPr algn="ctr" indent="0" marL="0">
+              <a:buNone/>
+            </a:pPr>
+            <a:r>
+              <a:rPr lang="en-US" sz="1200" dirty="0">
                 <a:solidFill>
                   <a:schemeClr val="tx1"/>
                 </a:solidFill>
               </a:rPr>
-              <a:t>Mean Weighted F1: 0.618 → 0.634. </a:t>
-            </a:r>
-            <a:pPr algn="l" indent="0" marL="0">
-              <a:buNone/>
-            </a:pPr>
-            <a:r>
-              <a:rPr lang="en-US" sz="1300" dirty="0">
+              <a:t>Input: lowercased text, TF-IDF features</a:t>
+            </a:r>
+            <a:endParaRPr lang="en-US" sz="1200" dirty="0"/>
+          </a:p>
+        </p:txBody>
+      </p:sp>
+      <p:sp>
+        <p:nvSpPr>
+          <p:cNvPr id="15" name="Shape 13"/>
+          <p:cNvSpPr/>
+          <p:nvPr/>
+        </p:nvSpPr>
+        <p:spPr>
+          <a:xfrm>
+            <a:off x="4343400" y="3506724"/>
+            <a:ext cx="777240" cy="0"/>
+          </a:xfrm>
+          <a:prstGeom prst="line">
+            <a:avLst/>
+          </a:prstGeom>
+          <a:noFill/>
+          <a:ln w="19050">
+            <a:solidFill>
+              <a:schemeClr val="accent1"/>
+            </a:solidFill>
+            <a:prstDash val="solid"/>
+            <a:tailEnd type="triangle"/>
+          </a:ln>
+        </p:spPr>
+      </p:sp>
+      <p:sp>
+        <p:nvSpPr>
+          <p:cNvPr id="16" name="with"/>
+          <p:cNvSpPr/>
+          <p:nvPr/>
+        </p:nvSpPr>
+        <p:spPr>
+          <a:xfrm>
+            <a:off x="5212080" y="3255264"/>
+            <a:ext cx="3474720" cy="502920"/>
+          </a:xfrm>
+          <a:prstGeom prst="roundRect">
+            <a:avLst>
+              <a:gd name="adj" fmla="val 14545"/>
+            </a:avLst>
+          </a:prstGeom>
+          <a:solidFill>
+            <a:schemeClr val="accent1"/>
+          </a:solidFill>
+          <a:ln w="12700">
+            <a:solidFill>
+              <a:schemeClr val="accent1"/>
+            </a:solidFill>
+          </a:ln>
+        </p:spPr>
+        <p:txBody>
+          <a:bodyPr wrap="square" lIns="762" tIns="762" rIns="762" bIns="762" rtlCol="0" anchor="ctr"/>
+          <a:lstStyle/>
+          <a:p>
+            <a:pPr algn="ctr" indent="0" marL="0">
+              <a:buNone/>
+            </a:pPr>
+            <a:r>
+              <a:rPr lang="en-US" sz="1200" b="1" dirty="0">
+                <a:solidFill>
+                  <a:schemeClr val="bg1"/>
+                </a:solidFill>
+              </a:rPr>
+              <a:t>Input: original-case text, 512 tokens, head + tail</a:t>
+            </a:r>
+            <a:endParaRPr lang="en-US" sz="1200" dirty="0"/>
+          </a:p>
+        </p:txBody>
+      </p:sp>
+      <p:sp>
+        <p:nvSpPr>
+          <p:cNvPr id="17" name="without"/>
+          <p:cNvSpPr/>
+          <p:nvPr/>
+        </p:nvSpPr>
+        <p:spPr>
+          <a:xfrm>
+            <a:off x="457200" y="3913632"/>
+            <a:ext cx="3840480" cy="502920"/>
+          </a:xfrm>
+          <a:prstGeom prst="roundRect">
+            <a:avLst>
+              <a:gd name="adj" fmla="val 14545"/>
+            </a:avLst>
+          </a:prstGeom>
+          <a:solidFill>
+            <a:schemeClr val="bg2"/>
+          </a:solidFill>
+          <a:ln w="12700">
+            <a:solidFill>
+              <a:schemeClr val="bg2"/>
+            </a:solidFill>
+          </a:ln>
+        </p:spPr>
+        <p:txBody>
+          <a:bodyPr wrap="square" lIns="762" tIns="762" rIns="762" bIns="762" rtlCol="0" anchor="ctr"/>
+          <a:lstStyle/>
+          <a:p>
+            <a:pPr algn="ctr" indent="0" marL="0">
+              <a:buNone/>
+            </a:pPr>
+            <a:r>
+              <a:rPr lang="en-US" sz="1200" dirty="0">
                 <a:solidFill>
                   <a:schemeClr val="tx1"/>
                 </a:solidFill>
               </a:rPr>
-              <a:t>Character features were better on all 5 seeds.</a:t>
-            </a:r>
-            <a:endParaRPr lang="en-US" sz="1300" dirty="0"/>
-          </a:p>
-        </p:txBody>
-      </p:sp>
-      <p:sp>
-        <p:nvSpPr>
-          <p:cNvPr id="14" name="Text 11"/>
-          <p:cNvSpPr txBox="1"/>
-          <p:nvPr/>
-        </p:nvSpPr>
-        <p:spPr>
-          <a:xfrm>
-            <a:off x="4114800" y="4251960"/>
-            <a:ext cx="4572000" cy="457200"/>
-          </a:xfrm>
-          <a:prstGeom prst="rect">
-            <a:avLst/>
-          </a:prstGeom>
-          <a:noFill/>
-          <a:ln/>
-        </p:spPr>
-        <p:txBody>
-          <a:bodyPr wrap="square" lIns="0" tIns="0" rIns="0" bIns="0" rtlCol="0" anchor="t"/>
-          <a:lstStyle/>
-          <a:p>
-            <a:pPr algn="l" indent="0" marL="0">
-              <a:buNone/>
-            </a:pPr>
-            <a:r>
-              <a:rPr lang="en-US" sz="1200" dirty="0">
-                <a:solidFill>
-                  <a:schemeClr val="accent3"/>
-                </a:solidFill>
-              </a:rPr>
-              <a:t>Evidence: sentence-level 0.480 → phrase-level 0.560 (single split). Factors: fixed 0.386 → tuned 0.442 (single split).</a:t>
+              <a:t>Validation: single split, thresholds tuned on it</a:t>
+            </a:r>
+            <a:endParaRPr lang="en-US" sz="1200" dirty="0"/>
+          </a:p>
+        </p:txBody>
+      </p:sp>
+      <p:sp>
+        <p:nvSpPr>
+          <p:cNvPr id="18" name="Shape 16"/>
+          <p:cNvSpPr/>
+          <p:nvPr/>
+        </p:nvSpPr>
+        <p:spPr>
+          <a:xfrm>
+            <a:off x="4343400" y="4165092"/>
+            <a:ext cx="777240" cy="0"/>
+          </a:xfrm>
+          <a:prstGeom prst="line">
+            <a:avLst/>
+          </a:prstGeom>
+          <a:noFill/>
+          <a:ln w="19050">
+            <a:solidFill>
+              <a:schemeClr val="accent1"/>
+            </a:solidFill>
+            <a:prstDash val="solid"/>
+            <a:tailEnd type="triangle"/>
+          </a:ln>
+        </p:spPr>
+      </p:sp>
+      <p:sp>
+        <p:nvSpPr>
+          <p:cNvPr id="19" name="with"/>
+          <p:cNvSpPr/>
+          <p:nvPr/>
+        </p:nvSpPr>
+        <p:spPr>
+          <a:xfrm>
+            <a:off x="5212080" y="3913632"/>
+            <a:ext cx="3474720" cy="502920"/>
+          </a:xfrm>
+          <a:prstGeom prst="roundRect">
+            <a:avLst>
+              <a:gd name="adj" fmla="val 14545"/>
+            </a:avLst>
+          </a:prstGeom>
+          <a:solidFill>
+            <a:schemeClr val="accent1"/>
+          </a:solidFill>
+          <a:ln w="12700">
+            <a:solidFill>
+              <a:schemeClr val="accent1"/>
+            </a:solidFill>
+          </a:ln>
+        </p:spPr>
+        <p:txBody>
+          <a:bodyPr wrap="square" lIns="762" tIns="762" rIns="762" bIns="762" rtlCol="0" anchor="ctr"/>
+          <a:lstStyle/>
+          <a:p>
+            <a:pPr algn="ctr" indent="0" marL="0">
+              <a:buNone/>
+            </a:pPr>
+            <a:r>
+              <a:rPr lang="en-US" sz="1200" b="1" dirty="0">
+                <a:solidFill>
+                  <a:schemeClr val="bg1"/>
+                </a:solidFill>
+              </a:rPr>
+              <a:t>Validation: nested user-grouped CV; held-out scored once</a:t>
             </a:r>
             <a:endParaRPr lang="en-US" sz="1200" dirty="0"/>
           </a:p>
@@ -11438,22 +12356,38 @@
                 <a:ea typeface="Cambria" pitchFamily="34" charset="-122"/>
                 <a:cs typeface="Cambria" pitchFamily="34" charset="-120"/>
               </a:rPr>
-              <a:t>From Prediction to Explanation</a:t>
+              <a:t>Where the Risk Gain Comes From</a:t>
             </a:r>
             <a:endParaRPr lang="en-US" sz="3000" dirty="0"/>
           </a:p>
         </p:txBody>
       </p:sp>
-      <p:sp>
-        <p:nvSpPr>
-          <p:cNvPr id="3" name="Text 1"/>
+      <p:graphicFrame>
+        <p:nvGraphicFramePr>
+          <p:cNvPr id="3" name="Chart 0" descr=""/>
+          <p:cNvGraphicFramePr/>
+          <p:nvPr/>
+        </p:nvGraphicFramePr>
+        <p:xfrm>
+          <a:off x="457200" y="1005840"/>
+          <a:ext cx="5303520" cy="3566160"/>
+        </p:xfrm>
+        <a:graphic xmlns:a="http://schemas.openxmlformats.org/drawingml/2006/main">
+          <a:graphicData uri="http://schemas.openxmlformats.org/drawingml/2006/chart">
+            <c:chart xmlns:c="http://schemas.openxmlformats.org/drawingml/2006/chart" r:id="rId1"/>
+          </a:graphicData>
+        </a:graphic>
+      </p:graphicFrame>
+      <p:sp>
+        <p:nvSpPr>
+          <p:cNvPr id="4" name="Text 1"/>
           <p:cNvSpPr txBox="1"/>
           <p:nvPr/>
         </p:nvSpPr>
         <p:spPr>
           <a:xfrm>
-            <a:off x="457200" y="1005840"/>
-            <a:ext cx="5486400" cy="274320"/>
+            <a:off x="6035040" y="1280160"/>
+            <a:ext cx="2651760" cy="3291840"/>
           </a:xfrm>
           <a:prstGeom prst="rect">
             <a:avLst/>
@@ -11465,497 +12399,76 @@
           <a:bodyPr wrap="square" lIns="0" tIns="0" rIns="0" bIns="0" rtlCol="0" anchor="t"/>
           <a:lstStyle/>
           <a:p>
-            <a:pPr algn="l" indent="0" marL="0">
-              <a:buNone/>
-            </a:pPr>
-            <a:r>
-              <a:rPr lang="en-US" sz="1200" i="1" dirty="0">
-                <a:solidFill>
-                  <a:schemeClr val="accent3"/>
-                </a:solidFill>
-              </a:rPr>
-              <a:t>Annotated training-set example (post P00053)</a:t>
-            </a:r>
-            <a:endParaRPr lang="en-US" sz="1200" dirty="0"/>
-          </a:p>
-        </p:txBody>
-      </p:sp>
-      <p:sp>
-        <p:nvSpPr>
-          <p:cNvPr id="4" name="post"/>
-          <p:cNvSpPr/>
-          <p:nvPr/>
-        </p:nvSpPr>
-        <p:spPr>
-          <a:xfrm>
-            <a:off x="457200" y="1325880"/>
-            <a:ext cx="8229600" cy="1051560"/>
-          </a:xfrm>
-          <a:prstGeom prst="roundRect">
-            <a:avLst>
-              <a:gd name="adj" fmla="val 6957"/>
-            </a:avLst>
-          </a:prstGeom>
-          <a:solidFill>
-            <a:schemeClr val="bg2"/>
-          </a:solidFill>
-          <a:ln w="12700">
-            <a:solidFill>
-              <a:schemeClr val="bg2"/>
-            </a:solidFill>
-          </a:ln>
-        </p:spPr>
-        <p:txBody>
-          <a:bodyPr wrap="square" lIns="762" tIns="762" rIns="762" bIns="762" rtlCol="0" anchor="ctr"/>
-          <a:lstStyle/>
-          <a:p>
-            <a:pPr algn="ctr" indent="0" marL="0">
-              <a:buNone/>
-            </a:pPr>
-            <a:endParaRPr lang="en-US" sz="1200" dirty="0"/>
-          </a:p>
-        </p:txBody>
-      </p:sp>
-      <p:sp>
-        <p:nvSpPr>
-          <p:cNvPr id="5" name="Text 3"/>
-          <p:cNvSpPr txBox="1"/>
-          <p:nvPr/>
-        </p:nvSpPr>
-        <p:spPr>
-          <a:xfrm>
-            <a:off x="640080" y="1371600"/>
-            <a:ext cx="7863840" cy="960120"/>
-          </a:xfrm>
-          <a:prstGeom prst="rect">
-            <a:avLst/>
-          </a:prstGeom>
-          <a:noFill/>
-          <a:ln/>
-        </p:spPr>
-        <p:txBody>
-          <a:bodyPr wrap="square" lIns="0" tIns="0" rIns="0" bIns="0" rtlCol="0" anchor="ctr"/>
-          <a:lstStyle/>
-          <a:p>
-            <a:pPr indent="0" marL="0">
-              <a:buNone/>
-            </a:pPr>
-            <a:r>
-              <a:rPr lang="en-US" sz="1300" i="1" dirty="0">
+            <a:pPr marL="342900" indent="-342900">
+              <a:spcAft>
+                <a:spcPts val="600"/>
+              </a:spcAft>
+              <a:buSzPct val="100000"/>
+              <a:buChar char="•"/>
+            </a:pPr>
+            <a:r>
+              <a:rPr lang="en-US" sz="1300" dirty="0">
                 <a:solidFill>
                   <a:schemeClr val="tx1"/>
                 </a:solidFill>
               </a:rPr>
-              <a:t>“Whats the point of staying alive when I already know what my future life is gonna be like (much much worse than my current). Its never going to get better. I dont wanna work on making it get better, I just </a:t>
-            </a:r>
-            <a:pPr indent="0" marL="0">
-              <a:buNone/>
-            </a:pPr>
-            <a:r>
-              <a:rPr lang="en-US" sz="1300" b="1" i="1" u="sng" dirty="0">
-                <a:solidFill>
-                  <a:schemeClr val="accent1"/>
-                </a:solidFill>
-                <a:uFill>
-                  <a:solidFill>
-                    <a:schemeClr val="accent1"/>
-                  </a:solidFill>
-                </a:uFill>
-              </a:rPr>
-              <a:t>wanna die</a:t>
-            </a:r>
-            <a:pPr indent="0" marL="0">
-              <a:buNone/>
-            </a:pPr>
-            <a:r>
-              <a:rPr lang="en-US" sz="1300" i="1" dirty="0">
+              <a:t>Swapping TF-IDF for MentalRoBERTa adds about 14 accuracy points</a:t>
+            </a:r>
+            <a:endParaRPr lang="en-US" sz="1300" dirty="0"/>
+          </a:p>
+          <a:p>
+            <a:pPr marL="342900" indent="-342900">
+              <a:spcAft>
+                <a:spcPts val="600"/>
+              </a:spcAft>
+              <a:buSzPct val="100000"/>
+              <a:buChar char="•"/>
+            </a:pPr>
+            <a:r>
+              <a:rPr lang="en-US" sz="1300" dirty="0">
                 <a:solidFill>
                   <a:schemeClr val="tx1"/>
                 </a:solidFill>
               </a:rPr>
-              <a:t>.”</a:t>
+              <a:t>The TF-IDF blend is within noise (−0.002 OOF, +0.006 held-out)</a:t>
             </a:r>
             <a:endParaRPr lang="en-US" sz="1300" dirty="0"/>
           </a:p>
-        </p:txBody>
-      </p:sp>
-      <p:sp>
-        <p:nvSpPr>
-          <p:cNvPr id="6" name="Shape 4"/>
-          <p:cNvSpPr/>
-          <p:nvPr/>
-        </p:nvSpPr>
-        <p:spPr>
-          <a:xfrm>
-            <a:off x="1737360" y="2377440"/>
-            <a:ext cx="0" cy="228600"/>
-          </a:xfrm>
-          <a:prstGeom prst="line">
-            <a:avLst/>
-          </a:prstGeom>
-          <a:noFill/>
-          <a:ln w="19050">
-            <a:solidFill>
-              <a:schemeClr val="accent3"/>
-            </a:solidFill>
-            <a:prstDash val="solid"/>
-            <a:tailEnd type="triangle"/>
-          </a:ln>
-        </p:spPr>
-      </p:sp>
-      <p:sp>
-        <p:nvSpPr>
-          <p:cNvPr id="7" name="lbl"/>
-          <p:cNvSpPr/>
-          <p:nvPr/>
-        </p:nvSpPr>
-        <p:spPr>
-          <a:xfrm>
-            <a:off x="457200" y="2606040"/>
-            <a:ext cx="2560320" cy="320040"/>
-          </a:xfrm>
-          <a:prstGeom prst="roundRect">
-            <a:avLst>
-              <a:gd name="adj" fmla="val 22857"/>
-            </a:avLst>
-          </a:prstGeom>
-          <a:solidFill>
-            <a:schemeClr val="bg1"/>
-          </a:solidFill>
-          <a:ln w="12700">
-            <a:solidFill>
-              <a:schemeClr val="bg1"/>
-            </a:solidFill>
-          </a:ln>
-        </p:spPr>
-        <p:txBody>
-          <a:bodyPr wrap="square" lIns="762" tIns="762" rIns="762" bIns="762" rtlCol="0" anchor="ctr"/>
-          <a:lstStyle/>
-          <a:p>
-            <a:pPr algn="ctr" indent="0" marL="0">
-              <a:buNone/>
-            </a:pPr>
-            <a:r>
-              <a:rPr lang="en-US" sz="1100" b="1" dirty="0">
-                <a:solidFill>
-                  <a:schemeClr val="accent3"/>
-                </a:solidFill>
-              </a:rPr>
-              <a:t>PREDICTED RISK</a:t>
-            </a:r>
-            <a:endParaRPr lang="en-US" sz="1100" dirty="0"/>
-          </a:p>
-        </p:txBody>
-      </p:sp>
-      <p:sp>
-        <p:nvSpPr>
-          <p:cNvPr id="8" name="out"/>
-          <p:cNvSpPr/>
-          <p:nvPr/>
-        </p:nvSpPr>
-        <p:spPr>
-          <a:xfrm>
-            <a:off x="457200" y="2926080"/>
-            <a:ext cx="2560320" cy="640080"/>
-          </a:xfrm>
-          <a:prstGeom prst="roundRect">
-            <a:avLst>
-              <a:gd name="adj" fmla="val 11429"/>
-            </a:avLst>
-          </a:prstGeom>
-          <a:solidFill>
-            <a:schemeClr val="accent2"/>
-          </a:solidFill>
-          <a:ln w="12700">
-            <a:solidFill>
-              <a:schemeClr val="accent2"/>
-            </a:solidFill>
-          </a:ln>
-        </p:spPr>
-        <p:txBody>
-          <a:bodyPr wrap="square" lIns="762" tIns="762" rIns="762" bIns="762" rtlCol="0" anchor="ctr"/>
-          <a:lstStyle/>
-          <a:p>
-            <a:pPr algn="ctr" indent="0" marL="0">
-              <a:buNone/>
-            </a:pPr>
-            <a:r>
-              <a:rPr lang="en-US" sz="1700" b="1" dirty="0">
-                <a:solidFill>
-                  <a:schemeClr val="bg1"/>
-                </a:solidFill>
-              </a:rPr>
-              <a:t>Ideation</a:t>
-            </a:r>
-            <a:endParaRPr lang="en-US" sz="1700" dirty="0"/>
-          </a:p>
-        </p:txBody>
-      </p:sp>
-      <p:sp>
-        <p:nvSpPr>
-          <p:cNvPr id="9" name="Shape 7"/>
-          <p:cNvSpPr/>
-          <p:nvPr/>
-        </p:nvSpPr>
-        <p:spPr>
-          <a:xfrm>
-            <a:off x="4572000" y="2377440"/>
-            <a:ext cx="0" cy="228600"/>
-          </a:xfrm>
-          <a:prstGeom prst="line">
-            <a:avLst/>
-          </a:prstGeom>
-          <a:noFill/>
-          <a:ln w="19050">
-            <a:solidFill>
-              <a:schemeClr val="accent3"/>
-            </a:solidFill>
-            <a:prstDash val="solid"/>
-            <a:tailEnd type="triangle"/>
-          </a:ln>
-        </p:spPr>
-      </p:sp>
-      <p:sp>
-        <p:nvSpPr>
-          <p:cNvPr id="10" name="lbl"/>
-          <p:cNvSpPr/>
-          <p:nvPr/>
-        </p:nvSpPr>
-        <p:spPr>
-          <a:xfrm>
-            <a:off x="3291840" y="2606040"/>
-            <a:ext cx="2560320" cy="320040"/>
-          </a:xfrm>
-          <a:prstGeom prst="roundRect">
-            <a:avLst>
-              <a:gd name="adj" fmla="val 22857"/>
-            </a:avLst>
-          </a:prstGeom>
-          <a:solidFill>
-            <a:schemeClr val="bg1"/>
-          </a:solidFill>
-          <a:ln w="12700">
-            <a:solidFill>
-              <a:schemeClr val="bg1"/>
-            </a:solidFill>
-          </a:ln>
-        </p:spPr>
-        <p:txBody>
-          <a:bodyPr wrap="square" lIns="762" tIns="762" rIns="762" bIns="762" rtlCol="0" anchor="ctr"/>
-          <a:lstStyle/>
-          <a:p>
-            <a:pPr algn="ctr" indent="0" marL="0">
-              <a:buNone/>
-            </a:pPr>
-            <a:r>
-              <a:rPr lang="en-US" sz="1100" b="1" dirty="0">
-                <a:solidFill>
-                  <a:schemeClr val="accent3"/>
-                </a:solidFill>
-              </a:rPr>
-              <a:t>EVIDENCE</a:t>
-            </a:r>
-            <a:endParaRPr lang="en-US" sz="1100" dirty="0"/>
-          </a:p>
-        </p:txBody>
-      </p:sp>
-      <p:sp>
-        <p:nvSpPr>
-          <p:cNvPr id="11" name="out"/>
-          <p:cNvSpPr/>
-          <p:nvPr/>
-        </p:nvSpPr>
-        <p:spPr>
-          <a:xfrm>
-            <a:off x="3291840" y="2926080"/>
-            <a:ext cx="2560320" cy="640080"/>
-          </a:xfrm>
-          <a:prstGeom prst="roundRect">
-            <a:avLst>
-              <a:gd name="adj" fmla="val 11429"/>
-            </a:avLst>
-          </a:prstGeom>
-          <a:solidFill>
-            <a:schemeClr val="accent1"/>
-          </a:solidFill>
-          <a:ln w="12700">
-            <a:solidFill>
-              <a:schemeClr val="accent1"/>
-            </a:solidFill>
-          </a:ln>
-        </p:spPr>
-        <p:txBody>
-          <a:bodyPr wrap="square" lIns="762" tIns="762" rIns="762" bIns="762" rtlCol="0" anchor="ctr"/>
-          <a:lstStyle/>
-          <a:p>
-            <a:pPr algn="ctr" indent="0" marL="0">
-              <a:buNone/>
-            </a:pPr>
-            <a:r>
-              <a:rPr lang="en-US" sz="1700" b="1" dirty="0">
-                <a:solidFill>
-                  <a:schemeClr val="bg1"/>
-                </a:solidFill>
-              </a:rPr>
-              <a:t>“wanna die”</a:t>
-            </a:r>
-            <a:endParaRPr lang="en-US" sz="1700" dirty="0"/>
-          </a:p>
-        </p:txBody>
-      </p:sp>
-      <p:sp>
-        <p:nvSpPr>
-          <p:cNvPr id="12" name="Shape 10"/>
-          <p:cNvSpPr/>
-          <p:nvPr/>
-        </p:nvSpPr>
-        <p:spPr>
-          <a:xfrm>
-            <a:off x="7406640" y="2377440"/>
-            <a:ext cx="0" cy="228600"/>
-          </a:xfrm>
-          <a:prstGeom prst="line">
-            <a:avLst/>
-          </a:prstGeom>
-          <a:noFill/>
-          <a:ln w="19050">
-            <a:solidFill>
-              <a:schemeClr val="accent3"/>
-            </a:solidFill>
-            <a:prstDash val="solid"/>
-            <a:tailEnd type="triangle"/>
-          </a:ln>
-        </p:spPr>
-      </p:sp>
-      <p:sp>
-        <p:nvSpPr>
-          <p:cNvPr id="13" name="lbl"/>
-          <p:cNvSpPr/>
-          <p:nvPr/>
-        </p:nvSpPr>
-        <p:spPr>
-          <a:xfrm>
-            <a:off x="6126480" y="2606040"/>
-            <a:ext cx="2560320" cy="320040"/>
-          </a:xfrm>
-          <a:prstGeom prst="roundRect">
-            <a:avLst>
-              <a:gd name="adj" fmla="val 22857"/>
-            </a:avLst>
-          </a:prstGeom>
-          <a:solidFill>
-            <a:schemeClr val="bg1"/>
-          </a:solidFill>
-          <a:ln w="12700">
-            <a:solidFill>
-              <a:schemeClr val="bg1"/>
-            </a:solidFill>
-          </a:ln>
-        </p:spPr>
-        <p:txBody>
-          <a:bodyPr wrap="square" lIns="762" tIns="762" rIns="762" bIns="762" rtlCol="0" anchor="ctr"/>
-          <a:lstStyle/>
-          <a:p>
-            <a:pPr algn="ctr" indent="0" marL="0">
-              <a:buNone/>
-            </a:pPr>
-            <a:r>
-              <a:rPr lang="en-US" sz="1100" b="1" dirty="0">
-                <a:solidFill>
-                  <a:schemeClr val="accent3"/>
-                </a:solidFill>
-              </a:rPr>
-              <a:t>FACTORS</a:t>
-            </a:r>
-            <a:endParaRPr lang="en-US" sz="1100" dirty="0"/>
-          </a:p>
-        </p:txBody>
-      </p:sp>
-      <p:sp>
-        <p:nvSpPr>
-          <p:cNvPr id="14" name="out"/>
-          <p:cNvSpPr/>
-          <p:nvPr/>
-        </p:nvSpPr>
-        <p:spPr>
-          <a:xfrm>
-            <a:off x="6126480" y="2926080"/>
-            <a:ext cx="2560320" cy="640080"/>
-          </a:xfrm>
-          <a:prstGeom prst="roundRect">
-            <a:avLst>
-              <a:gd name="adj" fmla="val 11429"/>
-            </a:avLst>
-          </a:prstGeom>
-          <a:solidFill>
-            <a:schemeClr val="accent5"/>
-          </a:solidFill>
-          <a:ln w="12700">
-            <a:solidFill>
-              <a:schemeClr val="accent5"/>
-            </a:solidFill>
-          </a:ln>
-        </p:spPr>
-        <p:txBody>
-          <a:bodyPr wrap="square" lIns="762" tIns="762" rIns="762" bIns="762" rtlCol="0" anchor="ctr"/>
-          <a:lstStyle/>
-          <a:p>
-            <a:pPr algn="ctr" indent="0" marL="0">
-              <a:buNone/>
-            </a:pPr>
-            <a:r>
-              <a:rPr lang="en-US" sz="1700" b="1" dirty="0">
-                <a:solidFill>
-                  <a:schemeClr val="bg1"/>
-                </a:solidFill>
-              </a:rPr>
-              <a:t>hopelessness</a:t>
-            </a:r>
-            <a:endParaRPr lang="en-US" sz="1700" dirty="0"/>
-          </a:p>
-        </p:txBody>
-      </p:sp>
-      <p:sp>
-        <p:nvSpPr>
-          <p:cNvPr id="15" name="banner"/>
-          <p:cNvSpPr/>
-          <p:nvPr/>
-        </p:nvSpPr>
-        <p:spPr>
-          <a:xfrm>
-            <a:off x="457200" y="3840480"/>
-            <a:ext cx="8229600" cy="731520"/>
-          </a:xfrm>
-          <a:prstGeom prst="roundRect">
-            <a:avLst>
-              <a:gd name="adj" fmla="val 10000"/>
-            </a:avLst>
-          </a:prstGeom>
-          <a:solidFill>
-            <a:schemeClr val="tx1"/>
-          </a:solidFill>
-          <a:ln w="12700">
-            <a:solidFill>
-              <a:schemeClr val="tx1"/>
-            </a:solidFill>
-          </a:ln>
-        </p:spPr>
-        <p:txBody>
-          <a:bodyPr wrap="square" lIns="1905" tIns="1905" rIns="1905" bIns="1905" rtlCol="0" anchor="ctr"/>
-          <a:lstStyle/>
-          <a:p>
-            <a:pPr algn="ctr" indent="0" marL="0">
-              <a:buNone/>
-            </a:pPr>
-            <a:r>
-              <a:rPr lang="en-US" sz="1400" dirty="0">
-                <a:solidFill>
-                  <a:schemeClr val="bg1"/>
-                </a:solidFill>
-              </a:rPr>
-              <a:t>Evidence is extracted as an exact substring of the original post — not generated or paraphrased. Automated check on the submission file: 0 of 323 spans were non-verbatim.</a:t>
-            </a:r>
-            <a:endParaRPr lang="en-US" sz="1400" dirty="0"/>
+          <a:p>
+            <a:pPr marL="342900" indent="-342900">
+              <a:spcAft>
+                <a:spcPts val="600"/>
+              </a:spcAft>
+              <a:buSzPct val="100000"/>
+              <a:buChar char="•"/>
+            </a:pPr>
+            <a:r>
+              <a:rPr lang="en-US" sz="1300" dirty="0">
+                <a:solidFill>
+                  <a:schemeClr val="tx1"/>
+                </a:solidFill>
+              </a:rPr>
+              <a:t>Class-bias calibration was tested and rejected</a:t>
+            </a:r>
+            <a:endParaRPr lang="en-US" sz="1300" dirty="0"/>
+          </a:p>
+          <a:p>
+            <a:pPr marL="342900" indent="-342900">
+              <a:spcAft>
+                <a:spcPts val="600"/>
+              </a:spcAft>
+              <a:buSzPct val="100000"/>
+              <a:buChar char="•"/>
+            </a:pPr>
+            <a:r>
+              <a:rPr lang="en-US" sz="1300" dirty="0">
+                <a:solidFill>
+                  <a:schemeClr val="tx1"/>
+                </a:solidFill>
+              </a:rPr>
+              <a:t>Settings (512 tokens, LLRD, label smoothing) were changed together, not ablated</a:t>
+            </a:r>
+            <a:endParaRPr lang="en-US" sz="1300" dirty="0"/>
           </a:p>
         </p:txBody>
       </p:sp>
@@ -12064,7 +12577,7 @@
                 <a:ea typeface="Cambria" pitchFamily="34" charset="-122"/>
                 <a:cs typeface="Cambria" pitchFamily="34" charset="-120"/>
               </a:rPr>
-              <a:t>Current Model Performance</a:t>
+              <a:t>From Prediction to Explanation</a:t>
             </a:r>
             <a:endParaRPr lang="en-US" sz="3000" dirty="0"/>
           </a:p>
@@ -12072,18 +12585,54 @@
       </p:sp>
       <p:sp>
         <p:nvSpPr>
-          <p:cNvPr id="3" name="card"/>
-          <p:cNvSpPr/>
-          <p:nvPr/>
-        </p:nvSpPr>
-        <p:spPr>
-          <a:xfrm>
-            <a:off x="457200" y="1051560"/>
-            <a:ext cx="2560320" cy="1417320"/>
+          <p:cNvPr id="3" name="Text 1"/>
+          <p:cNvSpPr txBox="1"/>
+          <p:nvPr/>
+        </p:nvSpPr>
+        <p:spPr>
+          <a:xfrm>
+            <a:off x="457200" y="1005840"/>
+            <a:ext cx="5486400" cy="274320"/>
+          </a:xfrm>
+          <a:prstGeom prst="rect">
+            <a:avLst/>
+          </a:prstGeom>
+          <a:noFill/>
+          <a:ln/>
+        </p:spPr>
+        <p:txBody>
+          <a:bodyPr wrap="square" lIns="0" tIns="0" rIns="0" bIns="0" rtlCol="0" anchor="t"/>
+          <a:lstStyle/>
+          <a:p>
+            <a:pPr algn="l" indent="0" marL="0">
+              <a:buNone/>
+            </a:pPr>
+            <a:r>
+              <a:rPr lang="en-US" sz="1200" i="1" dirty="0">
+                <a:solidFill>
+                  <a:schemeClr val="accent3"/>
+                </a:solidFill>
+              </a:rPr>
+              <a:t>Held-out example from the notebook output</a:t>
+            </a:r>
+            <a:endParaRPr lang="en-US" sz="1200" dirty="0"/>
+          </a:p>
+        </p:txBody>
+      </p:sp>
+      <p:sp>
+        <p:nvSpPr>
+          <p:cNvPr id="4" name="post"/>
+          <p:cNvSpPr/>
+          <p:nvPr/>
+        </p:nvSpPr>
+        <p:spPr>
+          <a:xfrm>
+            <a:off x="457200" y="1325880"/>
+            <a:ext cx="8229600" cy="731520"/>
           </a:xfrm>
           <a:prstGeom prst="roundRect">
             <a:avLst>
-              <a:gd name="adj" fmla="val 5161"/>
+              <a:gd name="adj" fmla="val 10000"/>
             </a:avLst>
           </a:prstGeom>
           <a:solidFill>
@@ -12102,140 +12651,64 @@
             <a:pPr algn="ctr" indent="0" marL="0">
               <a:buNone/>
             </a:pPr>
-            <a:endParaRPr lang="en-US" sz="1200" dirty="0"/>
-          </a:p>
-        </p:txBody>
-      </p:sp>
-      <p:sp>
-        <p:nvSpPr>
-          <p:cNvPr id="4" name="Text 2"/>
-          <p:cNvSpPr txBox="1"/>
-          <p:nvPr/>
-        </p:nvSpPr>
-        <p:spPr>
-          <a:xfrm>
-            <a:off x="594360" y="1143000"/>
-            <a:ext cx="2286000" cy="228600"/>
-          </a:xfrm>
-          <a:prstGeom prst="rect">
-            <a:avLst/>
-          </a:prstGeom>
-          <a:noFill/>
-          <a:ln/>
-        </p:spPr>
-        <p:txBody>
-          <a:bodyPr wrap="square" lIns="0" tIns="0" rIns="0" bIns="0" rtlCol="0" anchor="t"/>
-          <a:lstStyle/>
-          <a:p>
-            <a:pPr algn="l" indent="0" marL="0">
-              <a:buNone/>
-            </a:pPr>
-            <a:r>
-              <a:rPr lang="en-US" sz="1100" b="1" dirty="0">
-                <a:solidFill>
-                  <a:schemeClr val="accent2"/>
-                </a:solidFill>
-              </a:rPr>
-              <a:t>RISK CLASSIFICATION</a:t>
-            </a:r>
-            <a:endParaRPr lang="en-US" sz="1100" dirty="0"/>
-          </a:p>
-        </p:txBody>
-      </p:sp>
-      <p:sp>
-        <p:nvSpPr>
-          <p:cNvPr id="5" name="Text 3"/>
-          <p:cNvSpPr txBox="1"/>
-          <p:nvPr/>
-        </p:nvSpPr>
-        <p:spPr>
-          <a:xfrm>
-            <a:off x="594360" y="1371600"/>
-            <a:ext cx="2286000" cy="685800"/>
-          </a:xfrm>
-          <a:prstGeom prst="rect">
-            <a:avLst/>
-          </a:prstGeom>
-          <a:noFill/>
-          <a:ln/>
-        </p:spPr>
-        <p:txBody>
-          <a:bodyPr wrap="square" lIns="0" tIns="0" rIns="0" bIns="0" rtlCol="0" anchor="t"/>
-          <a:lstStyle/>
-          <a:p>
-            <a:pPr algn="l" indent="0" marL="0">
-              <a:buNone/>
-            </a:pPr>
-            <a:r>
-              <a:rPr lang="en-US" sz="4400" b="1" dirty="0">
+            <a:r>
+              <a:rPr lang="en-US" sz="1600" dirty="0">
                 <a:solidFill>
                   <a:schemeClr val="tx1"/>
                 </a:solidFill>
               </a:rPr>
-              <a:t>0.6468</a:t>
-            </a:r>
-            <a:endParaRPr lang="en-US" sz="4400" dirty="0"/>
-          </a:p>
-        </p:txBody>
-      </p:sp>
-      <p:sp>
-        <p:nvSpPr>
-          <p:cNvPr id="6" name="Text 4"/>
-          <p:cNvSpPr txBox="1"/>
-          <p:nvPr/>
-        </p:nvSpPr>
-        <p:spPr>
-          <a:xfrm>
-            <a:off x="594360" y="2103120"/>
-            <a:ext cx="2286000" cy="274320"/>
-          </a:xfrm>
-          <a:prstGeom prst="rect">
-            <a:avLst/>
-          </a:prstGeom>
-          <a:noFill/>
-          <a:ln/>
-        </p:spPr>
-        <p:txBody>
-          <a:bodyPr wrap="square" lIns="0" tIns="0" rIns="0" bIns="0" rtlCol="0" anchor="t"/>
-          <a:lstStyle/>
-          <a:p>
-            <a:pPr algn="l" indent="0" marL="0">
-              <a:buNone/>
-            </a:pPr>
-            <a:r>
-              <a:rPr lang="en-US" sz="1400" dirty="0">
-                <a:solidFill>
-                  <a:schemeClr val="accent3"/>
-                </a:solidFill>
-              </a:rPr>
-              <a:t>Weighted F1</a:t>
-            </a:r>
-            <a:endParaRPr lang="en-US" sz="1400" dirty="0"/>
-          </a:p>
-        </p:txBody>
-      </p:sp>
-      <p:sp>
-        <p:nvSpPr>
-          <p:cNvPr id="7" name="card"/>
-          <p:cNvSpPr/>
-          <p:nvPr/>
-        </p:nvSpPr>
-        <p:spPr>
-          <a:xfrm>
-            <a:off x="3291840" y="1051560"/>
-            <a:ext cx="2560320" cy="1417320"/>
+              <a:t>“so ugly that i want to kill myself because of it”</a:t>
+            </a:r>
+            <a:endParaRPr lang="en-US" sz="1600" dirty="0"/>
+          </a:p>
+        </p:txBody>
+      </p:sp>
+      <p:sp>
+        <p:nvSpPr>
+          <p:cNvPr id="5" name="Shape 3"/>
+          <p:cNvSpPr/>
+          <p:nvPr/>
+        </p:nvSpPr>
+        <p:spPr>
+          <a:xfrm>
+            <a:off x="1737360" y="2057400"/>
+            <a:ext cx="0" cy="320040"/>
+          </a:xfrm>
+          <a:prstGeom prst="line">
+            <a:avLst/>
+          </a:prstGeom>
+          <a:noFill/>
+          <a:ln w="19050">
+            <a:solidFill>
+              <a:schemeClr val="accent3"/>
+            </a:solidFill>
+            <a:prstDash val="solid"/>
+            <a:tailEnd type="triangle"/>
+          </a:ln>
+        </p:spPr>
+      </p:sp>
+      <p:sp>
+        <p:nvSpPr>
+          <p:cNvPr id="6" name="lbl"/>
+          <p:cNvSpPr/>
+          <p:nvPr/>
+        </p:nvSpPr>
+        <p:spPr>
+          <a:xfrm>
+            <a:off x="457200" y="2377440"/>
+            <a:ext cx="2560320" cy="320040"/>
           </a:xfrm>
           <a:prstGeom prst="roundRect">
             <a:avLst>
-              <a:gd name="adj" fmla="val 5161"/>
+              <a:gd name="adj" fmla="val 22857"/>
             </a:avLst>
           </a:prstGeom>
           <a:solidFill>
-            <a:schemeClr val="bg2"/>
+            <a:schemeClr val="bg1"/>
           </a:solidFill>
           <a:ln w="12700">
             <a:solidFill>
-              <a:schemeClr val="bg2"/>
+              <a:schemeClr val="bg1"/>
             </a:solidFill>
           </a:ln>
         </p:spPr>
@@ -12246,41 +12719,13 @@
             <a:pPr algn="ctr" indent="0" marL="0">
               <a:buNone/>
             </a:pPr>
-            <a:endParaRPr lang="en-US" sz="1200" dirty="0"/>
-          </a:p>
-        </p:txBody>
-      </p:sp>
-      <p:sp>
-        <p:nvSpPr>
-          <p:cNvPr id="8" name="Text 6"/>
-          <p:cNvSpPr txBox="1"/>
-          <p:nvPr/>
-        </p:nvSpPr>
-        <p:spPr>
-          <a:xfrm>
-            <a:off x="3429000" y="1143000"/>
-            <a:ext cx="2286000" cy="228600"/>
-          </a:xfrm>
-          <a:prstGeom prst="rect">
-            <a:avLst/>
-          </a:prstGeom>
-          <a:noFill/>
-          <a:ln/>
-        </p:spPr>
-        <p:txBody>
-          <a:bodyPr wrap="square" lIns="0" tIns="0" rIns="0" bIns="0" rtlCol="0" anchor="t"/>
-          <a:lstStyle/>
-          <a:p>
-            <a:pPr algn="l" indent="0" marL="0">
-              <a:buNone/>
-            </a:pPr>
             <a:r>
               <a:rPr lang="en-US" sz="1100" b="1" dirty="0">
                 <a:solidFill>
-                  <a:schemeClr val="accent1"/>
-                </a:solidFill>
-              </a:rPr>
-              <a:t>EVIDENCE EXTRACTION</a:t>
+                  <a:schemeClr val="accent3"/>
+                </a:solidFill>
+              </a:rPr>
+              <a:t>PREDICTED RISK</a:t>
             </a:r>
             <a:endParaRPr lang="en-US" sz="1100" dirty="0"/>
           </a:p>
@@ -12288,98 +12733,26 @@
       </p:sp>
       <p:sp>
         <p:nvSpPr>
-          <p:cNvPr id="9" name="Text 7"/>
-          <p:cNvSpPr txBox="1"/>
-          <p:nvPr/>
-        </p:nvSpPr>
-        <p:spPr>
-          <a:xfrm>
-            <a:off x="3429000" y="1371600"/>
-            <a:ext cx="2286000" cy="685800"/>
-          </a:xfrm>
-          <a:prstGeom prst="rect">
-            <a:avLst/>
-          </a:prstGeom>
-          <a:noFill/>
-          <a:ln/>
-        </p:spPr>
-        <p:txBody>
-          <a:bodyPr wrap="square" lIns="0" tIns="0" rIns="0" bIns="0" rtlCol="0" anchor="t"/>
-          <a:lstStyle/>
-          <a:p>
-            <a:pPr algn="l" indent="0" marL="0">
-              <a:buNone/>
-            </a:pPr>
-            <a:r>
-              <a:rPr lang="en-US" sz="4400" b="1" dirty="0">
-                <a:solidFill>
-                  <a:schemeClr val="tx1"/>
-                </a:solidFill>
-              </a:rPr>
-              <a:t>0.5599</a:t>
-            </a:r>
-            <a:endParaRPr lang="en-US" sz="4400" dirty="0"/>
-          </a:p>
-        </p:txBody>
-      </p:sp>
-      <p:sp>
-        <p:nvSpPr>
-          <p:cNvPr id="10" name="Text 8"/>
-          <p:cNvSpPr txBox="1"/>
-          <p:nvPr/>
-        </p:nvSpPr>
-        <p:spPr>
-          <a:xfrm>
-            <a:off x="3429000" y="2103120"/>
-            <a:ext cx="2286000" cy="274320"/>
-          </a:xfrm>
-          <a:prstGeom prst="rect">
-            <a:avLst/>
-          </a:prstGeom>
-          <a:noFill/>
-          <a:ln/>
-        </p:spPr>
-        <p:txBody>
-          <a:bodyPr wrap="square" lIns="0" tIns="0" rIns="0" bIns="0" rtlCol="0" anchor="t"/>
-          <a:lstStyle/>
-          <a:p>
-            <a:pPr algn="l" indent="0" marL="0">
-              <a:buNone/>
-            </a:pPr>
-            <a:r>
-              <a:rPr lang="en-US" sz="1400" dirty="0">
-                <a:solidFill>
-                  <a:schemeClr val="accent3"/>
-                </a:solidFill>
-              </a:rPr>
-              <a:t>Phrase F1</a:t>
-            </a:r>
-            <a:endParaRPr lang="en-US" sz="1400" dirty="0"/>
-          </a:p>
-        </p:txBody>
-      </p:sp>
-      <p:sp>
-        <p:nvSpPr>
-          <p:cNvPr id="11" name="card"/>
-          <p:cNvSpPr/>
-          <p:nvPr/>
-        </p:nvSpPr>
-        <p:spPr>
-          <a:xfrm>
-            <a:off x="6126480" y="1051560"/>
-            <a:ext cx="2560320" cy="1417320"/>
+          <p:cNvPr id="7" name="out"/>
+          <p:cNvSpPr/>
+          <p:nvPr/>
+        </p:nvSpPr>
+        <p:spPr>
+          <a:xfrm>
+            <a:off x="457200" y="2697480"/>
+            <a:ext cx="2560320" cy="731520"/>
           </a:xfrm>
           <a:prstGeom prst="roundRect">
             <a:avLst>
-              <a:gd name="adj" fmla="val 5161"/>
+              <a:gd name="adj" fmla="val 10000"/>
             </a:avLst>
           </a:prstGeom>
           <a:solidFill>
-            <a:schemeClr val="bg2"/>
+            <a:schemeClr val="accent2"/>
           </a:solidFill>
           <a:ln w="12700">
             <a:solidFill>
-              <a:schemeClr val="bg2"/>
+              <a:schemeClr val="accent2"/>
             </a:solidFill>
           </a:ln>
         </p:spPr>
@@ -12390,41 +12763,81 @@
             <a:pPr algn="ctr" indent="0" marL="0">
               <a:buNone/>
             </a:pPr>
-            <a:endParaRPr lang="en-US" sz="1200" dirty="0"/>
-          </a:p>
-        </p:txBody>
-      </p:sp>
-      <p:sp>
-        <p:nvSpPr>
-          <p:cNvPr id="12" name="Text 10"/>
-          <p:cNvSpPr txBox="1"/>
-          <p:nvPr/>
-        </p:nvSpPr>
-        <p:spPr>
-          <a:xfrm>
-            <a:off x="6263640" y="1143000"/>
-            <a:ext cx="2286000" cy="228600"/>
-          </a:xfrm>
-          <a:prstGeom prst="rect">
-            <a:avLst/>
-          </a:prstGeom>
-          <a:noFill/>
-          <a:ln/>
-        </p:spPr>
-        <p:txBody>
-          <a:bodyPr wrap="square" lIns="0" tIns="0" rIns="0" bIns="0" rtlCol="0" anchor="t"/>
-          <a:lstStyle/>
-          <a:p>
-            <a:pPr algn="l" indent="0" marL="0">
+            <a:r>
+              <a:rPr lang="en-US" sz="1700" b="1" dirty="0">
+                <a:solidFill>
+                  <a:schemeClr val="bg1"/>
+                </a:solidFill>
+              </a:rPr>
+              <a:t>Ideation (p = 0.94)</a:t>
+            </a:r>
+            <a:endParaRPr lang="en-US" sz="1700" dirty="0"/>
+          </a:p>
+        </p:txBody>
+      </p:sp>
+      <p:sp>
+        <p:nvSpPr>
+          <p:cNvPr id="8" name="Shape 6"/>
+          <p:cNvSpPr/>
+          <p:nvPr/>
+        </p:nvSpPr>
+        <p:spPr>
+          <a:xfrm>
+            <a:off x="4572000" y="2057400"/>
+            <a:ext cx="0" cy="320040"/>
+          </a:xfrm>
+          <a:prstGeom prst="line">
+            <a:avLst/>
+          </a:prstGeom>
+          <a:noFill/>
+          <a:ln w="19050">
+            <a:solidFill>
+              <a:schemeClr val="accent3"/>
+            </a:solidFill>
+            <a:prstDash val="solid"/>
+            <a:tailEnd type="triangle"/>
+          </a:ln>
+        </p:spPr>
+      </p:sp>
+      <p:sp>
+        <p:nvSpPr>
+          <p:cNvPr id="9" name="lbl"/>
+          <p:cNvSpPr/>
+          <p:nvPr/>
+        </p:nvSpPr>
+        <p:spPr>
+          <a:xfrm>
+            <a:off x="3291840" y="2377440"/>
+            <a:ext cx="2560320" cy="320040"/>
+          </a:xfrm>
+          <a:prstGeom prst="roundRect">
+            <a:avLst>
+              <a:gd name="adj" fmla="val 22857"/>
+            </a:avLst>
+          </a:prstGeom>
+          <a:solidFill>
+            <a:schemeClr val="bg1"/>
+          </a:solidFill>
+          <a:ln w="12700">
+            <a:solidFill>
+              <a:schemeClr val="bg1"/>
+            </a:solidFill>
+          </a:ln>
+        </p:spPr>
+        <p:txBody>
+          <a:bodyPr wrap="square" lIns="762" tIns="762" rIns="762" bIns="762" rtlCol="0" anchor="ctr"/>
+          <a:lstStyle/>
+          <a:p>
+            <a:pPr algn="ctr" indent="0" marL="0">
               <a:buNone/>
             </a:pPr>
             <a:r>
               <a:rPr lang="en-US" sz="1100" b="1" dirty="0">
                 <a:solidFill>
-                  <a:schemeClr val="accent5"/>
-                </a:solidFill>
-              </a:rPr>
-              <a:t>FACTOR IDENTIFICATION</a:t>
+                  <a:schemeClr val="accent3"/>
+                </a:solidFill>
+              </a:rPr>
+              <a:t>EVIDENCE SELECTED</a:t>
             </a:r>
             <a:endParaRPr lang="en-US" sz="1100" dirty="0"/>
           </a:p>
@@ -12432,219 +12845,201 @@
       </p:sp>
       <p:sp>
         <p:nvSpPr>
-          <p:cNvPr id="13" name="Text 11"/>
-          <p:cNvSpPr txBox="1"/>
-          <p:nvPr/>
-        </p:nvSpPr>
-        <p:spPr>
-          <a:xfrm>
-            <a:off x="6263640" y="1371600"/>
-            <a:ext cx="2286000" cy="685800"/>
-          </a:xfrm>
-          <a:prstGeom prst="rect">
-            <a:avLst/>
-          </a:prstGeom>
-          <a:noFill/>
-          <a:ln/>
-        </p:spPr>
-        <p:txBody>
-          <a:bodyPr wrap="square" lIns="0" tIns="0" rIns="0" bIns="0" rtlCol="0" anchor="t"/>
-          <a:lstStyle/>
-          <a:p>
-            <a:pPr algn="l" indent="0" marL="0">
-              <a:buNone/>
-            </a:pPr>
-            <a:r>
-              <a:rPr lang="en-US" sz="4400" b="1" dirty="0">
-                <a:solidFill>
-                  <a:schemeClr val="tx1"/>
-                </a:solidFill>
-              </a:rPr>
-              <a:t>0.4419</a:t>
-            </a:r>
-            <a:endParaRPr lang="en-US" sz="4400" dirty="0"/>
-          </a:p>
-        </p:txBody>
-      </p:sp>
-      <p:sp>
-        <p:nvSpPr>
-          <p:cNvPr id="14" name="Text 12"/>
-          <p:cNvSpPr txBox="1"/>
-          <p:nvPr/>
-        </p:nvSpPr>
-        <p:spPr>
-          <a:xfrm>
-            <a:off x="6263640" y="2103120"/>
-            <a:ext cx="2286000" cy="274320"/>
-          </a:xfrm>
-          <a:prstGeom prst="rect">
-            <a:avLst/>
-          </a:prstGeom>
-          <a:noFill/>
-          <a:ln/>
-        </p:spPr>
-        <p:txBody>
-          <a:bodyPr wrap="square" lIns="0" tIns="0" rIns="0" bIns="0" rtlCol="0" anchor="t"/>
-          <a:lstStyle/>
-          <a:p>
-            <a:pPr algn="l" indent="0" marL="0">
-              <a:buNone/>
-            </a:pPr>
-            <a:r>
-              <a:rPr lang="en-US" sz="1400" dirty="0">
+          <p:cNvPr id="10" name="out"/>
+          <p:cNvSpPr/>
+          <p:nvPr/>
+        </p:nvSpPr>
+        <p:spPr>
+          <a:xfrm>
+            <a:off x="3291840" y="2697480"/>
+            <a:ext cx="2560320" cy="731520"/>
+          </a:xfrm>
+          <a:prstGeom prst="roundRect">
+            <a:avLst>
+              <a:gd name="adj" fmla="val 10000"/>
+            </a:avLst>
+          </a:prstGeom>
+          <a:solidFill>
+            <a:schemeClr val="accent1"/>
+          </a:solidFill>
+          <a:ln w="12700">
+            <a:solidFill>
+              <a:schemeClr val="accent1"/>
+            </a:solidFill>
+          </a:ln>
+        </p:spPr>
+        <p:txBody>
+          <a:bodyPr wrap="square" lIns="762" tIns="762" rIns="762" bIns="762" rtlCol="0" anchor="ctr"/>
+          <a:lstStyle/>
+          <a:p>
+            <a:pPr algn="ctr" indent="0" marL="0">
+              <a:buNone/>
+            </a:pPr>
+            <a:r>
+              <a:rPr lang="en-US" sz="1300" b="1" dirty="0">
+                <a:solidFill>
+                  <a:schemeClr val="bg1"/>
+                </a:solidFill>
+              </a:rPr>
+              <a:t>whole post (reference: “want to kill myself”)</a:t>
+            </a:r>
+            <a:endParaRPr lang="en-US" sz="1300" dirty="0"/>
+          </a:p>
+        </p:txBody>
+      </p:sp>
+      <p:sp>
+        <p:nvSpPr>
+          <p:cNvPr id="11" name="Shape 9"/>
+          <p:cNvSpPr/>
+          <p:nvPr/>
+        </p:nvSpPr>
+        <p:spPr>
+          <a:xfrm>
+            <a:off x="7406640" y="2057400"/>
+            <a:ext cx="0" cy="320040"/>
+          </a:xfrm>
+          <a:prstGeom prst="line">
+            <a:avLst/>
+          </a:prstGeom>
+          <a:noFill/>
+          <a:ln w="19050">
+            <a:solidFill>
+              <a:schemeClr val="accent3"/>
+            </a:solidFill>
+            <a:prstDash val="solid"/>
+            <a:tailEnd type="triangle"/>
+          </a:ln>
+        </p:spPr>
+      </p:sp>
+      <p:sp>
+        <p:nvSpPr>
+          <p:cNvPr id="12" name="lbl"/>
+          <p:cNvSpPr/>
+          <p:nvPr/>
+        </p:nvSpPr>
+        <p:spPr>
+          <a:xfrm>
+            <a:off x="6126480" y="2377440"/>
+            <a:ext cx="2560320" cy="320040"/>
+          </a:xfrm>
+          <a:prstGeom prst="roundRect">
+            <a:avLst>
+              <a:gd name="adj" fmla="val 22857"/>
+            </a:avLst>
+          </a:prstGeom>
+          <a:solidFill>
+            <a:schemeClr val="bg1"/>
+          </a:solidFill>
+          <a:ln w="12700">
+            <a:solidFill>
+              <a:schemeClr val="bg1"/>
+            </a:solidFill>
+          </a:ln>
+        </p:spPr>
+        <p:txBody>
+          <a:bodyPr wrap="square" lIns="762" tIns="762" rIns="762" bIns="762" rtlCol="0" anchor="ctr"/>
+          <a:lstStyle/>
+          <a:p>
+            <a:pPr algn="ctr" indent="0" marL="0">
+              <a:buNone/>
+            </a:pPr>
+            <a:r>
+              <a:rPr lang="en-US" sz="1100" b="1" dirty="0">
                 <a:solidFill>
                   <a:schemeClr val="accent3"/>
                 </a:solidFill>
               </a:rPr>
-              <a:t>Macro F1</a:t>
-            </a:r>
-            <a:endParaRPr lang="en-US" sz="1400" dirty="0"/>
-          </a:p>
-        </p:txBody>
-      </p:sp>
-      <p:graphicFrame>
-        <p:nvGraphicFramePr>
-          <p:cNvPr id="15" name="Chart 0" descr=""/>
-          <p:cNvGraphicFramePr/>
-          <p:nvPr/>
-        </p:nvGraphicFramePr>
-        <p:xfrm>
-          <a:off x="457200" y="2651760"/>
-          <a:ext cx="5120640" cy="2057400"/>
-        </p:xfrm>
-        <a:graphic xmlns:a="http://schemas.openxmlformats.org/drawingml/2006/main">
-          <a:graphicData uri="http://schemas.openxmlformats.org/drawingml/2006/chart">
-            <c:chart xmlns:c="http://schemas.openxmlformats.org/drawingml/2006/chart" r:id="rId1"/>
-          </a:graphicData>
-        </a:graphic>
-      </p:graphicFrame>
-      <p:sp>
-        <p:nvSpPr>
-          <p:cNvPr id="16" name="Text 13"/>
-          <p:cNvSpPr txBox="1"/>
-          <p:nvPr/>
-        </p:nvSpPr>
-        <p:spPr>
-          <a:xfrm>
-            <a:off x="5852160" y="2697480"/>
-            <a:ext cx="2834640" cy="274320"/>
-          </a:xfrm>
-          <a:prstGeom prst="rect">
-            <a:avLst/>
-          </a:prstGeom>
-          <a:noFill/>
-          <a:ln/>
-        </p:spPr>
-        <p:txBody>
-          <a:bodyPr wrap="square" lIns="0" tIns="0" rIns="0" bIns="0" rtlCol="0" anchor="t"/>
-          <a:lstStyle/>
-          <a:p>
-            <a:pPr algn="l" indent="0" marL="0">
-              <a:buNone/>
-            </a:pPr>
-            <a:r>
-              <a:rPr lang="en-US" sz="1400" b="1" dirty="0">
-                <a:solidFill>
-                  <a:schemeClr val="tx1"/>
-                </a:solidFill>
-              </a:rPr>
-              <a:t>Evaluation basis</a:t>
-            </a:r>
-            <a:endParaRPr lang="en-US" sz="1400" dirty="0"/>
-          </a:p>
-        </p:txBody>
-      </p:sp>
-      <p:sp>
-        <p:nvSpPr>
-          <p:cNvPr id="17" name="Text 14"/>
-          <p:cNvSpPr txBox="1"/>
-          <p:nvPr/>
-        </p:nvSpPr>
-        <p:spPr>
-          <a:xfrm>
-            <a:off x="5852160" y="3017520"/>
-            <a:ext cx="2834640" cy="1645920"/>
-          </a:xfrm>
-          <a:prstGeom prst="rect">
-            <a:avLst/>
-          </a:prstGeom>
-          <a:noFill/>
-          <a:ln/>
-        </p:spPr>
-        <p:txBody>
-          <a:bodyPr wrap="square" lIns="0" tIns="0" rIns="0" bIns="0" rtlCol="0" anchor="t"/>
-          <a:lstStyle/>
-          <a:p>
-            <a:pPr marL="342900" indent="-342900">
-              <a:spcAft>
-                <a:spcPts val="600"/>
-              </a:spcAft>
-              <a:buSzPct val="100000"/>
-              <a:buChar char="•"/>
-            </a:pPr>
-            <a:r>
-              <a:rPr lang="en-US" sz="1200" dirty="0">
-                <a:solidFill>
-                  <a:schemeClr val="tx1"/>
-                </a:solidFill>
-              </a:rPr>
-              <a:t>Held-out validation split: 380 posts, grouped by user</a:t>
-            </a:r>
-            <a:endParaRPr lang="en-US" sz="1200" dirty="0"/>
-          </a:p>
-          <a:p>
-            <a:pPr marL="342900" indent="-342900">
-              <a:spcAft>
-                <a:spcPts val="600"/>
-              </a:spcAft>
-              <a:buSzPct val="100000"/>
-              <a:buChar char="•"/>
-            </a:pPr>
-            <a:r>
-              <a:rPr lang="en-US" sz="1200" dirty="0">
-                <a:solidFill>
-                  <a:schemeClr val="tx1"/>
-                </a:solidFill>
-              </a:rPr>
-              <a:t>Evidence uses a local approximation of the official metric</a:t>
-            </a:r>
-            <a:endParaRPr lang="en-US" sz="1200" dirty="0"/>
-          </a:p>
-          <a:p>
-            <a:pPr marL="342900" indent="-342900">
-              <a:spcAft>
-                <a:spcPts val="600"/>
-              </a:spcAft>
-              <a:buSzPct val="100000"/>
-              <a:buChar char="•"/>
-            </a:pPr>
-            <a:r>
-              <a:rPr lang="en-US" sz="1200" dirty="0">
-                <a:solidFill>
-                  <a:schemeClr val="tx1"/>
-                </a:solidFill>
-              </a:rPr>
-              <a:t>Validation scores, not official leaderboard scores</a:t>
-            </a:r>
-            <a:endParaRPr lang="en-US" sz="1200" dirty="0"/>
-          </a:p>
-          <a:p>
-            <a:pPr marL="342900" indent="-342900">
-              <a:spcAft>
-                <a:spcPts val="600"/>
-              </a:spcAft>
-              <a:buSzPct val="100000"/>
-              <a:buChar char="•"/>
-            </a:pPr>
-            <a:r>
-              <a:rPr lang="en-US" sz="1200" dirty="0">
-                <a:solidFill>
-                  <a:schemeClr val="tx1"/>
-                </a:solidFill>
-              </a:rPr>
-              <a:t>The three metrics are not directly comparable</a:t>
-            </a:r>
-            <a:endParaRPr lang="en-US" sz="1200" dirty="0"/>
+              <a:t>FACTORS</a:t>
+            </a:r>
+            <a:endParaRPr lang="en-US" sz="1100" dirty="0"/>
+          </a:p>
+        </p:txBody>
+      </p:sp>
+      <p:sp>
+        <p:nvSpPr>
+          <p:cNvPr id="13" name="out"/>
+          <p:cNvSpPr/>
+          <p:nvPr/>
+        </p:nvSpPr>
+        <p:spPr>
+          <a:xfrm>
+            <a:off x="6126480" y="2697480"/>
+            <a:ext cx="2560320" cy="731520"/>
+          </a:xfrm>
+          <a:prstGeom prst="roundRect">
+            <a:avLst>
+              <a:gd name="adj" fmla="val 10000"/>
+            </a:avLst>
+          </a:prstGeom>
+          <a:solidFill>
+            <a:schemeClr val="accent5"/>
+          </a:solidFill>
+          <a:ln w="12700">
+            <a:solidFill>
+              <a:schemeClr val="accent5"/>
+            </a:solidFill>
+          </a:ln>
+        </p:spPr>
+        <p:txBody>
+          <a:bodyPr wrap="square" lIns="762" tIns="762" rIns="762" bIns="762" rtlCol="0" anchor="ctr"/>
+          <a:lstStyle/>
+          <a:p>
+            <a:pPr algn="ctr" indent="0" marL="0">
+              <a:buNone/>
+            </a:pPr>
+            <a:r>
+              <a:rPr lang="en-US" sz="1700" b="1" dirty="0">
+                <a:solidFill>
+                  <a:schemeClr val="bg1"/>
+                </a:solidFill>
+              </a:rPr>
+              <a:t>low self-esteem</a:t>
+            </a:r>
+            <a:endParaRPr lang="en-US" sz="1700" dirty="0"/>
+          </a:p>
+        </p:txBody>
+      </p:sp>
+      <p:sp>
+        <p:nvSpPr>
+          <p:cNvPr id="14" name="banner"/>
+          <p:cNvSpPr/>
+          <p:nvPr/>
+        </p:nvSpPr>
+        <p:spPr>
+          <a:xfrm>
+            <a:off x="457200" y="3657600"/>
+            <a:ext cx="8229600" cy="914400"/>
+          </a:xfrm>
+          <a:prstGeom prst="roundRect">
+            <a:avLst>
+              <a:gd name="adj" fmla="val 8000"/>
+            </a:avLst>
+          </a:prstGeom>
+          <a:solidFill>
+            <a:schemeClr val="tx1"/>
+          </a:solidFill>
+          <a:ln w="12700">
+            <a:solidFill>
+              <a:schemeClr val="tx1"/>
+            </a:solidFill>
+          </a:ln>
+        </p:spPr>
+        <p:txBody>
+          <a:bodyPr wrap="square" lIns="1905" tIns="1905" rIns="1905" bIns="1905" rtlCol="0" anchor="ctr"/>
+          <a:lstStyle/>
+          <a:p>
+            <a:pPr algn="ctr" indent="0" marL="0">
+              <a:buNone/>
+            </a:pPr>
+            <a:r>
+              <a:rPr lang="en-US" sz="1300" dirty="0">
+                <a:solidFill>
+                  <a:schemeClr val="bg1"/>
+                </a:solidFill>
+              </a:rPr>
+              <a:t>Every output span is an exact substring of the post: LLM proposals are matched against the text, and unmatched ones are dropped. The risk and factor labels match the annotation; the evidence span is longer than the reference.</a:t>
+            </a:r>
+            <a:endParaRPr lang="en-US" sz="1300" dirty="0"/>
           </a:p>
         </p:txBody>
       </p:sp>
